--- a/docs/Naming-Link_결제경로.pptx
+++ b/docs/Naming-Link_결제경로.pptx
@@ -14,6 +14,7 @@
     <p:sldId id="262" r:id="rId8"/>
     <p:sldId id="263" r:id="rId9"/>
     <p:sldId id="264" r:id="rId10"/>
+    <p:sldId id="265" r:id="rId16"/>
   </p:sldIdLst>
   <p:notesMasterIdLst>
     <p:notesMasterId r:id="rId11"/>
@@ -552,6 +553,76 @@
 </p:notes>
 </file>
 
+<file path=ppt/notesSlides/notesSlide10.xml><?xml version="1.0" encoding="utf-8"?>
+<p:notes xmlns:a="http://schemas.openxmlformats.org/drawingml/2006/main" xmlns:p="http://schemas.openxmlformats.org/presentationml/2006/main" xmlns:r="http://schemas.openxmlformats.org/officeDocument/2006/relationships">
+  <p:cSld>
+    <p:spTree>
+      <p:nvGrpSpPr>
+        <p:cNvPr id="1" name=""/>
+        <p:cNvGrpSpPr/>
+        <p:nvPr/>
+      </p:nvGrpSpPr>
+      <p:grpSpPr>
+        <a:xfrm>
+          <a:off x="0" y="0"/>
+          <a:ext cx="0" cy="0"/>
+          <a:chOff x="0" y="0"/>
+          <a:chExt cx="0" cy="0"/>
+        </a:xfrm>
+      </p:grpSpPr>
+      <p:sp>
+        <p:nvSpPr>
+          <p:cNvPr id="2" name="Slide Image Placeholder 1"/>
+          <p:cNvSpPr>
+            <a:spLocks noGrp="1"/>
+          </p:cNvSpPr>
+          <p:nvPr>
+            <p:ph type="sldImg" idx="2"/>
+          </p:nvPr>
+        </p:nvSpPr>
+        <p:spPr/>
+      </p:sp>
+      <p:sp>
+        <p:nvSpPr>
+          <p:cNvPr id="3" name="Notes Placeholder 2"/>
+          <p:cNvSpPr>
+            <a:spLocks noGrp="1"/>
+          </p:cNvSpPr>
+          <p:nvPr>
+            <p:ph type="body" idx="3" sz="quarter"/>
+          </p:nvPr>
+        </p:nvSpPr>
+        <p:spPr/>
+        <p:txBody>
+          <a:bodyPr/>
+          <a:lstStyle/>
+          <a:p>
+            <a:r>
+              <a:t>요구사항 1-4) 결제모듈 직접 연동 여부 Y, 2-3) 결제창 연동에 대응하는 슬라이드. 토스페이먼츠 결제 SDK는 후보 잠금 해제·한자 상세 결제 화면에 이미 연동되어 있으며, 운영 환경에 결제 키를 적용하면 결제창이 열린다.</a:t>
+            </a:r>
+          </a:p>
+        </p:txBody>
+      </p:sp>
+      <p:sp>
+        <p:nvSpPr>
+          <p:cNvPr id="4" name="Slide Number Placeholder 3"/>
+          <p:cNvSpPr>
+            <a:spLocks noGrp="1"/>
+          </p:cNvSpPr>
+          <p:nvPr>
+            <p:ph type="sldNum" idx="5" sz="quarter"/>
+          </p:nvPr>
+        </p:nvSpPr>
+        <p:spPr/>
+      </p:sp>
+    </p:spTree>
+  </p:cSld>
+  <p:clrMapOvr>
+    <a:masterClrMapping/>
+  </p:clrMapOvr>
+</p:notes>
+</file>
+
 <file path=ppt/notesSlides/notesSlide2.xml><?xml version="1.0" encoding="utf-8"?>
 <p:notes xmlns:a="http://schemas.openxmlformats.org/drawingml/2006/main" xmlns:r="http://schemas.openxmlformats.org/officeDocument/2006/relationships" xmlns:p="http://schemas.openxmlformats.org/presentationml/2006/main">
   <p:cSld>
@@ -685,10 +756,8 @@
           <a:lstStyle/>
           <a:p>
             <a:r>
-              <a:rPr lang="en-US" dirty="0"/>
-              <a:t>토스 가이드 7페이지 필수 6항목. 사업자등록증과 완전히 일치해야 함. 통신판매업신고번호는 신고 완료 후 값을 채워 넣을 것.</a:t>
-            </a:r>
-            <a:endParaRPr lang="en-US" dirty="0"/>
+              <a:t>토스 가이드 7페이지 필수 6항목. 사업자등록증과 완전히 일치해야 함. 통신판매업신고번호는 신고 완료 후 값을 채워 넣을 것 — 관리자 화면(site_contents 의 footer.global)과 packages/core/src/company.ts 를 함께 고친다.</a:t>
+            </a:r>
           </a:p>
         </p:txBody>
       </p:sp>
@@ -773,10 +842,8 @@
           <a:lstStyle/>
           <a:p>
             <a:r>
-              <a:rPr lang="en-US" dirty="0"/>
-              <a:t>결제 가능한 실제 판매 상품이 화면에 노출되어 있어야 함(테스트 상품 불가).</a:t>
-            </a:r>
-            <a:endParaRPr lang="en-US" dirty="0"/>
+              <a:t>결제 가능한 실제 판매 상품이 화면에 노출되어 있어야 함(테스트 상품 불가). 국내 결제 상품은 위 디지털 4종뿐이며, 이름 도장은 /ko/stamp-order 를 두지 않고 /en/stamp-order 로만 제공한다(2026-08-19 적용).</a:t>
+            </a:r>
           </a:p>
         </p:txBody>
       </p:sp>
@@ -861,10 +928,8 @@
           <a:lstStyle/>
           <a:p>
             <a:r>
-              <a:rPr lang="en-US" dirty="0"/>
-              <a:t>무형 상품이라 배송 절차가 없음을 명시. 실물 굿즈를 계약 범위에 포함하는 경우 이 슬라이드에 제작·배송 기간을 추가해야 함(6주 초과 시 입점 불가).</a:t>
-            </a:r>
-            <a:endParaRPr lang="en-US" dirty="0"/>
+              <a:t>무형 상품이라 배송 절차가 없음을 명시. 실물 굿즈(이름 도장)는 해외 페이팔 전용이라 토스페이먼츠 계약 범위 밖이며, 국내 판매 계획이 없다(2026-08-18 사업 결정).</a:t>
+            </a:r>
           </a:p>
         </p:txBody>
       </p:sp>
@@ -949,10 +1014,8 @@
           <a:lstStyle/>
           <a:p>
             <a:r>
-              <a:rPr lang="en-US" dirty="0"/>
-              <a:t>토스 가이드 9페이지에 해당. 환불 기준이 상품별로 구분되어 있어야 함.</a:t>
-            </a:r>
-            <a:endParaRPr lang="en-US" dirty="0"/>
+              <a:t>토스 가이드 9페이지에 해당. 환불 기준이 상품별로 구분되어 있어야 함. 절 번호는 운영 화면(/ko/refund-policy)에 실제로 표시되는 번호와 같다 — 판매하지 않는 상품의 절은 화면에서 빠지고 남은 절에 번호가 다시 매겨진다.</a:t>
+            </a:r>
           </a:p>
         </p:txBody>
       </p:sp>
@@ -2107,6 +2170,929 @@
 </p:sld>
 </file>
 
+<file path=ppt/slides/slide10.xml><?xml version="1.0" encoding="utf-8"?>
+<p:sld xmlns:a="http://schemas.openxmlformats.org/drawingml/2006/main" xmlns:r="http://schemas.openxmlformats.org/officeDocument/2006/relationships" xmlns:p="http://schemas.openxmlformats.org/presentationml/2006/main">
+  <p:cSld name="Slide 5">
+    <p:spTree>
+      <p:nvGrpSpPr>
+        <p:cNvPr id="1" name=""/>
+        <p:cNvGrpSpPr/>
+        <p:nvPr/>
+      </p:nvGrpSpPr>
+      <p:grpSpPr>
+        <a:xfrm>
+          <a:off x="0" y="0"/>
+          <a:ext cx="0" cy="0"/>
+          <a:chOff x="0" y="0"/>
+          <a:chExt cx="0" cy="0"/>
+        </a:xfrm>
+      </p:grpSpPr>
+      <p:sp>
+        <p:nvSpPr>
+          <p:cNvPr id="2" name="Shape 0"/>
+          <p:cNvSpPr/>
+          <p:nvPr/>
+        </p:nvSpPr>
+        <p:spPr>
+          <a:xfrm>
+            <a:off x="640080" y="566928"/>
+            <a:ext cx="475488" cy="475488"/>
+          </a:xfrm>
+          <a:prstGeom prst="ellipse">
+            <a:avLst/>
+          </a:prstGeom>
+          <a:solidFill>
+            <a:srgbClr val="028090"/>
+          </a:solidFill>
+          <a:ln/>
+        </p:spPr>
+      </p:sp>
+      <p:sp>
+        <p:nvSpPr>
+          <p:cNvPr id="3" name="Text 1"/>
+          <p:cNvSpPr/>
+          <p:nvPr/>
+        </p:nvSpPr>
+        <p:spPr>
+          <a:xfrm>
+            <a:off x="640080" y="566928"/>
+            <a:ext cx="475488" cy="475488"/>
+          </a:xfrm>
+          <a:prstGeom prst="rect">
+            <a:avLst/>
+          </a:prstGeom>
+          <a:noFill/>
+          <a:ln/>
+        </p:spPr>
+        <p:txBody>
+          <a:bodyPr wrap="square" lIns="0" tIns="0" rIns="0" bIns="0" rtlCol="0" anchor="ctr"/>
+          <a:lstStyle/>
+          <a:p>
+            <a:pPr algn="ctr" indent="0" marL="0">
+              <a:buNone/>
+            </a:pPr>
+            <a:r>
+              <a:rPr lang="en-US" sz="1600" b="1" dirty="0">
+                <a:solidFill>
+                  <a:srgbClr val="FFFFFF"/>
+                </a:solidFill>
+                <a:latin typeface="맑은 고딕" pitchFamily="34" charset="0"/>
+                <a:ea typeface="맑은 고딕" pitchFamily="34" charset="-122"/>
+                <a:cs typeface="맑은 고딕" pitchFamily="34" charset="-120"/>
+              </a:rPr>
+              <a:t>9</a:t>
+            </a:r>
+            <a:endParaRPr lang="en-US" sz="1600" dirty="0"/>
+          </a:p>
+        </p:txBody>
+      </p:sp>
+      <p:sp>
+        <p:nvSpPr>
+          <p:cNvPr id="4" name="Text 2"/>
+          <p:cNvSpPr/>
+          <p:nvPr/>
+        </p:nvSpPr>
+        <p:spPr>
+          <a:xfrm>
+            <a:off x="1261872" y="502920"/>
+            <a:ext cx="8412480" cy="457200"/>
+          </a:xfrm>
+          <a:prstGeom prst="rect">
+            <a:avLst/>
+          </a:prstGeom>
+          <a:noFill/>
+          <a:ln/>
+        </p:spPr>
+        <p:txBody>
+          <a:bodyPr wrap="square" lIns="0" tIns="0" rIns="0" bIns="0" rtlCol="0" anchor="ctr"/>
+          <a:lstStyle/>
+          <a:p>
+            <a:pPr algn="l" indent="0" marL="0">
+              <a:buNone/>
+            </a:pPr>
+            <a:r>
+              <a:rPr lang="en-US" sz="2600" b="1" dirty="0">
+                <a:solidFill>
+                  <a:srgbClr val="1F2933"/>
+                </a:solidFill>
+                <a:latin typeface="맑은 고딕" pitchFamily="34" charset="0"/>
+                <a:ea typeface="맑은 고딕" pitchFamily="34" charset="-122"/>
+                <a:cs typeface="맑은 고딕" pitchFamily="34" charset="-120"/>
+              </a:rPr>
+              <a:t>결제 연동 방식</a:t>
+            </a:r>
+            <a:endParaRPr lang="en-US" sz="2600" dirty="0"/>
+          </a:p>
+        </p:txBody>
+      </p:sp>
+      <p:sp>
+        <p:nvSpPr>
+          <p:cNvPr id="5" name="Text 3"/>
+          <p:cNvSpPr/>
+          <p:nvPr/>
+        </p:nvSpPr>
+        <p:spPr>
+          <a:xfrm>
+            <a:off x="1261872" y="960120"/>
+            <a:ext cx="10241280" cy="310896"/>
+          </a:xfrm>
+          <a:prstGeom prst="rect">
+            <a:avLst/>
+          </a:prstGeom>
+          <a:noFill/>
+          <a:ln/>
+        </p:spPr>
+        <p:txBody>
+          <a:bodyPr wrap="square" lIns="0" tIns="0" rIns="0" bIns="0" rtlCol="0" anchor="ctr"/>
+          <a:lstStyle/>
+          <a:p>
+            <a:pPr algn="l" indent="0" marL="0">
+              <a:buNone/>
+            </a:pPr>
+            <a:r>
+              <a:rPr lang="en-US" sz="1200" dirty="0">
+                <a:solidFill>
+                  <a:srgbClr val="6B7A85"/>
+                </a:solidFill>
+                <a:latin typeface="맑은 고딕" pitchFamily="34" charset="0"/>
+                <a:ea typeface="맑은 고딕" pitchFamily="34" charset="-122"/>
+                <a:cs typeface="맑은 고딕" pitchFamily="34" charset="-120"/>
+              </a:rPr>
+              <a:t>토스페이먼츠 결제 SDK를 서비스에 직접 연동했습니다. 호스팅 솔루션을 사용하지 않습니다.</a:t>
+            </a:r>
+            <a:endParaRPr lang="en-US" sz="1200" dirty="0"/>
+          </a:p>
+        </p:txBody>
+      </p:sp>
+      <p:sp>
+        <p:nvSpPr>
+          <p:cNvPr id="6" name="Shape 4"/>
+          <p:cNvSpPr/>
+          <p:nvPr/>
+        </p:nvSpPr>
+        <p:spPr>
+          <a:xfrm>
+            <a:off x="1261872" y="1335024"/>
+            <a:ext cx="4572000" cy="384048"/>
+          </a:xfrm>
+          <a:prstGeom prst="roundRect">
+            <a:avLst>
+              <a:gd name="adj" fmla="val 19048"/>
+            </a:avLst>
+          </a:prstGeom>
+          <a:solidFill>
+            <a:srgbClr val="F1F6F7"/>
+          </a:solidFill>
+          <a:ln w="12700">
+            <a:solidFill>
+              <a:srgbClr val="D6E2E5"/>
+            </a:solidFill>
+            <a:prstDash val="solid"/>
+          </a:ln>
+        </p:spPr>
+      </p:sp>
+      <p:sp>
+        <p:nvSpPr>
+          <p:cNvPr id="7" name="Text 5"/>
+          <p:cNvSpPr/>
+          <p:nvPr/>
+        </p:nvSpPr>
+        <p:spPr>
+          <a:xfrm>
+            <a:off x="1408176" y="1335024"/>
+            <a:ext cx="4279392" cy="384048"/>
+          </a:xfrm>
+          <a:prstGeom prst="rect">
+            <a:avLst/>
+          </a:prstGeom>
+          <a:noFill/>
+          <a:ln/>
+        </p:spPr>
+        <p:txBody>
+          <a:bodyPr wrap="square" lIns="0" tIns="0" rIns="0" bIns="0" rtlCol="0" anchor="ctr"/>
+          <a:lstStyle/>
+          <a:p>
+            <a:pPr algn="l" indent="0" marL="0">
+              <a:buNone/>
+            </a:pPr>
+            <a:r>
+              <a:rPr lang="en-US" sz="1100" b="1" dirty="0">
+                <a:solidFill>
+                  <a:srgbClr val="028090"/>
+                </a:solidFill>
+                <a:latin typeface="맑은 고딕" pitchFamily="34" charset="0"/>
+                <a:ea typeface="맑은 고딕" pitchFamily="34" charset="-122"/>
+                <a:cs typeface="맑은 고딕" pitchFamily="34" charset="-120"/>
+              </a:rPr>
+              <a:t>https://naming-link.com · Next.js 자체 구축</a:t>
+            </a:r>
+            <a:endParaRPr lang="en-US" sz="1100" dirty="0"/>
+          </a:p>
+        </p:txBody>
+      </p:sp>
+      <p:sp>
+        <p:nvSpPr>
+          <p:cNvPr id="8" name="Shape 6"/>
+          <p:cNvSpPr/>
+          <p:nvPr/>
+        </p:nvSpPr>
+        <p:spPr>
+          <a:xfrm>
+            <a:off x="685800" y="2011680"/>
+            <a:ext cx="5532120" cy="1874520"/>
+          </a:xfrm>
+          <a:prstGeom prst="roundRect">
+            <a:avLst>
+              <a:gd name="adj" fmla="val 3902"/>
+            </a:avLst>
+          </a:prstGeom>
+          <a:solidFill>
+            <a:srgbClr val="FFFFFF"/>
+          </a:solidFill>
+          <a:ln w="12700">
+            <a:solidFill>
+              <a:srgbClr val="D6E2E5"/>
+            </a:solidFill>
+            <a:prstDash val="solid"/>
+          </a:ln>
+          <a:effectLst>
+            <a:outerShdw sx="100000" sy="100000" kx="0" ky="0" algn="bl" rotWithShape="0" blurRad="101600" dist="12700" dir="5400000">
+              <a:srgbClr val="000000">
+                <a:alpha val="8000"/>
+              </a:srgbClr>
+            </a:outerShdw>
+          </a:effectLst>
+        </p:spPr>
+      </p:sp>
+      <p:sp>
+        <p:nvSpPr>
+          <p:cNvPr id="9" name="Text 7"/>
+          <p:cNvSpPr/>
+          <p:nvPr/>
+        </p:nvSpPr>
+        <p:spPr>
+          <a:xfrm>
+            <a:off x="941832" y="2194560"/>
+            <a:ext cx="5020056" cy="292608"/>
+          </a:xfrm>
+          <a:prstGeom prst="rect">
+            <a:avLst/>
+          </a:prstGeom>
+          <a:noFill/>
+          <a:ln/>
+        </p:spPr>
+        <p:txBody>
+          <a:bodyPr wrap="square" lIns="0" tIns="0" rIns="0" bIns="0" rtlCol="0" anchor="ctr"/>
+          <a:lstStyle/>
+          <a:p>
+            <a:pPr indent="0" marL="0">
+              <a:buNone/>
+            </a:pPr>
+            <a:r>
+              <a:rPr lang="en-US" sz="1400" b="1" dirty="0">
+                <a:solidFill>
+                  <a:srgbClr val="028090"/>
+                </a:solidFill>
+                <a:latin typeface="맑은 고딕" pitchFamily="34" charset="0"/>
+                <a:ea typeface="맑은 고딕" pitchFamily="34" charset="-122"/>
+                <a:cs typeface="맑은 고딕" pitchFamily="34" charset="-120"/>
+              </a:rPr>
+              <a:t>직접 연동 여부 — Y</a:t>
+            </a:r>
+            <a:endParaRPr lang="en-US" sz="1400" dirty="0"/>
+          </a:p>
+        </p:txBody>
+      </p:sp>
+      <p:sp>
+        <p:nvSpPr>
+          <p:cNvPr id="10" name="Text 8"/>
+          <p:cNvSpPr/>
+          <p:nvPr/>
+        </p:nvSpPr>
+        <p:spPr>
+          <a:xfrm>
+            <a:off x="941832" y="2542032"/>
+            <a:ext cx="5020056" cy="1143000"/>
+          </a:xfrm>
+          <a:prstGeom prst="rect">
+            <a:avLst/>
+          </a:prstGeom>
+          <a:noFill/>
+          <a:ln/>
+        </p:spPr>
+        <p:txBody>
+          <a:bodyPr wrap="square" lIns="0" tIns="0" rIns="0" bIns="0" rtlCol="0" anchor="t"/>
+          <a:lstStyle/>
+          <a:p>
+            <a:pPr marL="342900" indent="-342900">
+              <a:spcAft>
+                <a:spcPts val="600"/>
+              </a:spcAft>
+              <a:buSzPct val="100000"/>
+              <a:buChar char="•"/>
+            </a:pPr>
+            <a:r>
+              <a:rPr lang="en-US" sz="1150" dirty="0">
+                <a:solidFill>
+                  <a:srgbClr val="1F2933"/>
+                </a:solidFill>
+                <a:latin typeface="맑은 고딕" pitchFamily="34" charset="0"/>
+                <a:ea typeface="맑은 고딕" pitchFamily="34" charset="-122"/>
+                <a:cs typeface="맑은 고딕" pitchFamily="34" charset="-120"/>
+              </a:rPr>
+              <a:t>카페24·식스샵·아임웹 등 호스팅 솔루션 미사용</a:t>
+            </a:r>
+            <a:endParaRPr lang="en-US" sz="1150" dirty="0"/>
+          </a:p>
+          <a:p>
+            <a:pPr marL="342900" indent="-342900">
+              <a:spcAft>
+                <a:spcPts val="600"/>
+              </a:spcAft>
+              <a:buSzPct val="100000"/>
+              <a:buChar char="•"/>
+            </a:pPr>
+            <a:r>
+              <a:rPr lang="en-US" sz="1150" dirty="0">
+                <a:solidFill>
+                  <a:srgbClr val="1F2933"/>
+                </a:solidFill>
+                <a:latin typeface="맑은 고딕" pitchFamily="34" charset="0"/>
+                <a:ea typeface="맑은 고딕" pitchFamily="34" charset="-122"/>
+                <a:cs typeface="맑은 고딕" pitchFamily="34" charset="-120"/>
+              </a:rPr>
+              <a:t>Next.js로 자체 구축한 웹 서비스에 결제 SDK 직접 연동</a:t>
+            </a:r>
+            <a:endParaRPr lang="en-US" sz="1150" dirty="0"/>
+          </a:p>
+          <a:p>
+            <a:pPr marL="342900" indent="-342900">
+              <a:spcAft>
+                <a:spcPts val="600"/>
+              </a:spcAft>
+              <a:buSzPct val="100000"/>
+              <a:buChar char="•"/>
+            </a:pPr>
+            <a:r>
+              <a:rPr lang="en-US" sz="1150" dirty="0">
+                <a:solidFill>
+                  <a:srgbClr val="1F2933"/>
+                </a:solidFill>
+                <a:latin typeface="맑은 고딕" pitchFamily="34" charset="0"/>
+                <a:ea typeface="맑은 고딕" pitchFamily="34" charset="-122"/>
+                <a:cs typeface="맑은 고딕" pitchFamily="34" charset="-120"/>
+              </a:rPr>
+              <a:t>인프라 호스팅은 Vercel Inc. (쇼핑몰 솔루션 아님)</a:t>
+            </a:r>
+            <a:endParaRPr lang="en-US" sz="1150" dirty="0"/>
+          </a:p>
+        </p:txBody>
+      </p:sp>
+      <p:sp>
+        <p:nvSpPr>
+          <p:cNvPr id="11" name="Shape 9"/>
+          <p:cNvSpPr/>
+          <p:nvPr/>
+        </p:nvSpPr>
+        <p:spPr>
+          <a:xfrm>
+            <a:off x="685800" y="4069080"/>
+            <a:ext cx="5532120" cy="2075688"/>
+          </a:xfrm>
+          <a:prstGeom prst="roundRect">
+            <a:avLst>
+              <a:gd name="adj" fmla="val 3524"/>
+            </a:avLst>
+          </a:prstGeom>
+          <a:solidFill>
+            <a:srgbClr val="FFFFFF"/>
+          </a:solidFill>
+          <a:ln w="12700">
+            <a:solidFill>
+              <a:srgbClr val="D6E2E5"/>
+            </a:solidFill>
+            <a:prstDash val="solid"/>
+          </a:ln>
+          <a:effectLst>
+            <a:outerShdw sx="100000" sy="100000" kx="0" ky="0" algn="bl" rotWithShape="0" blurRad="101600" dist="12700" dir="5400000">
+              <a:srgbClr val="000000">
+                <a:alpha val="8000"/>
+              </a:srgbClr>
+            </a:outerShdw>
+          </a:effectLst>
+        </p:spPr>
+      </p:sp>
+      <p:sp>
+        <p:nvSpPr>
+          <p:cNvPr id="12" name="Text 10"/>
+          <p:cNvSpPr/>
+          <p:nvPr/>
+        </p:nvSpPr>
+        <p:spPr>
+          <a:xfrm>
+            <a:off x="941832" y="4251960"/>
+            <a:ext cx="5020056" cy="292608"/>
+          </a:xfrm>
+          <a:prstGeom prst="rect">
+            <a:avLst/>
+          </a:prstGeom>
+          <a:noFill/>
+          <a:ln/>
+        </p:spPr>
+        <p:txBody>
+          <a:bodyPr wrap="square" lIns="0" tIns="0" rIns="0" bIns="0" rtlCol="0" anchor="ctr"/>
+          <a:lstStyle/>
+          <a:p>
+            <a:pPr indent="0" marL="0">
+              <a:buNone/>
+            </a:pPr>
+            <a:r>
+              <a:rPr lang="en-US" sz="1400" b="1" dirty="0">
+                <a:solidFill>
+                  <a:srgbClr val="028090"/>
+                </a:solidFill>
+                <a:latin typeface="맑은 고딕" pitchFamily="34" charset="0"/>
+                <a:ea typeface="맑은 고딕" pitchFamily="34" charset="-122"/>
+                <a:cs typeface="맑은 고딕" pitchFamily="34" charset="-120"/>
+              </a:rPr>
+              <a:t>결제 금액 확정과 승인 검증</a:t>
+            </a:r>
+            <a:endParaRPr lang="en-US" sz="1400" dirty="0"/>
+          </a:p>
+        </p:txBody>
+      </p:sp>
+      <p:sp>
+        <p:nvSpPr>
+          <p:cNvPr id="13" name="Text 11"/>
+          <p:cNvSpPr/>
+          <p:nvPr/>
+        </p:nvSpPr>
+        <p:spPr>
+          <a:xfrm>
+            <a:off x="941832" y="4599432"/>
+            <a:ext cx="5020056" cy="1344168"/>
+          </a:xfrm>
+          <a:prstGeom prst="rect">
+            <a:avLst/>
+          </a:prstGeom>
+          <a:noFill/>
+          <a:ln/>
+        </p:spPr>
+        <p:txBody>
+          <a:bodyPr wrap="square" lIns="0" tIns="0" rIns="0" bIns="0" rtlCol="0" anchor="t"/>
+          <a:lstStyle/>
+          <a:p>
+            <a:pPr marL="342900" indent="-342900">
+              <a:spcAft>
+                <a:spcPts val="600"/>
+              </a:spcAft>
+              <a:buSzPct val="100000"/>
+              <a:buChar char="•"/>
+            </a:pPr>
+            <a:r>
+              <a:rPr lang="en-US" sz="1150" dirty="0">
+                <a:solidFill>
+                  <a:srgbClr val="1F2933"/>
+                </a:solidFill>
+                <a:latin typeface="맑은 고딕" pitchFamily="34" charset="0"/>
+                <a:ea typeface="맑은 고딕" pitchFamily="34" charset="-122"/>
+                <a:cs typeface="맑은 고딕" pitchFamily="34" charset="-120"/>
+              </a:rPr>
+              <a:t>결제 금액은 서버가 상품표에서 읽은 값으로 확정합니다.</a:t>
+            </a:r>
+            <a:endParaRPr lang="en-US" sz="1150" dirty="0"/>
+          </a:p>
+          <a:p>
+            <a:pPr marL="342900" indent="-342900">
+              <a:spcAft>
+                <a:spcPts val="600"/>
+              </a:spcAft>
+              <a:buSzPct val="100000"/>
+              <a:buChar char="•"/>
+            </a:pPr>
+            <a:r>
+              <a:rPr lang="en-US" sz="1150" dirty="0">
+                <a:solidFill>
+                  <a:srgbClr val="1F2933"/>
+                </a:solidFill>
+                <a:latin typeface="맑은 고딕" pitchFamily="34" charset="0"/>
+                <a:ea typeface="맑은 고딕" pitchFamily="34" charset="-122"/>
+                <a:cs typeface="맑은 고딕" pitchFamily="34" charset="-120"/>
+              </a:rPr>
+              <a:t>화면이 보낸 금액을 신뢰하지 않습니다.</a:t>
+            </a:r>
+            <a:endParaRPr lang="en-US" sz="1150" dirty="0"/>
+          </a:p>
+          <a:p>
+            <a:pPr marL="342900" indent="-342900">
+              <a:spcAft>
+                <a:spcPts val="600"/>
+              </a:spcAft>
+              <a:buSzPct val="100000"/>
+              <a:buChar char="•"/>
+            </a:pPr>
+            <a:r>
+              <a:rPr lang="en-US" sz="1150" dirty="0">
+                <a:solidFill>
+                  <a:srgbClr val="1F2933"/>
+                </a:solidFill>
+                <a:latin typeface="맑은 고딕" pitchFamily="34" charset="0"/>
+                <a:ea typeface="맑은 고딕" pitchFamily="34" charset="-122"/>
+                <a:cs typeface="맑은 고딕" pitchFamily="34" charset="-120"/>
+              </a:rPr>
+              <a:t>결제 승인 결과를 서버에서 검증한 뒤 리포트 생성을 시작합니다.</a:t>
+            </a:r>
+            <a:endParaRPr lang="en-US" sz="1150" dirty="0"/>
+          </a:p>
+          <a:p>
+            <a:pPr marL="342900" indent="-342900">
+              <a:spcAft>
+                <a:spcPts val="600"/>
+              </a:spcAft>
+              <a:buSzPct val="100000"/>
+              <a:buChar char="•"/>
+            </a:pPr>
+            <a:r>
+              <a:rPr lang="en-US" sz="1150" dirty="0">
+                <a:solidFill>
+                  <a:srgbClr val="1F2933"/>
+                </a:solidFill>
+                <a:latin typeface="맑은 고딕" pitchFamily="34" charset="0"/>
+                <a:ea typeface="맑은 고딕" pitchFamily="34" charset="-122"/>
+                <a:cs typeface="맑은 고딕" pitchFamily="34" charset="-120"/>
+              </a:rPr>
+              <a:t>비회원 결제이며 별도 계정이 필요하지 않습니다.</a:t>
+            </a:r>
+            <a:endParaRPr lang="en-US" sz="1150" dirty="0"/>
+          </a:p>
+        </p:txBody>
+      </p:sp>
+      <p:sp>
+        <p:nvSpPr>
+          <p:cNvPr id="16" name="Shape 6"/>
+          <p:cNvSpPr/>
+          <p:nvPr/>
+        </p:nvSpPr>
+        <p:spPr>
+          <a:xfrm>
+            <a:off x="6446520" y="2011680"/>
+            <a:ext cx="5029200" cy="1874519"/>
+          </a:xfrm>
+          <a:prstGeom prst="roundRect">
+            <a:avLst>
+              <a:gd name="adj" fmla="val 3902"/>
+            </a:avLst>
+          </a:prstGeom>
+          <a:solidFill>
+            <a:srgbClr val="FFFFFF"/>
+          </a:solidFill>
+          <a:ln w="12700">
+            <a:solidFill>
+              <a:srgbClr val="D6E2E5"/>
+            </a:solidFill>
+            <a:prstDash val="solid"/>
+          </a:ln>
+          <a:effectLst>
+            <a:outerShdw sx="100000" sy="100000" kx="0" ky="0" algn="bl" rotWithShape="0" blurRad="101600" dist="12700" dir="5400000">
+              <a:srgbClr val="000000">
+                <a:alpha val="8000"/>
+              </a:srgbClr>
+            </a:outerShdw>
+          </a:effectLst>
+        </p:spPr>
+      </p:sp>
+      <p:sp>
+        <p:nvSpPr>
+          <p:cNvPr id="17" name="Text 7"/>
+          <p:cNvSpPr/>
+          <p:nvPr/>
+        </p:nvSpPr>
+        <p:spPr>
+          <a:xfrm>
+            <a:off x="6702552" y="2194560"/>
+            <a:ext cx="4517136" cy="292608"/>
+          </a:xfrm>
+          <a:prstGeom prst="rect">
+            <a:avLst/>
+          </a:prstGeom>
+          <a:noFill/>
+          <a:ln/>
+        </p:spPr>
+        <p:txBody>
+          <a:bodyPr wrap="square" lIns="0" tIns="0" rIns="0" bIns="0" rtlCol="0" anchor="ctr"/>
+          <a:lstStyle/>
+          <a:p>
+            <a:pPr indent="0" marL="0">
+              <a:buNone/>
+            </a:pPr>
+            <a:r>
+              <a:rPr lang="en-US" sz="1400" b="1" dirty="0">
+                <a:solidFill>
+                  <a:srgbClr val="028090"/>
+                </a:solidFill>
+                <a:latin typeface="맑은 고딕" pitchFamily="34" charset="0"/>
+                <a:ea typeface="맑은 고딕" pitchFamily="34" charset="-122"/>
+                <a:cs typeface="맑은 고딕" pitchFamily="34" charset="-120"/>
+              </a:rPr>
+              <a:t>국내와 해외 결제 경로 분리</a:t>
+            </a:r>
+            <a:endParaRPr lang="en-US" sz="1400" dirty="0"/>
+          </a:p>
+        </p:txBody>
+      </p:sp>
+      <p:sp>
+        <p:nvSpPr>
+          <p:cNvPr id="18" name="Text 8"/>
+          <p:cNvSpPr/>
+          <p:nvPr/>
+        </p:nvSpPr>
+        <p:spPr>
+          <a:xfrm>
+            <a:off x="6702552" y="2542032"/>
+            <a:ext cx="4517136" cy="1234440"/>
+          </a:xfrm>
+          <a:prstGeom prst="rect">
+            <a:avLst/>
+          </a:prstGeom>
+          <a:noFill/>
+          <a:ln/>
+        </p:spPr>
+        <p:txBody>
+          <a:bodyPr wrap="square" lIns="0" tIns="0" rIns="0" bIns="0" rtlCol="0" anchor="t"/>
+          <a:lstStyle/>
+          <a:p>
+            <a:pPr marL="342900" indent="-342900">
+              <a:spcAft>
+                <a:spcPts val="600"/>
+              </a:spcAft>
+              <a:buSzPct val="100000"/>
+              <a:buChar char="•"/>
+            </a:pPr>
+            <a:r>
+              <a:rPr lang="en-US" sz="1150" dirty="0">
+                <a:solidFill>
+                  <a:srgbClr val="1F2933"/>
+                </a:solidFill>
+                <a:latin typeface="맑은 고딕" pitchFamily="34" charset="0"/>
+                <a:ea typeface="맑은 고딕" pitchFamily="34" charset="-122"/>
+                <a:cs typeface="맑은 고딕" pitchFamily="34" charset="-120"/>
+              </a:rPr>
+              <a:t>국내(원화) 결제: 토스페이먼츠 직접 연동</a:t>
+            </a:r>
+            <a:endParaRPr lang="en-US" sz="1150" dirty="0"/>
+          </a:p>
+          <a:p>
+            <a:pPr marL="342900" indent="-342900">
+              <a:spcAft>
+                <a:spcPts val="600"/>
+              </a:spcAft>
+              <a:buSzPct val="100000"/>
+              <a:buChar char="•"/>
+            </a:pPr>
+            <a:r>
+              <a:rPr lang="en-US" sz="1150" dirty="0">
+                <a:solidFill>
+                  <a:srgbClr val="1F2933"/>
+                </a:solidFill>
+                <a:latin typeface="맑은 고딕" pitchFamily="34" charset="0"/>
+                <a:ea typeface="맑은 고딕" pitchFamily="34" charset="-122"/>
+                <a:cs typeface="맑은 고딕" pitchFamily="34" charset="-120"/>
+              </a:rPr>
+              <a:t>해외(US$) 결제: 포트원 경유 페이팔</a:t>
+            </a:r>
+            <a:endParaRPr lang="en-US" sz="1150" dirty="0"/>
+          </a:p>
+          <a:p>
+            <a:pPr marL="342900" indent="-342900">
+              <a:spcAft>
+                <a:spcPts val="600"/>
+              </a:spcAft>
+              <a:buSzPct val="100000"/>
+              <a:buChar char="•"/>
+            </a:pPr>
+            <a:r>
+              <a:rPr lang="en-US" sz="1150" dirty="0">
+                <a:solidFill>
+                  <a:srgbClr val="1F2933"/>
+                </a:solidFill>
+                <a:latin typeface="맑은 고딕" pitchFamily="34" charset="0"/>
+                <a:ea typeface="맑은 고딕" pitchFamily="34" charset="-122"/>
+                <a:cs typeface="맑은 고딕" pitchFamily="34" charset="-120"/>
+              </a:rPr>
+              <a:t>두 경로는 상품 단위로 완전히 분리되어 있습니다.</a:t>
+            </a:r>
+            <a:endParaRPr lang="en-US" sz="1150" dirty="0"/>
+          </a:p>
+          <a:p>
+            <a:pPr marL="342900" indent="-342900">
+              <a:spcAft>
+                <a:spcPts val="600"/>
+              </a:spcAft>
+              <a:buSzPct val="100000"/>
+              <a:buChar char="•"/>
+            </a:pPr>
+            <a:r>
+              <a:rPr lang="en-US" sz="1150" dirty="0">
+                <a:solidFill>
+                  <a:srgbClr val="1F2933"/>
+                </a:solidFill>
+                <a:latin typeface="맑은 고딕" pitchFamily="34" charset="0"/>
+                <a:ea typeface="맑은 고딕" pitchFamily="34" charset="-122"/>
+                <a:cs typeface="맑은 고딕" pitchFamily="34" charset="-120"/>
+              </a:rPr>
+              <a:t>토스페이먼츠 계약 범위는 국내 디지털 4종입니다.</a:t>
+            </a:r>
+            <a:endParaRPr lang="en-US" sz="1150" dirty="0"/>
+          </a:p>
+        </p:txBody>
+      </p:sp>
+      <p:sp>
+        <p:nvSpPr>
+          <p:cNvPr id="19" name="Shape 6"/>
+          <p:cNvSpPr/>
+          <p:nvPr/>
+        </p:nvSpPr>
+        <p:spPr>
+          <a:xfrm>
+            <a:off x="6446520" y="4069080"/>
+            <a:ext cx="5029200" cy="2075688"/>
+          </a:xfrm>
+          <a:prstGeom prst="roundRect">
+            <a:avLst>
+              <a:gd name="adj" fmla="val 3902"/>
+            </a:avLst>
+          </a:prstGeom>
+          <a:solidFill>
+            <a:srgbClr val="FFFFFF"/>
+          </a:solidFill>
+          <a:ln w="12700">
+            <a:solidFill>
+              <a:srgbClr val="D6E2E5"/>
+            </a:solidFill>
+            <a:prstDash val="solid"/>
+          </a:ln>
+          <a:effectLst>
+            <a:outerShdw sx="100000" sy="100000" kx="0" ky="0" algn="bl" rotWithShape="0" blurRad="101600" dist="12700" dir="5400000">
+              <a:srgbClr val="000000">
+                <a:alpha val="8000"/>
+              </a:srgbClr>
+            </a:outerShdw>
+          </a:effectLst>
+        </p:spPr>
+      </p:sp>
+      <p:sp>
+        <p:nvSpPr>
+          <p:cNvPr id="20" name="Text 7"/>
+          <p:cNvSpPr/>
+          <p:nvPr/>
+        </p:nvSpPr>
+        <p:spPr>
+          <a:xfrm>
+            <a:off x="6702552" y="4251960"/>
+            <a:ext cx="4517136" cy="292608"/>
+          </a:xfrm>
+          <a:prstGeom prst="rect">
+            <a:avLst/>
+          </a:prstGeom>
+          <a:noFill/>
+          <a:ln/>
+        </p:spPr>
+        <p:txBody>
+          <a:bodyPr wrap="square" lIns="0" tIns="0" rIns="0" bIns="0" rtlCol="0" anchor="ctr"/>
+          <a:lstStyle/>
+          <a:p>
+            <a:pPr indent="0" marL="0">
+              <a:buNone/>
+            </a:pPr>
+            <a:r>
+              <a:rPr lang="en-US" sz="1400" b="1" dirty="0">
+                <a:solidFill>
+                  <a:srgbClr val="028090"/>
+                </a:solidFill>
+                <a:latin typeface="맑은 고딕" pitchFamily="34" charset="0"/>
+                <a:ea typeface="맑은 고딕" pitchFamily="34" charset="-122"/>
+                <a:cs typeface="맑은 고딕" pitchFamily="34" charset="-120"/>
+              </a:rPr>
+              <a:t>연동 상태와 확인 방법</a:t>
+            </a:r>
+            <a:endParaRPr lang="en-US" sz="1400" dirty="0"/>
+          </a:p>
+        </p:txBody>
+      </p:sp>
+      <p:sp>
+        <p:nvSpPr>
+          <p:cNvPr id="21" name="Text 8"/>
+          <p:cNvSpPr/>
+          <p:nvPr/>
+        </p:nvSpPr>
+        <p:spPr>
+          <a:xfrm>
+            <a:off x="6702552" y="4599432"/>
+            <a:ext cx="4517136" cy="1463040"/>
+          </a:xfrm>
+          <a:prstGeom prst="rect">
+            <a:avLst/>
+          </a:prstGeom>
+          <a:noFill/>
+          <a:ln/>
+        </p:spPr>
+        <p:txBody>
+          <a:bodyPr wrap="square" lIns="0" tIns="0" rIns="0" bIns="0" rtlCol="0" anchor="t"/>
+          <a:lstStyle/>
+          <a:p>
+            <a:pPr marL="342900" indent="-342900">
+              <a:spcAft>
+                <a:spcPts val="600"/>
+              </a:spcAft>
+              <a:buSzPct val="100000"/>
+              <a:buChar char="•"/>
+            </a:pPr>
+            <a:r>
+              <a:rPr lang="en-US" sz="1150" dirty="0">
+                <a:solidFill>
+                  <a:srgbClr val="1F2933"/>
+                </a:solidFill>
+                <a:latin typeface="맑은 고딕" pitchFamily="34" charset="0"/>
+                <a:ea typeface="맑은 고딕" pitchFamily="34" charset="-122"/>
+                <a:cs typeface="맑은 고딕" pitchFamily="34" charset="-120"/>
+              </a:rPr>
+              <a:t>결제 SDK는 후보 잠금 해제·한자 상세 결제 화면에 연동되어 있습니다.</a:t>
+            </a:r>
+            <a:endParaRPr lang="en-US" sz="1150" dirty="0"/>
+          </a:p>
+          <a:p>
+            <a:pPr marL="342900" indent="-342900">
+              <a:spcAft>
+                <a:spcPts val="600"/>
+              </a:spcAft>
+              <a:buSzPct val="100000"/>
+              <a:buChar char="•"/>
+            </a:pPr>
+            <a:r>
+              <a:rPr lang="en-US" sz="1150" dirty="0">
+                <a:solidFill>
+                  <a:srgbClr val="1F2933"/>
+                </a:solidFill>
+                <a:latin typeface="맑은 고딕" pitchFamily="34" charset="0"/>
+                <a:ea typeface="맑은 고딕" pitchFamily="34" charset="-122"/>
+                <a:cs typeface="맑은 고딕" pitchFamily="34" charset="-120"/>
+              </a:rPr>
+              <a:t>운영 환경에 결제 키를 적용하면 결제창이 열립니다.</a:t>
+            </a:r>
+            <a:endParaRPr lang="en-US" sz="1150" dirty="0"/>
+          </a:p>
+          <a:p>
+            <a:pPr marL="342900" indent="-342900">
+              <a:spcAft>
+                <a:spcPts val="600"/>
+              </a:spcAft>
+              <a:buSzPct val="100000"/>
+              <a:buChar char="•"/>
+            </a:pPr>
+            <a:r>
+              <a:rPr lang="en-US" sz="1150" dirty="0">
+                <a:solidFill>
+                  <a:srgbClr val="1F2933"/>
+                </a:solidFill>
+                <a:latin typeface="맑은 고딕" pitchFamily="34" charset="0"/>
+                <a:ea typeface="맑은 고딕" pitchFamily="34" charset="-122"/>
+                <a:cs typeface="맑은 고딕" pitchFamily="34" charset="-120"/>
+              </a:rPr>
+              <a:t>심사 기간에는 토스페이먼츠 테스트 키로 결제창을 확인합니다.</a:t>
+            </a:r>
+            <a:endParaRPr lang="en-US" sz="1150" dirty="0"/>
+          </a:p>
+          <a:p>
+            <a:pPr marL="342900" indent="-342900">
+              <a:spcAft>
+                <a:spcPts val="600"/>
+              </a:spcAft>
+              <a:buSzPct val="100000"/>
+              <a:buChar char="•"/>
+            </a:pPr>
+            <a:r>
+              <a:rPr lang="en-US" sz="1150" dirty="0">
+                <a:solidFill>
+                  <a:srgbClr val="1F2933"/>
+                </a:solidFill>
+                <a:latin typeface="맑은 고딕" pitchFamily="34" charset="0"/>
+                <a:ea typeface="맑은 고딕" pitchFamily="34" charset="-122"/>
+                <a:cs typeface="맑은 고딕" pitchFamily="34" charset="-120"/>
+              </a:rPr>
+              <a:t>이름 도장은 해외 전용이라 한국어 주소를 제공하지 않습니다 (/ko/stamp-order → /en/stamp-order).</a:t>
+            </a:r>
+            <a:endParaRPr lang="en-US" sz="1150" dirty="0"/>
+          </a:p>
+        </p:txBody>
+      </p:sp>
+    </p:spTree>
+  </p:cSld>
+  <p:clrMapOvr>
+    <a:masterClrMapping/>
+  </p:clrMapOvr>
+</p:sld>
+</file>
+
 <file path=ppt/slides/slide2.xml><?xml version="1.0" encoding="utf-8"?>
 <p:sld xmlns:a="http://schemas.openxmlformats.org/drawingml/2006/main" xmlns:r="http://schemas.openxmlformats.org/officeDocument/2006/relationships" xmlns:p="http://schemas.openxmlformats.org/presentationml/2006/main">
   <p:cSld name="Slide 2">
@@ -4221,7 +5207,7 @@
                           <a:ea typeface="맑은 고딕" pitchFamily="34" charset="-122"/>
                           <a:cs typeface="맑은 고딕" pitchFamily="34" charset="-120"/>
                         </a:rPr>
-                        <a:t>신고 후 기재</a:t>
+                        <a:t>통신판매업 신고 준비 중</a:t>
                       </a:r>
                       <a:endParaRPr lang="en-US" sz="1150" dirty="0">
                         <a:latin typeface="맑은 고딕" charset="0"/>
@@ -4654,6 +5640,45 @@
               <a:t>홈페이지 하단 푸터 전체가 보이도록 캡처</a:t>
             </a:r>
             <a:endParaRPr lang="en-US" sz="1500" dirty="0"/>
+          </a:p>
+        </p:txBody>
+      </p:sp>
+      <p:sp>
+        <p:nvSpPr>
+          <p:cNvPr id="11" name="Text 3"/>
+          <p:cNvSpPr/>
+          <p:nvPr/>
+        </p:nvSpPr>
+        <p:spPr>
+          <a:xfrm>
+            <a:off x="685800" y="4846320"/>
+            <a:ext cx="5532120" cy="640080"/>
+          </a:xfrm>
+          <a:prstGeom prst="rect">
+            <a:avLst/>
+          </a:prstGeom>
+          <a:noFill/>
+          <a:ln/>
+        </p:spPr>
+        <p:txBody>
+          <a:bodyPr wrap="square" lIns="0" tIns="0" rIns="0" bIns="0" rtlCol="0" anchor="ctr"/>
+          <a:lstStyle/>
+          <a:p>
+            <a:pPr algn="l" indent="0" marL="0">
+              <a:buNone/>
+            </a:pPr>
+            <a:r>
+              <a:rPr lang="en-US" sz="1100" dirty="0">
+                <a:solidFill>
+                  <a:srgbClr val="6B7A85"/>
+                </a:solidFill>
+                <a:latin typeface="맑은 고딕" pitchFamily="34" charset="0"/>
+                <a:ea typeface="맑은 고딕" pitchFamily="34" charset="-122"/>
+                <a:cs typeface="맑은 고딕" pitchFamily="34" charset="-120"/>
+              </a:rPr>
+              <a:t>※ 통신판매업 신고번호는 신고 절차 진행 중입니다. 구매안전서비스 이용 확인증 발급 후 값을 채워 재제출하겠습니다. 나머지 5개 항목은 사업자등록증과 일치합니다.</a:t>
+            </a:r>
+            <a:endParaRPr lang="en-US" sz="1200" dirty="0"/>
           </a:p>
         </p:txBody>
       </p:sp>
@@ -6077,7 +7102,7 @@
                 <a:ea typeface="맑은 고딕" pitchFamily="34" charset="-122"/>
                 <a:cs typeface="맑은 고딕" pitchFamily="34" charset="-120"/>
               </a:rPr>
-              <a:t>해외 이용자 대상 US$ 디지털 상품과 이름 도장은 페이팔 전용이며 토스페이먼츠 결제 범위가 아닙니다.</a:t>
+              <a:t>해외 US$ 디지털 상품과 이름 도장은 페이팔 전용이며, 이름 도장은 한국어 주소를 제공하지 않습니다(토스페이먼츠 결제 범위 밖).</a:t>
             </a:r>
             <a:endParaRPr lang="en-US" sz="1150" dirty="0"/>
           </a:p>
@@ -6550,6 +7575,27 @@
             </a:r>
             <a:endParaRPr lang="en-US" sz="1150" dirty="0"/>
           </a:p>
+          <a:p>
+            <a:pPr marL="342900" indent="-342900">
+              <a:spcAft>
+                <a:spcPts val="600"/>
+              </a:spcAft>
+              <a:buSzPct val="100000"/>
+              <a:buChar char="•"/>
+            </a:pPr>
+            <a:r>
+              <a:rPr lang="en-US" sz="1150" dirty="0">
+                <a:solidFill>
+                  <a:srgbClr val="1F2933"/>
+                </a:solidFill>
+                <a:latin typeface="맑은 고딕" pitchFamily="34" charset="0"/>
+                <a:ea typeface="맑은 고딕" pitchFamily="34" charset="-122"/>
+                <a:cs typeface="맑은 고딕" pitchFamily="34" charset="-120"/>
+              </a:rPr>
+              <a:t>토스페이먼츠로 결제되는 상품에는 실물 배송 상품이 없습니다.</a:t>
+            </a:r>
+            <a:endParaRPr lang="en-US" sz="1150" dirty="0"/>
+          </a:p>
         </p:txBody>
       </p:sp>
       <p:sp>
@@ -6970,7 +8016,7 @@
                 <a:ea typeface="맑은 고딕" pitchFamily="34" charset="-122"/>
                 <a:cs typeface="맑은 고딕" pitchFamily="34" charset="-120"/>
               </a:rPr>
-              <a:t>상품군별 취소·환불 기준을 결제 전에 고지합니다.</a:t>
+              <a:t>상품군별 취소·환불 기준을 결제 전에 고지합니다. (환불정책 페이지의 절 번호·순서와 동일)</a:t>
             </a:r>
             <a:endParaRPr lang="en-US" sz="1200" dirty="0"/>
           </a:p>
@@ -7050,7 +8096,7 @@
         </p:nvSpPr>
         <p:spPr>
           <a:xfrm>
-            <a:off x="685800" y="2066544"/>
+            <a:off x="685800" y="2011680"/>
             <a:ext cx="310896" cy="310896"/>
           </a:xfrm>
           <a:prstGeom prst="ellipse">
@@ -7070,7 +8116,7 @@
         </p:nvSpPr>
         <p:spPr>
           <a:xfrm>
-            <a:off x="685800" y="2066544"/>
+            <a:off x="685800" y="2011680"/>
             <a:ext cx="310896" cy="310896"/>
           </a:xfrm>
           <a:prstGeom prst="rect">
@@ -7109,7 +8155,7 @@
         </p:nvSpPr>
         <p:spPr>
           <a:xfrm>
-            <a:off x="1133856" y="2011680"/>
+            <a:off x="1133856" y="1956816"/>
             <a:ext cx="5029200" cy="365760"/>
           </a:xfrm>
           <a:prstGeom prst="rect">
@@ -7134,7 +8180,7 @@
                 <a:ea typeface="맑은 고딕" pitchFamily="34" charset="-122"/>
                 <a:cs typeface="맑은 고딕" pitchFamily="34" charset="-120"/>
               </a:rPr>
-              <a:t>한자 상세 리포트</a:t>
+              <a:t>공통 원칙</a:t>
             </a:r>
             <a:endParaRPr lang="en-US" sz="1400" dirty="0"/>
           </a:p>
@@ -7149,7 +8195,7 @@
         <p:spPr>
           <a:xfrm>
             <a:off x="1133856" y="2395728"/>
-            <a:ext cx="5029200" cy="914400"/>
+            <a:ext cx="5029200" cy="566928"/>
           </a:xfrm>
           <a:prstGeom prst="rect">
             <a:avLst/>
@@ -7173,7 +8219,7 @@
                 <a:ea typeface="맑은 고딕" pitchFamily="34" charset="-122"/>
                 <a:cs typeface="맑은 고딕" pitchFamily="34" charset="-120"/>
               </a:rPr>
-              <a:t>결제 후 AI 상세 분석 생성이 시작되기 전에는 취소가 가능합니다. 생성이 완료되어 열람 또는 다운로드가 가능해진 뒤에는 단순 변심에 의한 환불이 제한될 수 있습니다.</a:t>
+              <a:t>상품의 제공 방식, 제작 착수 시점, 다운로드 여부에 따라 환불 가능 범위가 달라질 수 있으며, 구체 조건은 결제 전 상품 화면에 고지합니다.</a:t>
             </a:r>
             <a:endParaRPr lang="en-US" sz="1100" dirty="0"/>
           </a:p>
@@ -7187,7 +8233,7 @@
         </p:nvSpPr>
         <p:spPr>
           <a:xfrm>
-            <a:off x="685800" y="3547872"/>
+            <a:off x="685800" y="3035808"/>
             <a:ext cx="310896" cy="310896"/>
           </a:xfrm>
           <a:prstGeom prst="ellipse">
@@ -7207,7 +8253,7 @@
         </p:nvSpPr>
         <p:spPr>
           <a:xfrm>
-            <a:off x="685800" y="3547872"/>
+            <a:off x="685800" y="3035808"/>
             <a:ext cx="310896" cy="310896"/>
           </a:xfrm>
           <a:prstGeom prst="rect">
@@ -7246,7 +8292,7 @@
         </p:nvSpPr>
         <p:spPr>
           <a:xfrm>
-            <a:off x="1133856" y="3493008"/>
+            <a:off x="1133856" y="2980944"/>
             <a:ext cx="5029200" cy="365760"/>
           </a:xfrm>
           <a:prstGeom prst="rect">
@@ -7271,7 +8317,7 @@
                 <a:ea typeface="맑은 고딕" pitchFamily="34" charset="-122"/>
                 <a:cs typeface="맑은 고딕" pitchFamily="34" charset="-120"/>
               </a:rPr>
-              <a:t>후보 전체 일괄 공개</a:t>
+              <a:t>한자 상세 리포트</a:t>
             </a:r>
             <a:endParaRPr lang="en-US" sz="1400" dirty="0"/>
           </a:p>
@@ -7285,8 +8331,8 @@
         </p:nvSpPr>
         <p:spPr>
           <a:xfrm>
-            <a:off x="1133856" y="3877056"/>
-            <a:ext cx="5029200" cy="914400"/>
+            <a:off x="1133856" y="3419856"/>
+            <a:ext cx="5029200" cy="566928"/>
           </a:xfrm>
           <a:prstGeom prst="rect">
             <a:avLst/>
@@ -7310,7 +8356,7 @@
                 <a:ea typeface="맑은 고딕" pitchFamily="34" charset="-122"/>
                 <a:cs typeface="맑은 고딕" pitchFamily="34" charset="-120"/>
               </a:rPr>
-              <a:t>결제 즉시 제공되는 디지털 콘텐츠입니다. 후보 열람이 시작되기 전에는 취소가 가능하며, 열람 후에는 단순 변심 환불이 제한될 수 있습니다.</a:t>
+              <a:t>AI 상세 분석 생성이 시작되기 전에는 취소가 가능합니다. 생성이 완료되어 열람·다운로드가 가능해진 뒤에는 단순 변심 환불이 제한될 수 있습니다.</a:t>
             </a:r>
             <a:endParaRPr lang="en-US" sz="1100" dirty="0"/>
           </a:p>
@@ -7324,7 +8370,7 @@
         </p:nvSpPr>
         <p:spPr>
           <a:xfrm>
-            <a:off x="685800" y="5029200"/>
+            <a:off x="685800" y="4059936"/>
             <a:ext cx="310896" cy="310896"/>
           </a:xfrm>
           <a:prstGeom prst="ellipse">
@@ -7344,7 +8390,7 @@
         </p:nvSpPr>
         <p:spPr>
           <a:xfrm>
-            <a:off x="685800" y="5029200"/>
+            <a:off x="685800" y="4059936"/>
             <a:ext cx="310896" cy="310896"/>
           </a:xfrm>
           <a:prstGeom prst="rect">
@@ -7383,7 +8429,7 @@
         </p:nvSpPr>
         <p:spPr>
           <a:xfrm>
-            <a:off x="1133856" y="4974336"/>
+            <a:off x="1133856" y="4005072"/>
             <a:ext cx="5029200" cy="365760"/>
           </a:xfrm>
           <a:prstGeom prst="rect">
@@ -7408,7 +8454,7 @@
                 <a:ea typeface="맑은 고딕" pitchFamily="34" charset="-122"/>
                 <a:cs typeface="맑은 고딕" pitchFamily="34" charset="-120"/>
               </a:rPr>
-              <a:t>공통</a:t>
+              <a:t>후보 전체 일괄 공개</a:t>
             </a:r>
             <a:endParaRPr lang="en-US" sz="1400" dirty="0"/>
           </a:p>
@@ -7422,8 +8468,8 @@
         </p:nvSpPr>
         <p:spPr>
           <a:xfrm>
-            <a:off x="1133856" y="5358384"/>
-            <a:ext cx="5029200" cy="914400"/>
+            <a:off x="1133856" y="4443984"/>
+            <a:ext cx="5029200" cy="566928"/>
           </a:xfrm>
           <a:prstGeom prst="rect">
             <a:avLst/>
@@ -7447,7 +8493,7 @@
                 <a:ea typeface="맑은 고딕" pitchFamily="34" charset="-122"/>
                 <a:cs typeface="맑은 고딕" pitchFamily="34" charset="-120"/>
               </a:rPr>
-              <a:t>내용 오류, 시스템 장애로 인한 생성 실패, 결제 금액 불일치가 확인되는 경우 재발급 또는 환불로 처리합니다. 보관 기간(결제 후 24시간) 경과는 환불 사유에 해당하지 않습니다.</a:t>
+              <a:t>결제 즉시 제공되는 디지털 콘텐츠입니다. 후보 열람이 시작되기 전에는 취소가 가능하며, 열람 후에는 단순 변심 환불이 제한될 수 있습니다.</a:t>
             </a:r>
             <a:endParaRPr lang="en-US" sz="1100" dirty="0"/>
           </a:p>
@@ -7533,6 +8579,199 @@
               <a:t>환불정책 페이지 본문 화면</a:t>
             </a:r>
             <a:endParaRPr lang="en-US" sz="1500" dirty="0"/>
+          </a:p>
+        </p:txBody>
+      </p:sp>
+      <p:sp>
+        <p:nvSpPr>
+          <p:cNvPr id="22" name="Shape 6"/>
+          <p:cNvSpPr/>
+          <p:nvPr/>
+        </p:nvSpPr>
+        <p:spPr>
+          <a:xfrm>
+            <a:off x="685800" y="5084064"/>
+            <a:ext cx="310896" cy="310896"/>
+          </a:xfrm>
+          <a:prstGeom prst="ellipse">
+            <a:avLst/>
+          </a:prstGeom>
+          <a:solidFill>
+            <a:srgbClr val="02C39A"/>
+          </a:solidFill>
+          <a:ln/>
+        </p:spPr>
+      </p:sp>
+      <p:sp>
+        <p:nvSpPr>
+          <p:cNvPr id="23" name="Text 7"/>
+          <p:cNvSpPr/>
+          <p:nvPr/>
+        </p:nvSpPr>
+        <p:spPr>
+          <a:xfrm>
+            <a:off x="685800" y="5084064"/>
+            <a:ext cx="310896" cy="310896"/>
+          </a:xfrm>
+          <a:prstGeom prst="rect">
+            <a:avLst/>
+          </a:prstGeom>
+          <a:noFill/>
+          <a:ln/>
+        </p:spPr>
+        <p:txBody>
+          <a:bodyPr wrap="square" lIns="0" tIns="0" rIns="0" bIns="0" rtlCol="0" anchor="ctr"/>
+          <a:lstStyle/>
+          <a:p>
+            <a:pPr algn="ctr" indent="0" marL="0">
+              <a:buNone/>
+            </a:pPr>
+            <a:r>
+              <a:rPr lang="en-US" sz="1100" b="1" dirty="0">
+                <a:solidFill>
+                  <a:srgbClr val="062E38"/>
+                </a:solidFill>
+                <a:latin typeface="맑은 고딕" pitchFamily="34" charset="0"/>
+                <a:ea typeface="맑은 고딕" pitchFamily="34" charset="-122"/>
+                <a:cs typeface="맑은 고딕" pitchFamily="34" charset="-120"/>
+              </a:rPr>
+              <a:t>4</a:t>
+            </a:r>
+            <a:endParaRPr lang="en-US" sz="1100" dirty="0"/>
+          </a:p>
+        </p:txBody>
+      </p:sp>
+      <p:sp>
+        <p:nvSpPr>
+          <p:cNvPr id="24" name="Text 8"/>
+          <p:cNvSpPr/>
+          <p:nvPr/>
+        </p:nvSpPr>
+        <p:spPr>
+          <a:xfrm>
+            <a:off x="1133856" y="5029200"/>
+            <a:ext cx="5029200" cy="365760"/>
+          </a:xfrm>
+          <a:prstGeom prst="rect">
+            <a:avLst/>
+          </a:prstGeom>
+          <a:noFill/>
+          <a:ln/>
+        </p:spPr>
+        <p:txBody>
+          <a:bodyPr wrap="square" lIns="0" tIns="0" rIns="0" bIns="0" rtlCol="0" anchor="ctr"/>
+          <a:lstStyle/>
+          <a:p>
+            <a:pPr indent="0" marL="0">
+              <a:buNone/>
+            </a:pPr>
+            <a:r>
+              <a:rPr lang="en-US" sz="1400" b="1" dirty="0">
+                <a:solidFill>
+                  <a:srgbClr val="1F2933"/>
+                </a:solidFill>
+                <a:latin typeface="맑은 고딕" pitchFamily="34" charset="0"/>
+                <a:ea typeface="맑은 고딕" pitchFamily="34" charset="-122"/>
+                <a:cs typeface="맑은 고딕" pitchFamily="34" charset="-120"/>
+              </a:rPr>
+              <a:t>광고형 잠금 해제</a:t>
+            </a:r>
+            <a:endParaRPr lang="en-US" sz="1400" dirty="0"/>
+          </a:p>
+        </p:txBody>
+      </p:sp>
+      <p:sp>
+        <p:nvSpPr>
+          <p:cNvPr id="25" name="Text 9"/>
+          <p:cNvSpPr/>
+          <p:nvPr/>
+        </p:nvSpPr>
+        <p:spPr>
+          <a:xfrm>
+            <a:off x="1133856" y="5468112"/>
+            <a:ext cx="5029200" cy="566928"/>
+          </a:xfrm>
+          <a:prstGeom prst="rect">
+            <a:avLst/>
+          </a:prstGeom>
+          <a:noFill/>
+          <a:ln/>
+        </p:spPr>
+        <p:txBody>
+          <a:bodyPr wrap="square" lIns="0" tIns="0" rIns="0" bIns="0" rtlCol="0" anchor="t"/>
+          <a:lstStyle/>
+          <a:p>
+            <a:pPr indent="0" marL="0">
+              <a:buNone/>
+            </a:pPr>
+            <a:r>
+              <a:rPr lang="en-US" sz="1100" dirty="0">
+                <a:solidFill>
+                  <a:srgbClr val="6B7A85"/>
+                </a:solidFill>
+                <a:latin typeface="맑은 고딕" pitchFamily="34" charset="0"/>
+                <a:ea typeface="맑은 고딕" pitchFamily="34" charset="-122"/>
+                <a:cs typeface="맑은 고딕" pitchFamily="34" charset="-120"/>
+              </a:rPr>
+              <a:t>광고 시청형 혜택은 결제 상품이 아닙니다. 광고 네트워크 오류로 보상이 지급되지 않은 경우 재시도 또는 고객센터 문의로 처리합니다.</a:t>
+            </a:r>
+            <a:endParaRPr lang="en-US" sz="1100" dirty="0"/>
+          </a:p>
+        </p:txBody>
+      </p:sp>
+      <p:sp>
+        <p:nvSpPr>
+          <p:cNvPr id="26" name="Text 9"/>
+          <p:cNvSpPr/>
+          <p:nvPr/>
+        </p:nvSpPr>
+        <p:spPr>
+          <a:xfrm>
+            <a:off x="1133856" y="6053328"/>
+            <a:ext cx="5029200" cy="457200"/>
+          </a:xfrm>
+          <a:prstGeom prst="rect">
+            <a:avLst/>
+          </a:prstGeom>
+          <a:noFill/>
+          <a:ln/>
+        </p:spPr>
+        <p:txBody>
+          <a:bodyPr wrap="square" lIns="0" tIns="0" rIns="0" bIns="0" rtlCol="0" anchor="t"/>
+          <a:lstStyle/>
+          <a:p>
+            <a:pPr indent="0" marL="0">
+              <a:buNone/>
+            </a:pPr>
+            <a:r>
+              <a:rPr lang="en-US" sz="1050" dirty="0">
+                <a:solidFill>
+                  <a:srgbClr val="6B7A85"/>
+                </a:solidFill>
+                <a:latin typeface="맑은 고딕" pitchFamily="34" charset="0"/>
+                <a:ea typeface="맑은 고딕" pitchFamily="34" charset="-122"/>
+                <a:cs typeface="맑은 고딕" pitchFamily="34" charset="-120"/>
+              </a:rPr>
+              <a:t>5. 문의 — platforest.inc@gmail.com · 070-4300-7141</a:t>
+            </a:r>
+            <a:endParaRPr lang="en-US" sz="1100" dirty="0"/>
+          </a:p>
+          <a:p>
+            <a:pPr indent="0" marL="0">
+              <a:buNone/>
+            </a:pPr>
+            <a:r>
+              <a:rPr lang="en-US" sz="1050" dirty="0">
+                <a:solidFill>
+                  <a:srgbClr val="6B7A85"/>
+                </a:solidFill>
+                <a:latin typeface="맑은 고딕" pitchFamily="34" charset="0"/>
+                <a:ea typeface="맑은 고딕" pitchFamily="34" charset="-122"/>
+                <a:cs typeface="맑은 고딕" pitchFamily="34" charset="-120"/>
+              </a:rPr>
+              <a:t>※ 생성 실패·내용 오류·결제 금액 불일치는 재발급 또는 환불로 처리합니다.</a:t>
+            </a:r>
+            <a:endParaRPr lang="en-US" sz="1100" dirty="0"/>
           </a:p>
         </p:txBody>
       </p:sp>

--- a/docs/Naming-Link_결제경로.pptx
+++ b/docs/Naming-Link_결제경로.pptx
@@ -4,6 +4,9 @@
   <p:sldMasterIdLst>
     <p:sldMasterId id="2147483648" r:id="rId1"/>
   </p:sldMasterIdLst>
+  <p:notesMasterIdLst>
+    <p:notesMasterId r:id="rId12"/>
+  </p:notesMasterIdLst>
   <p:sldIdLst>
     <p:sldId id="256" r:id="rId2"/>
     <p:sldId id="257" r:id="rId3"/>
@@ -14,11 +17,8 @@
     <p:sldId id="262" r:id="rId8"/>
     <p:sldId id="263" r:id="rId9"/>
     <p:sldId id="264" r:id="rId10"/>
-    <p:sldId id="265" r:id="rId16"/>
+    <p:sldId id="265" r:id="rId11"/>
   </p:sldIdLst>
-  <p:notesMasterIdLst>
-    <p:notesMasterId r:id="rId11"/>
-  </p:notesMasterIdLst>
   <p:sldSz cx="12192000" cy="6858000"/>
   <p:notesSz cx="6858000" cy="12192000"/>
   <p:defaultTextStyle>
@@ -113,6 +113,11 @@
       </a:defRPr>
     </a:lvl9pPr>
   </p:defaultTextStyle>
+  <p:extLst>
+    <p:ext uri="{EFAFB233-063F-42B5-8137-9DF3F51BA10A}">
+      <p15:sldGuideLst xmlns:p15="http://schemas.microsoft.com/office/powerpoint/2012/main"/>
+    </p:ext>
+  </p:extLst>
 </p:presentation>
 </file>
 
@@ -138,240 +143,16 @@
           <a:chExt cx="0" cy="0"/>
         </a:xfrm>
       </p:grpSpPr>
-      <p:sp>
-        <p:nvSpPr>
-          <p:cNvPr id="2" name="Header Placeholder 1"/>
-          <p:cNvSpPr>
-            <a:spLocks noGrp="1"/>
-          </p:cNvSpPr>
-          <p:nvPr>
-            <p:ph type="hdr" sz="quarter"/>
-          </p:nvPr>
-        </p:nvSpPr>
-        <p:spPr>
-          <a:xfrm>
-            <a:off x="0" y="0"/>
-            <a:ext cx="2971800" cy="458788"/>
-          </a:xfrm>
-          <a:prstGeom prst="rect">
-            <a:avLst/>
-          </a:prstGeom>
-        </p:spPr>
-        <p:txBody>
-          <a:bodyPr vert="horz" lIns="91440" tIns="45720" rIns="91440" bIns="45720" rtlCol="0"/>
-          <a:lstStyle>
-            <a:lvl1pPr algn="l">
-              <a:defRPr sz="1200"/>
-            </a:lvl1pPr>
-          </a:lstStyle>
-          <a:p>
-            <a:endParaRPr lang="en-US"/>
-          </a:p>
-        </p:txBody>
-      </p:sp>
-      <p:sp>
-        <p:nvSpPr>
-          <p:cNvPr id="3" name="Date Placeholder 2"/>
-          <p:cNvSpPr>
-            <a:spLocks noGrp="1"/>
-          </p:cNvSpPr>
-          <p:nvPr>
-            <p:ph type="dt" idx="1"/>
-          </p:nvPr>
-        </p:nvSpPr>
-        <p:spPr>
-          <a:xfrm>
-            <a:off x="3884613" y="0"/>
-            <a:ext cx="2971800" cy="458788"/>
-          </a:xfrm>
-          <a:prstGeom prst="rect">
-            <a:avLst/>
-          </a:prstGeom>
-        </p:spPr>
-        <p:txBody>
-          <a:bodyPr vert="horz" lIns="91440" tIns="45720" rIns="91440" bIns="45720" rtlCol="0"/>
-          <a:lstStyle>
-            <a:lvl1pPr algn="r">
-              <a:defRPr sz="1200"/>
-            </a:lvl1pPr>
-          </a:lstStyle>
-          <a:p>
-            <a:fld id="{5282F153-3F37-0F45-9E97-73ACFA13230C}" type="datetimeFigureOut">
-              <a:rPr lang="en-US"/>
-              <a:t>7/23/19</a:t>
-            </a:fld>
-            <a:endParaRPr lang="en-US"/>
-          </a:p>
-        </p:txBody>
-      </p:sp>
-      <p:sp>
-        <p:nvSpPr>
-          <p:cNvPr id="4" name="Slide Image Placeholder 3"/>
-          <p:cNvSpPr>
-            <a:spLocks noGrp="1" noRot="1" noChangeAspect="1"/>
-          </p:cNvSpPr>
-          <p:nvPr>
-            <p:ph type="sldImg" idx="2"/>
-          </p:nvPr>
-        </p:nvSpPr>
-        <p:spPr>
-          <a:xfrm>
-            <a:off x="685800" y="1143000"/>
-            <a:ext cx="5486400" cy="3086100"/>
-          </a:xfrm>
-          <a:prstGeom prst="rect">
-            <a:avLst/>
-          </a:prstGeom>
-          <a:noFill/>
-          <a:ln w="12700">
-            <a:solidFill>
-              <a:prstClr val="black"/>
-            </a:solidFill>
-          </a:ln>
-        </p:spPr>
-        <p:txBody>
-          <a:bodyPr vert="horz" lIns="91440" tIns="45720" rIns="91440" bIns="45720" rtlCol="0" anchor="ctr"/>
-          <a:lstStyle/>
-          <a:p>
-            <a:endParaRPr lang="en-US"/>
-          </a:p>
-        </p:txBody>
-      </p:sp>
-      <p:sp>
-        <p:nvSpPr>
-          <p:cNvPr id="5" name="Notes Placeholder 4"/>
-          <p:cNvSpPr>
-            <a:spLocks noGrp="1"/>
-          </p:cNvSpPr>
-          <p:nvPr>
-            <p:ph type="body" sz="quarter" idx="3"/>
-          </p:nvPr>
-        </p:nvSpPr>
-        <p:spPr>
-          <a:xfrm>
-            <a:off x="685800" y="4400550"/>
-            <a:ext cx="5486400" cy="3600450"/>
-          </a:xfrm>
-          <a:prstGeom prst="rect">
-            <a:avLst/>
-          </a:prstGeom>
-        </p:spPr>
-        <p:txBody>
-          <a:bodyPr vert="horz" lIns="91440" tIns="45720" rIns="91440" bIns="45720" rtlCol="0"/>
-          <a:lstStyle/>
-          <a:p>
-            <a:pPr lvl="0"/>
-            <a:r>
-              <a:rPr lang="en-US"/>
-              <a:t>Click to edit Master text styles</a:t>
-            </a:r>
-          </a:p>
-          <a:p>
-            <a:pPr lvl="1"/>
-            <a:r>
-              <a:rPr lang="en-US"/>
-              <a:t>Second level</a:t>
-            </a:r>
-          </a:p>
-          <a:p>
-            <a:pPr lvl="2"/>
-            <a:r>
-              <a:rPr lang="en-US"/>
-              <a:t>Third level</a:t>
-            </a:r>
-          </a:p>
-          <a:p>
-            <a:pPr lvl="3"/>
-            <a:r>
-              <a:rPr lang="en-US"/>
-              <a:t>Fourth level</a:t>
-            </a:r>
-          </a:p>
-          <a:p>
-            <a:pPr lvl="4"/>
-            <a:r>
-              <a:rPr lang="en-US"/>
-              <a:t>Fifth level</a:t>
-            </a:r>
-          </a:p>
-        </p:txBody>
-      </p:sp>
-      <p:sp>
-        <p:nvSpPr>
-          <p:cNvPr id="6" name="Footer Placeholder 5"/>
-          <p:cNvSpPr>
-            <a:spLocks noGrp="1"/>
-          </p:cNvSpPr>
-          <p:nvPr>
-            <p:ph type="ftr" sz="quarter" idx="4"/>
-          </p:nvPr>
-        </p:nvSpPr>
-        <p:spPr>
-          <a:xfrm>
-            <a:off x="0" y="8685213"/>
-            <a:ext cx="2971800" cy="458787"/>
-          </a:xfrm>
-          <a:prstGeom prst="rect">
-            <a:avLst/>
-          </a:prstGeom>
-        </p:spPr>
-        <p:txBody>
-          <a:bodyPr vert="horz" lIns="91440" tIns="45720" rIns="91440" bIns="45720" rtlCol="0" anchor="b"/>
-          <a:lstStyle>
-            <a:lvl1pPr algn="l">
-              <a:defRPr sz="1200"/>
-            </a:lvl1pPr>
-          </a:lstStyle>
-          <a:p>
-            <a:endParaRPr lang="en-US"/>
-          </a:p>
-        </p:txBody>
-      </p:sp>
-      <p:sp>
-        <p:nvSpPr>
-          <p:cNvPr id="7" name="Slide Number Placeholder 6"/>
-          <p:cNvSpPr>
-            <a:spLocks noGrp="1"/>
-          </p:cNvSpPr>
-          <p:nvPr>
-            <p:ph type="sldNum" sz="quarter" idx="5"/>
-          </p:nvPr>
-        </p:nvSpPr>
-        <p:spPr>
-          <a:xfrm>
-            <a:off x="3884613" y="8685213"/>
-            <a:ext cx="2971800" cy="458787"/>
-          </a:xfrm>
-          <a:prstGeom prst="rect">
-            <a:avLst/>
-          </a:prstGeom>
-        </p:spPr>
-        <p:txBody>
-          <a:bodyPr vert="horz" lIns="91440" tIns="45720" rIns="91440" bIns="45720" rtlCol="0" anchor="b"/>
-          <a:lstStyle>
-            <a:lvl1pPr algn="r">
-              <a:defRPr sz="1200"/>
-            </a:lvl1pPr>
-          </a:lstStyle>
-          <a:p>
-            <a:fld id="{CE5E9CC1-C706-0F49-92D6-E571CC5EEA8F}" type="slidenum">
-              <a:rPr lang="en-US"/>
-              <a:t>‹#›</a:t>
-            </a:fld>
-            <a:endParaRPr lang="en-US"/>
-          </a:p>
-        </p:txBody>
-      </p:sp>
     </p:spTree>
     <p:extLst>
       <p:ext uri="{BB962C8B-B14F-4D97-AF65-F5344CB8AC3E}">
-        <p14:creationId xmlns:p14="http://schemas.microsoft.com/office/powerpoint/2010/main" val="1024086991"/>
+        <p14:creationId xmlns:p14="http://schemas.microsoft.com/office/powerpoint/2010/main" val="837021210"/>
       </p:ext>
     </p:extLst>
   </p:cSld>
   <p:clrMap bg1="lt1" tx1="dk1" bg2="lt2" tx2="dk2" accent1="accent1" accent2="accent2" accent3="accent3" accent4="accent4" accent5="accent5" accent6="accent6" hlink="hlink" folHlink="folHlink"/>
   <p:notesStyle>
-    <a:lvl1pPr marL="0" algn="l" defTabSz="914400" rtl="0" eaLnBrk="1" latinLnBrk="0" hangingPunct="1">
+    <a:lvl1pPr marL="0" algn="l" defTabSz="914400" rtl="0" eaLnBrk="1" latinLnBrk="1" hangingPunct="1">
       <a:defRPr sz="1200" kern="1200">
         <a:solidFill>
           <a:schemeClr val="tx1"/>
@@ -381,7 +162,7 @@
         <a:cs typeface="+mn-cs"/>
       </a:defRPr>
     </a:lvl1pPr>
-    <a:lvl2pPr marL="457200" algn="l" defTabSz="914400" rtl="0" eaLnBrk="1" latinLnBrk="0" hangingPunct="1">
+    <a:lvl2pPr marL="457200" algn="l" defTabSz="914400" rtl="0" eaLnBrk="1" latinLnBrk="1" hangingPunct="1">
       <a:defRPr sz="1200" kern="1200">
         <a:solidFill>
           <a:schemeClr val="tx1"/>
@@ -391,7 +172,7 @@
         <a:cs typeface="+mn-cs"/>
       </a:defRPr>
     </a:lvl2pPr>
-    <a:lvl3pPr marL="914400" algn="l" defTabSz="914400" rtl="0" eaLnBrk="1" latinLnBrk="0" hangingPunct="1">
+    <a:lvl3pPr marL="914400" algn="l" defTabSz="914400" rtl="0" eaLnBrk="1" latinLnBrk="1" hangingPunct="1">
       <a:defRPr sz="1200" kern="1200">
         <a:solidFill>
           <a:schemeClr val="tx1"/>
@@ -401,7 +182,7 @@
         <a:cs typeface="+mn-cs"/>
       </a:defRPr>
     </a:lvl3pPr>
-    <a:lvl4pPr marL="1371600" algn="l" defTabSz="914400" rtl="0" eaLnBrk="1" latinLnBrk="0" hangingPunct="1">
+    <a:lvl4pPr marL="1371600" algn="l" defTabSz="914400" rtl="0" eaLnBrk="1" latinLnBrk="1" hangingPunct="1">
       <a:defRPr sz="1200" kern="1200">
         <a:solidFill>
           <a:schemeClr val="tx1"/>
@@ -411,7 +192,7 @@
         <a:cs typeface="+mn-cs"/>
       </a:defRPr>
     </a:lvl4pPr>
-    <a:lvl5pPr marL="1828800" algn="l" defTabSz="914400" rtl="0" eaLnBrk="1" latinLnBrk="0" hangingPunct="1">
+    <a:lvl5pPr marL="1828800" algn="l" defTabSz="914400" rtl="0" eaLnBrk="1" latinLnBrk="1" hangingPunct="1">
       <a:defRPr sz="1200" kern="1200">
         <a:solidFill>
           <a:schemeClr val="tx1"/>
@@ -421,7 +202,7 @@
         <a:cs typeface="+mn-cs"/>
       </a:defRPr>
     </a:lvl5pPr>
-    <a:lvl6pPr marL="2286000" algn="l" defTabSz="914400" rtl="0" eaLnBrk="1" latinLnBrk="0" hangingPunct="1">
+    <a:lvl6pPr marL="2286000" algn="l" defTabSz="914400" rtl="0" eaLnBrk="1" latinLnBrk="1" hangingPunct="1">
       <a:defRPr sz="1200" kern="1200">
         <a:solidFill>
           <a:schemeClr val="tx1"/>
@@ -431,7 +212,7 @@
         <a:cs typeface="+mn-cs"/>
       </a:defRPr>
     </a:lvl6pPr>
-    <a:lvl7pPr marL="2743200" algn="l" defTabSz="914400" rtl="0" eaLnBrk="1" latinLnBrk="0" hangingPunct="1">
+    <a:lvl7pPr marL="2743200" algn="l" defTabSz="914400" rtl="0" eaLnBrk="1" latinLnBrk="1" hangingPunct="1">
       <a:defRPr sz="1200" kern="1200">
         <a:solidFill>
           <a:schemeClr val="tx1"/>
@@ -441,7 +222,7 @@
         <a:cs typeface="+mn-cs"/>
       </a:defRPr>
     </a:lvl7pPr>
-    <a:lvl8pPr marL="3200400" algn="l" defTabSz="914400" rtl="0" eaLnBrk="1" latinLnBrk="0" hangingPunct="1">
+    <a:lvl8pPr marL="3200400" algn="l" defTabSz="914400" rtl="0" eaLnBrk="1" latinLnBrk="1" hangingPunct="1">
       <a:defRPr sz="1200" kern="1200">
         <a:solidFill>
           <a:schemeClr val="tx1"/>
@@ -451,7 +232,7 @@
         <a:cs typeface="+mn-cs"/>
       </a:defRPr>
     </a:lvl8pPr>
-    <a:lvl9pPr marL="3657600" algn="l" defTabSz="914400" rtl="0" eaLnBrk="1" latinLnBrk="0" hangingPunct="1">
+    <a:lvl9pPr marL="3657600" algn="l" defTabSz="914400" rtl="0" eaLnBrk="1" latinLnBrk="1" hangingPunct="1">
       <a:defRPr sz="1200" kern="1200">
         <a:solidFill>
           <a:schemeClr val="tx1"/>
@@ -513,7 +294,6 @@
               <a:rPr lang="en-US" dirty="0"/>
               <a:t>표지. 상호명·사업자등록번호·URL·테스트계정 4개 항목은 토스 가이드 6페이지 필수 항목.</a:t>
             </a:r>
-            <a:endParaRPr lang="en-US" dirty="0"/>
           </a:p>
         </p:txBody>
       </p:sp>
@@ -554,7 +334,7 @@
 </file>
 
 <file path=ppt/notesSlides/notesSlide10.xml><?xml version="1.0" encoding="utf-8"?>
-<p:notes xmlns:a="http://schemas.openxmlformats.org/drawingml/2006/main" xmlns:p="http://schemas.openxmlformats.org/presentationml/2006/main" xmlns:r="http://schemas.openxmlformats.org/officeDocument/2006/relationships">
+<p:notes xmlns:a="http://schemas.openxmlformats.org/drawingml/2006/main" xmlns:r="http://schemas.openxmlformats.org/officeDocument/2006/relationships" xmlns:p="http://schemas.openxmlformats.org/presentationml/2006/main">
   <p:cSld>
     <p:spTree>
       <p:nvGrpSpPr>
@@ -574,7 +354,7 @@
         <p:nvSpPr>
           <p:cNvPr id="2" name="Slide Image Placeholder 1"/>
           <p:cNvSpPr>
-            <a:spLocks noGrp="1"/>
+            <a:spLocks noGrp="1" noRot="1" noChangeAspect="1"/>
           </p:cNvSpPr>
           <p:nvPr>
             <p:ph type="sldImg" idx="2"/>
@@ -589,7 +369,7 @@
             <a:spLocks noGrp="1"/>
           </p:cNvSpPr>
           <p:nvPr>
-            <p:ph type="body" idx="3" sz="quarter"/>
+            <p:ph type="body" sz="quarter" idx="3"/>
           </p:nvPr>
         </p:nvSpPr>
         <p:spPr/>
@@ -610,7 +390,7 @@
             <a:spLocks noGrp="1"/>
           </p:cNvSpPr>
           <p:nvPr>
-            <p:ph type="sldNum" idx="5" sz="quarter"/>
+            <p:ph type="sldNum" sz="quarter" idx="5"/>
           </p:nvPr>
         </p:nvSpPr>
         <p:spPr/>
@@ -671,7 +451,6 @@
               <a:rPr lang="en-US" dirty="0"/>
               <a:t>결제 경로 요약. 실물 배송이 없는 무형 상품임을 명확히 보여 주는 슬라이드.</a:t>
             </a:r>
-            <a:endParaRPr lang="en-US" dirty="0"/>
           </a:p>
         </p:txBody>
       </p:sp>
@@ -1103,7 +882,6 @@
               <a:rPr lang="en-US" dirty="0"/>
               <a:t>STEP 1 — 상품 선택 — 결제 경로 캡처 슬라이드.</a:t>
             </a:r>
-            <a:endParaRPr lang="en-US" dirty="0"/>
           </a:p>
         </p:txBody>
       </p:sp>
@@ -1191,7 +969,6 @@
               <a:rPr lang="en-US" dirty="0"/>
               <a:t>STEP 2 — 결제수단 선택 및 결제 — 결제 경로 캡처 슬라이드.</a:t>
             </a:r>
-            <a:endParaRPr lang="en-US" dirty="0"/>
           </a:p>
         </p:txBody>
       </p:sp>
@@ -1279,7 +1056,6 @@
               <a:rPr lang="en-US" dirty="0"/>
               <a:t>STEP 3 — 결제 완료 및 제공 — 결제 경로 캡처 슬라이드.</a:t>
             </a:r>
-            <a:endParaRPr lang="en-US" dirty="0"/>
           </a:p>
         </p:txBody>
       </p:sp>
@@ -1352,6 +1128,11 @@
 <file path=ppt/slideMasters/slideMaster1.xml><?xml version="1.0" encoding="utf-8"?>
 <p:sldMaster xmlns:a="http://schemas.openxmlformats.org/drawingml/2006/main" xmlns:r="http://schemas.openxmlformats.org/officeDocument/2006/relationships" xmlns:p="http://schemas.openxmlformats.org/presentationml/2006/main">
   <p:cSld>
+    <p:bg>
+      <p:bgRef idx="1001">
+        <a:schemeClr val="bg1"/>
+      </p:bgRef>
+    </p:bg>
     <p:spTree>
       <p:nvGrpSpPr>
         <p:cNvPr id="1" name=""/>
@@ -1634,6 +1415,7 @@
         <a:solidFill>
           <a:srgbClr val="062E38"/>
         </a:solidFill>
+        <a:effectLst/>
       </p:bgPr>
     </p:bg>
     <p:spTree>
@@ -1671,6 +1453,13 @@
           </a:solidFill>
           <a:ln/>
         </p:spPr>
+        <p:txBody>
+          <a:bodyPr/>
+          <a:lstStyle/>
+          <a:p>
+            <a:endParaRPr lang="ko-KR" altLang="en-US"/>
+          </a:p>
+        </p:txBody>
       </p:sp>
       <p:sp>
         <p:nvSpPr>
@@ -1693,6 +1482,13 @@
           </a:solidFill>
           <a:ln/>
         </p:spPr>
+        <p:txBody>
+          <a:bodyPr/>
+          <a:lstStyle/>
+          <a:p>
+            <a:endParaRPr lang="ko-KR" altLang="en-US"/>
+          </a:p>
+        </p:txBody>
       </p:sp>
       <p:sp>
         <p:nvSpPr>
@@ -1715,11 +1511,11 @@
           <a:bodyPr wrap="square" lIns="0" tIns="0" rIns="0" bIns="0" rtlCol="0" anchor="ctr"/>
           <a:lstStyle/>
           <a:p>
-            <a:pPr indent="0" marL="0">
+            <a:pPr marL="0" indent="0">
               <a:buNone/>
             </a:pPr>
             <a:r>
-              <a:rPr lang="en-US" sz="1500" b="1" spc="200" kern="0" dirty="0">
+              <a:rPr lang="en-US" sz="1500" b="1" kern="0" spc="200" dirty="0">
                 <a:solidFill>
                   <a:srgbClr val="02C39A"/>
                 </a:solidFill>
@@ -1754,7 +1550,7 @@
           <a:bodyPr wrap="square" lIns="0" tIns="0" rIns="0" bIns="0" rtlCol="0" anchor="ctr"/>
           <a:lstStyle/>
           <a:p>
-            <a:pPr indent="0" marL="0">
+            <a:pPr marL="0" indent="0">
               <a:buNone/>
             </a:pPr>
             <a:r>
@@ -1793,7 +1589,7 @@
           <a:bodyPr wrap="square" lIns="0" tIns="0" rIns="0" bIns="0" rtlCol="0" anchor="ctr"/>
           <a:lstStyle/>
           <a:p>
-            <a:pPr indent="0" marL="0">
+            <a:pPr marL="0" indent="0">
               <a:buNone/>
             </a:pPr>
             <a:r>
@@ -1832,7 +1628,7 @@
           <a:bodyPr wrap="square" lIns="0" tIns="0" rIns="0" bIns="0" rtlCol="0" anchor="ctr"/>
           <a:lstStyle/>
           <a:p>
-            <a:pPr indent="0" marL="0">
+            <a:pPr marL="0" indent="0">
               <a:buNone/>
             </a:pPr>
             <a:r>
@@ -1871,7 +1667,7 @@
           <a:bodyPr wrap="square" lIns="0" tIns="0" rIns="0" bIns="0" rtlCol="0" anchor="ctr"/>
           <a:lstStyle/>
           <a:p>
-            <a:pPr indent="0" marL="0">
+            <a:pPr marL="0" indent="0">
               <a:buNone/>
             </a:pPr>
             <a:r>
@@ -1910,7 +1706,7 @@
           <a:bodyPr wrap="square" lIns="0" tIns="0" rIns="0" bIns="0" rtlCol="0" anchor="ctr"/>
           <a:lstStyle/>
           <a:p>
-            <a:pPr indent="0" marL="0">
+            <a:pPr marL="0" indent="0">
               <a:buNone/>
             </a:pPr>
             <a:r>
@@ -1949,7 +1745,7 @@
           <a:bodyPr wrap="square" lIns="0" tIns="0" rIns="0" bIns="0" rtlCol="0" anchor="ctr"/>
           <a:lstStyle/>
           <a:p>
-            <a:pPr indent="0" marL="0">
+            <a:pPr marL="0" indent="0">
               <a:buNone/>
             </a:pPr>
             <a:r>
@@ -1988,7 +1784,7 @@
           <a:bodyPr wrap="square" lIns="0" tIns="0" rIns="0" bIns="0" rtlCol="0" anchor="ctr"/>
           <a:lstStyle/>
           <a:p>
-            <a:pPr indent="0" marL="0">
+            <a:pPr marL="0" indent="0">
               <a:buNone/>
             </a:pPr>
             <a:r>
@@ -2027,7 +1823,7 @@
           <a:bodyPr wrap="square" lIns="0" tIns="0" rIns="0" bIns="0" rtlCol="0" anchor="ctr"/>
           <a:lstStyle/>
           <a:p>
-            <a:pPr indent="0" marL="0">
+            <a:pPr marL="0" indent="0">
               <a:buNone/>
             </a:pPr>
             <a:r>
@@ -2066,7 +1862,7 @@
           <a:bodyPr wrap="square" lIns="0" tIns="0" rIns="0" bIns="0" rtlCol="0" anchor="ctr"/>
           <a:lstStyle/>
           <a:p>
-            <a:pPr indent="0" marL="0">
+            <a:pPr marL="0" indent="0">
               <a:buNone/>
             </a:pPr>
             <a:r>
@@ -2105,7 +1901,7 @@
           <a:bodyPr wrap="square" lIns="0" tIns="0" rIns="0" bIns="0" rtlCol="0" anchor="ctr"/>
           <a:lstStyle/>
           <a:p>
-            <a:pPr indent="0" marL="0">
+            <a:pPr marL="0" indent="0">
               <a:buNone/>
             </a:pPr>
             <a:r>
@@ -2117,7 +1913,29 @@
                 <a:ea typeface="맑은 고딕" pitchFamily="34" charset="-122"/>
                 <a:cs typeface="맑은 고딕" pitchFamily="34" charset="-120"/>
               </a:rPr>
-              <a:t>비회원 구매 가능 — 별도 계정 불필요</a:t>
+              <a:t>비회원 구매 </a:t>
+            </a:r>
+            <a:r>
+              <a:rPr lang="en-US" sz="1350" b="1" dirty="0" err="1">
+                <a:solidFill>
+                  <a:srgbClr val="FFFFFF"/>
+                </a:solidFill>
+                <a:latin typeface="맑은 고딕" pitchFamily="34" charset="0"/>
+                <a:ea typeface="맑은 고딕" pitchFamily="34" charset="-122"/>
+                <a:cs typeface="맑은 고딕" pitchFamily="34" charset="-120"/>
+              </a:rPr>
+              <a:t>가능</a:t>
+            </a:r>
+            <a:r>
+              <a:rPr lang="en-US" sz="1350" b="1" dirty="0">
+                <a:solidFill>
+                  <a:srgbClr val="FFFFFF"/>
+                </a:solidFill>
+                <a:latin typeface="맑은 고딕" pitchFamily="34" charset="0"/>
+                <a:ea typeface="맑은 고딕" pitchFamily="34" charset="-122"/>
+                <a:cs typeface="맑은 고딕" pitchFamily="34" charset="-120"/>
+              </a:rPr>
+              <a:t> - 별도 계정 불필요</a:t>
             </a:r>
             <a:endParaRPr lang="en-US" sz="1350" dirty="0"/>
           </a:p>
@@ -2144,7 +1962,7 @@
           <a:bodyPr wrap="square" lIns="0" tIns="0" rIns="0" bIns="0" rtlCol="0" anchor="ctr"/>
           <a:lstStyle/>
           <a:p>
-            <a:pPr indent="0" marL="0">
+            <a:pPr marL="0" indent="0">
               <a:buNone/>
             </a:pPr>
             <a:r>
@@ -2206,6 +2024,13 @@
           </a:solidFill>
           <a:ln/>
         </p:spPr>
+        <p:txBody>
+          <a:bodyPr/>
+          <a:lstStyle/>
+          <a:p>
+            <a:endParaRPr lang="ko-KR" altLang="en-US"/>
+          </a:p>
+        </p:txBody>
       </p:sp>
       <p:sp>
         <p:nvSpPr>
@@ -2228,7 +2053,7 @@
           <a:bodyPr wrap="square" lIns="0" tIns="0" rIns="0" bIns="0" rtlCol="0" anchor="ctr"/>
           <a:lstStyle/>
           <a:p>
-            <a:pPr algn="ctr" indent="0" marL="0">
+            <a:pPr marL="0" indent="0" algn="ctr">
               <a:buNone/>
             </a:pPr>
             <a:r>
@@ -2267,7 +2092,7 @@
           <a:bodyPr wrap="square" lIns="0" tIns="0" rIns="0" bIns="0" rtlCol="0" anchor="ctr"/>
           <a:lstStyle/>
           <a:p>
-            <a:pPr algn="l" indent="0" marL="0">
+            <a:pPr marL="0" indent="0" algn="l">
               <a:buNone/>
             </a:pPr>
             <a:r>
@@ -2306,7 +2131,7 @@
           <a:bodyPr wrap="square" lIns="0" tIns="0" rIns="0" bIns="0" rtlCol="0" anchor="ctr"/>
           <a:lstStyle/>
           <a:p>
-            <a:pPr algn="l" indent="0" marL="0">
+            <a:pPr marL="0" indent="0" algn="l">
               <a:buNone/>
             </a:pPr>
             <a:r>
@@ -2350,6 +2175,13 @@
             <a:prstDash val="solid"/>
           </a:ln>
         </p:spPr>
+        <p:txBody>
+          <a:bodyPr/>
+          <a:lstStyle/>
+          <a:p>
+            <a:endParaRPr lang="ko-KR" altLang="en-US"/>
+          </a:p>
+        </p:txBody>
       </p:sp>
       <p:sp>
         <p:nvSpPr>
@@ -2372,7 +2204,7 @@
           <a:bodyPr wrap="square" lIns="0" tIns="0" rIns="0" bIns="0" rtlCol="0" anchor="ctr"/>
           <a:lstStyle/>
           <a:p>
-            <a:pPr algn="l" indent="0" marL="0">
+            <a:pPr marL="0" indent="0" algn="l">
               <a:buNone/>
             </a:pPr>
             <a:r>
@@ -2416,13 +2248,20 @@
             <a:prstDash val="solid"/>
           </a:ln>
           <a:effectLst>
-            <a:outerShdw sx="100000" sy="100000" kx="0" ky="0" algn="bl" rotWithShape="0" blurRad="101600" dist="12700" dir="5400000">
+            <a:outerShdw blurRad="101600" dist="12700" dir="5400000" algn="bl" rotWithShape="0">
               <a:srgbClr val="000000">
                 <a:alpha val="8000"/>
               </a:srgbClr>
             </a:outerShdw>
           </a:effectLst>
         </p:spPr>
+        <p:txBody>
+          <a:bodyPr/>
+          <a:lstStyle/>
+          <a:p>
+            <a:endParaRPr lang="ko-KR" altLang="en-US"/>
+          </a:p>
+        </p:txBody>
       </p:sp>
       <p:sp>
         <p:nvSpPr>
@@ -2445,7 +2284,7 @@
           <a:bodyPr wrap="square" lIns="0" tIns="0" rIns="0" bIns="0" rtlCol="0" anchor="ctr"/>
           <a:lstStyle/>
           <a:p>
-            <a:pPr indent="0" marL="0">
+            <a:pPr marL="0" indent="0">
               <a:buNone/>
             </a:pPr>
             <a:r>
@@ -2574,13 +2413,20 @@
             <a:prstDash val="solid"/>
           </a:ln>
           <a:effectLst>
-            <a:outerShdw sx="100000" sy="100000" kx="0" ky="0" algn="bl" rotWithShape="0" blurRad="101600" dist="12700" dir="5400000">
+            <a:outerShdw blurRad="101600" dist="12700" dir="5400000" algn="bl" rotWithShape="0">
               <a:srgbClr val="000000">
                 <a:alpha val="8000"/>
               </a:srgbClr>
             </a:outerShdw>
           </a:effectLst>
         </p:spPr>
+        <p:txBody>
+          <a:bodyPr/>
+          <a:lstStyle/>
+          <a:p>
+            <a:endParaRPr lang="ko-KR" altLang="en-US"/>
+          </a:p>
+        </p:txBody>
       </p:sp>
       <p:sp>
         <p:nvSpPr>
@@ -2603,7 +2449,7 @@
           <a:bodyPr wrap="square" lIns="0" tIns="0" rIns="0" bIns="0" rtlCol="0" anchor="ctr"/>
           <a:lstStyle/>
           <a:p>
-            <a:pPr indent="0" marL="0">
+            <a:pPr marL="0" indent="0">
               <a:buNone/>
             </a:pPr>
             <a:r>
@@ -2753,13 +2599,20 @@
             <a:prstDash val="solid"/>
           </a:ln>
           <a:effectLst>
-            <a:outerShdw sx="100000" sy="100000" kx="0" ky="0" algn="bl" rotWithShape="0" blurRad="101600" dist="12700" dir="5400000">
+            <a:outerShdw blurRad="101600" dist="12700" dir="5400000" algn="bl" rotWithShape="0">
               <a:srgbClr val="000000">
                 <a:alpha val="8000"/>
               </a:srgbClr>
             </a:outerShdw>
           </a:effectLst>
         </p:spPr>
+        <p:txBody>
+          <a:bodyPr/>
+          <a:lstStyle/>
+          <a:p>
+            <a:endParaRPr lang="ko-KR" altLang="en-US"/>
+          </a:p>
+        </p:txBody>
       </p:sp>
       <p:sp>
         <p:nvSpPr>
@@ -2782,7 +2635,7 @@
           <a:bodyPr wrap="square" lIns="0" tIns="0" rIns="0" bIns="0" rtlCol="0" anchor="ctr"/>
           <a:lstStyle/>
           <a:p>
-            <a:pPr indent="0" marL="0">
+            <a:pPr marL="0" indent="0">
               <a:buNone/>
             </a:pPr>
             <a:r>
@@ -2932,13 +2785,20 @@
             <a:prstDash val="solid"/>
           </a:ln>
           <a:effectLst>
-            <a:outerShdw sx="100000" sy="100000" kx="0" ky="0" algn="bl" rotWithShape="0" blurRad="101600" dist="12700" dir="5400000">
+            <a:outerShdw blurRad="101600" dist="12700" dir="5400000" algn="bl" rotWithShape="0">
               <a:srgbClr val="000000">
                 <a:alpha val="8000"/>
               </a:srgbClr>
             </a:outerShdw>
           </a:effectLst>
         </p:spPr>
+        <p:txBody>
+          <a:bodyPr/>
+          <a:lstStyle/>
+          <a:p>
+            <a:endParaRPr lang="ko-KR" altLang="en-US"/>
+          </a:p>
+        </p:txBody>
       </p:sp>
       <p:sp>
         <p:nvSpPr>
@@ -2961,7 +2821,7 @@
           <a:bodyPr wrap="square" lIns="0" tIns="0" rIns="0" bIns="0" rtlCol="0" anchor="ctr"/>
           <a:lstStyle/>
           <a:p>
-            <a:pPr indent="0" marL="0">
+            <a:pPr marL="0" indent="0">
               <a:buNone/>
             </a:pPr>
             <a:r>
@@ -3129,6 +2989,13 @@
           </a:solidFill>
           <a:ln/>
         </p:spPr>
+        <p:txBody>
+          <a:bodyPr/>
+          <a:lstStyle/>
+          <a:p>
+            <a:endParaRPr lang="ko-KR" altLang="en-US"/>
+          </a:p>
+        </p:txBody>
       </p:sp>
       <p:sp>
         <p:nvSpPr>
@@ -3151,7 +3018,7 @@
           <a:bodyPr wrap="square" lIns="0" tIns="0" rIns="0" bIns="0" rtlCol="0" anchor="ctr"/>
           <a:lstStyle/>
           <a:p>
-            <a:pPr algn="ctr" indent="0" marL="0">
+            <a:pPr marL="0" indent="0" algn="ctr">
               <a:buNone/>
             </a:pPr>
             <a:r>
@@ -3190,7 +3057,7 @@
           <a:bodyPr wrap="square" lIns="0" tIns="0" rIns="0" bIns="0" rtlCol="0" anchor="ctr"/>
           <a:lstStyle/>
           <a:p>
-            <a:pPr algn="l" indent="0" marL="0">
+            <a:pPr marL="0" indent="0" algn="l">
               <a:buNone/>
             </a:pPr>
             <a:r>
@@ -3229,7 +3096,7 @@
           <a:bodyPr wrap="square" lIns="0" tIns="0" rIns="0" bIns="0" rtlCol="0" anchor="ctr"/>
           <a:lstStyle/>
           <a:p>
-            <a:pPr algn="l" indent="0" marL="0">
+            <a:pPr marL="0" indent="0" algn="l">
               <a:buNone/>
             </a:pPr>
             <a:r>
@@ -3273,13 +3140,20 @@
             <a:prstDash val="solid"/>
           </a:ln>
           <a:effectLst>
-            <a:outerShdw sx="100000" sy="100000" kx="0" ky="0" algn="bl" rotWithShape="0" blurRad="127000" dist="12700" dir="5400000">
+            <a:outerShdw blurRad="127000" dist="12700" dir="5400000" algn="bl" rotWithShape="0">
               <a:srgbClr val="000000">
                 <a:alpha val="9000"/>
               </a:srgbClr>
             </a:outerShdw>
           </a:effectLst>
         </p:spPr>
+        <p:txBody>
+          <a:bodyPr/>
+          <a:lstStyle/>
+          <a:p>
+            <a:endParaRPr lang="ko-KR" altLang="en-US"/>
+          </a:p>
+        </p:txBody>
       </p:sp>
       <p:sp>
         <p:nvSpPr>
@@ -3300,6 +3174,13 @@
           </a:solidFill>
           <a:ln/>
         </p:spPr>
+        <p:txBody>
+          <a:bodyPr/>
+          <a:lstStyle/>
+          <a:p>
+            <a:endParaRPr lang="ko-KR" altLang="en-US"/>
+          </a:p>
+        </p:txBody>
       </p:sp>
       <p:sp>
         <p:nvSpPr>
@@ -3322,7 +3203,7 @@
           <a:bodyPr wrap="square" lIns="0" tIns="0" rIns="0" bIns="0" rtlCol="0" anchor="ctr"/>
           <a:lstStyle/>
           <a:p>
-            <a:pPr algn="ctr" indent="0" marL="0">
+            <a:pPr marL="0" indent="0" algn="ctr">
               <a:buNone/>
             </a:pPr>
             <a:r>
@@ -3361,7 +3242,7 @@
           <a:bodyPr wrap="square" lIns="0" tIns="0" rIns="0" bIns="0" rtlCol="0" anchor="ctr"/>
           <a:lstStyle/>
           <a:p>
-            <a:pPr indent="0" marL="0">
+            <a:pPr marL="0" indent="0">
               <a:buNone/>
             </a:pPr>
             <a:r>
@@ -3400,7 +3281,7 @@
           <a:bodyPr wrap="square" lIns="0" tIns="0" rIns="0" bIns="0" rtlCol="0" anchor="ctr"/>
           <a:lstStyle/>
           <a:p>
-            <a:pPr indent="0" marL="0">
+            <a:pPr marL="0" indent="0">
               <a:buNone/>
             </a:pPr>
             <a:r>
@@ -3417,7 +3298,7 @@
             <a:endParaRPr lang="en-US" sz="1150" dirty="0"/>
           </a:p>
           <a:p>
-            <a:pPr indent="0" marL="0">
+            <a:pPr marL="0" indent="0">
               <a:buNone/>
             </a:pPr>
             <a:r>
@@ -3456,7 +3337,7 @@
           <a:bodyPr wrap="square" lIns="0" tIns="0" rIns="0" bIns="0" rtlCol="0" anchor="ctr"/>
           <a:lstStyle/>
           <a:p>
-            <a:pPr algn="ctr" indent="0" marL="0">
+            <a:pPr marL="0" indent="0" algn="ctr">
               <a:buNone/>
             </a:pPr>
             <a:r>
@@ -3500,13 +3381,20 @@
             <a:prstDash val="solid"/>
           </a:ln>
           <a:effectLst>
-            <a:outerShdw sx="100000" sy="100000" kx="0" ky="0" algn="bl" rotWithShape="0" blurRad="127000" dist="12700" dir="5400000">
+            <a:outerShdw blurRad="127000" dist="12700" dir="5400000" algn="bl" rotWithShape="0">
               <a:srgbClr val="000000">
                 <a:alpha val="9000"/>
               </a:srgbClr>
             </a:outerShdw>
           </a:effectLst>
         </p:spPr>
+        <p:txBody>
+          <a:bodyPr/>
+          <a:lstStyle/>
+          <a:p>
+            <a:endParaRPr lang="ko-KR" altLang="en-US"/>
+          </a:p>
+        </p:txBody>
       </p:sp>
       <p:sp>
         <p:nvSpPr>
@@ -3527,6 +3415,13 @@
           </a:solidFill>
           <a:ln/>
         </p:spPr>
+        <p:txBody>
+          <a:bodyPr/>
+          <a:lstStyle/>
+          <a:p>
+            <a:endParaRPr lang="ko-KR" altLang="en-US"/>
+          </a:p>
+        </p:txBody>
       </p:sp>
       <p:sp>
         <p:nvSpPr>
@@ -3549,7 +3444,7 @@
           <a:bodyPr wrap="square" lIns="0" tIns="0" rIns="0" bIns="0" rtlCol="0" anchor="ctr"/>
           <a:lstStyle/>
           <a:p>
-            <a:pPr algn="ctr" indent="0" marL="0">
+            <a:pPr marL="0" indent="0" algn="ctr">
               <a:buNone/>
             </a:pPr>
             <a:r>
@@ -3588,7 +3483,7 @@
           <a:bodyPr wrap="square" lIns="0" tIns="0" rIns="0" bIns="0" rtlCol="0" anchor="ctr"/>
           <a:lstStyle/>
           <a:p>
-            <a:pPr indent="0" marL="0">
+            <a:pPr marL="0" indent="0">
               <a:buNone/>
             </a:pPr>
             <a:r>
@@ -3627,7 +3522,7 @@
           <a:bodyPr wrap="square" lIns="0" tIns="0" rIns="0" bIns="0" rtlCol="0" anchor="ctr"/>
           <a:lstStyle/>
           <a:p>
-            <a:pPr indent="0" marL="0">
+            <a:pPr marL="0" indent="0">
               <a:buNone/>
             </a:pPr>
             <a:r>
@@ -3644,7 +3539,7 @@
             <a:endParaRPr lang="en-US" sz="1150" dirty="0"/>
           </a:p>
           <a:p>
-            <a:pPr indent="0" marL="0">
+            <a:pPr marL="0" indent="0">
               <a:buNone/>
             </a:pPr>
             <a:r>
@@ -3683,7 +3578,7 @@
           <a:bodyPr wrap="square" lIns="0" tIns="0" rIns="0" bIns="0" rtlCol="0" anchor="ctr"/>
           <a:lstStyle/>
           <a:p>
-            <a:pPr algn="ctr" indent="0" marL="0">
+            <a:pPr marL="0" indent="0" algn="ctr">
               <a:buNone/>
             </a:pPr>
             <a:r>
@@ -3727,13 +3622,20 @@
             <a:prstDash val="solid"/>
           </a:ln>
           <a:effectLst>
-            <a:outerShdw sx="100000" sy="100000" kx="0" ky="0" algn="bl" rotWithShape="0" blurRad="127000" dist="12700" dir="5400000">
+            <a:outerShdw blurRad="127000" dist="12700" dir="5400000" algn="bl" rotWithShape="0">
               <a:srgbClr val="000000">
                 <a:alpha val="9000"/>
               </a:srgbClr>
             </a:outerShdw>
           </a:effectLst>
         </p:spPr>
+        <p:txBody>
+          <a:bodyPr/>
+          <a:lstStyle/>
+          <a:p>
+            <a:endParaRPr lang="ko-KR" altLang="en-US"/>
+          </a:p>
+        </p:txBody>
       </p:sp>
       <p:sp>
         <p:nvSpPr>
@@ -3754,6 +3656,13 @@
           </a:solidFill>
           <a:ln/>
         </p:spPr>
+        <p:txBody>
+          <a:bodyPr/>
+          <a:lstStyle/>
+          <a:p>
+            <a:endParaRPr lang="ko-KR" altLang="en-US"/>
+          </a:p>
+        </p:txBody>
       </p:sp>
       <p:sp>
         <p:nvSpPr>
@@ -3776,7 +3685,7 @@
           <a:bodyPr wrap="square" lIns="0" tIns="0" rIns="0" bIns="0" rtlCol="0" anchor="ctr"/>
           <a:lstStyle/>
           <a:p>
-            <a:pPr algn="ctr" indent="0" marL="0">
+            <a:pPr marL="0" indent="0" algn="ctr">
               <a:buNone/>
             </a:pPr>
             <a:r>
@@ -3815,7 +3724,7 @@
           <a:bodyPr wrap="square" lIns="0" tIns="0" rIns="0" bIns="0" rtlCol="0" anchor="ctr"/>
           <a:lstStyle/>
           <a:p>
-            <a:pPr indent="0" marL="0">
+            <a:pPr marL="0" indent="0">
               <a:buNone/>
             </a:pPr>
             <a:r>
@@ -3854,7 +3763,7 @@
           <a:bodyPr wrap="square" lIns="0" tIns="0" rIns="0" bIns="0" rtlCol="0" anchor="ctr"/>
           <a:lstStyle/>
           <a:p>
-            <a:pPr indent="0" marL="0">
+            <a:pPr marL="0" indent="0">
               <a:buNone/>
             </a:pPr>
             <a:r>
@@ -3871,7 +3780,7 @@
             <a:endParaRPr lang="en-US" sz="1150" dirty="0"/>
           </a:p>
           <a:p>
-            <a:pPr indent="0" marL="0">
+            <a:pPr marL="0" indent="0">
               <a:buNone/>
             </a:pPr>
             <a:r>
@@ -3910,7 +3819,7 @@
           <a:bodyPr wrap="square" lIns="0" tIns="0" rIns="0" bIns="0" rtlCol="0" anchor="ctr"/>
           <a:lstStyle/>
           <a:p>
-            <a:pPr algn="ctr" indent="0" marL="0">
+            <a:pPr marL="0" indent="0" algn="ctr">
               <a:buNone/>
             </a:pPr>
             <a:r>
@@ -3954,13 +3863,20 @@
             <a:prstDash val="solid"/>
           </a:ln>
           <a:effectLst>
-            <a:outerShdw sx="100000" sy="100000" kx="0" ky="0" algn="bl" rotWithShape="0" blurRad="127000" dist="12700" dir="5400000">
+            <a:outerShdw blurRad="127000" dist="12700" dir="5400000" algn="bl" rotWithShape="0">
               <a:srgbClr val="000000">
                 <a:alpha val="9000"/>
               </a:srgbClr>
             </a:outerShdw>
           </a:effectLst>
         </p:spPr>
+        <p:txBody>
+          <a:bodyPr/>
+          <a:lstStyle/>
+          <a:p>
+            <a:endParaRPr lang="ko-KR" altLang="en-US"/>
+          </a:p>
+        </p:txBody>
       </p:sp>
       <p:sp>
         <p:nvSpPr>
@@ -3981,6 +3897,13 @@
           </a:solidFill>
           <a:ln/>
         </p:spPr>
+        <p:txBody>
+          <a:bodyPr/>
+          <a:lstStyle/>
+          <a:p>
+            <a:endParaRPr lang="ko-KR" altLang="en-US"/>
+          </a:p>
+        </p:txBody>
       </p:sp>
       <p:sp>
         <p:nvSpPr>
@@ -4003,7 +3926,7 @@
           <a:bodyPr wrap="square" lIns="0" tIns="0" rIns="0" bIns="0" rtlCol="0" anchor="ctr"/>
           <a:lstStyle/>
           <a:p>
-            <a:pPr algn="ctr" indent="0" marL="0">
+            <a:pPr marL="0" indent="0" algn="ctr">
               <a:buNone/>
             </a:pPr>
             <a:r>
@@ -4042,7 +3965,7 @@
           <a:bodyPr wrap="square" lIns="0" tIns="0" rIns="0" bIns="0" rtlCol="0" anchor="ctr"/>
           <a:lstStyle/>
           <a:p>
-            <a:pPr indent="0" marL="0">
+            <a:pPr marL="0" indent="0">
               <a:buNone/>
             </a:pPr>
             <a:r>
@@ -4081,7 +4004,7 @@
           <a:bodyPr wrap="square" lIns="0" tIns="0" rIns="0" bIns="0" rtlCol="0" anchor="ctr"/>
           <a:lstStyle/>
           <a:p>
-            <a:pPr indent="0" marL="0">
+            <a:pPr marL="0" indent="0">
               <a:buNone/>
             </a:pPr>
             <a:r>
@@ -4098,7 +4021,7 @@
             <a:endParaRPr lang="en-US" sz="1150" dirty="0"/>
           </a:p>
           <a:p>
-            <a:pPr indent="0" marL="0">
+            <a:pPr marL="0" indent="0">
               <a:buNone/>
             </a:pPr>
             <a:r>
@@ -4142,13 +4065,20 @@
             <a:prstDash val="solid"/>
           </a:ln>
           <a:effectLst>
-            <a:outerShdw sx="100000" sy="100000" kx="0" ky="0" algn="bl" rotWithShape="0" blurRad="101600" dist="12700" dir="5400000">
+            <a:outerShdw blurRad="101600" dist="12700" dir="5400000" algn="bl" rotWithShape="0">
               <a:srgbClr val="000000">
                 <a:alpha val="8000"/>
               </a:srgbClr>
             </a:outerShdw>
           </a:effectLst>
         </p:spPr>
+        <p:txBody>
+          <a:bodyPr/>
+          <a:lstStyle/>
+          <a:p>
+            <a:endParaRPr lang="ko-KR" altLang="en-US"/>
+          </a:p>
+        </p:txBody>
       </p:sp>
       <p:sp>
         <p:nvSpPr>
@@ -4171,7 +4101,7 @@
           <a:bodyPr wrap="square" lIns="0" tIns="0" rIns="0" bIns="0" rtlCol="0" anchor="ctr"/>
           <a:lstStyle/>
           <a:p>
-            <a:pPr indent="0" marL="0">
+            <a:pPr marL="0" indent="0">
               <a:buNone/>
             </a:pPr>
             <a:r>
@@ -4321,13 +4251,20 @@
             <a:prstDash val="solid"/>
           </a:ln>
           <a:effectLst>
-            <a:outerShdw sx="100000" sy="100000" kx="0" ky="0" algn="bl" rotWithShape="0" blurRad="101600" dist="12700" dir="5400000">
+            <a:outerShdw blurRad="101600" dist="12700" dir="5400000" algn="bl" rotWithShape="0">
               <a:srgbClr val="000000">
                 <a:alpha val="8000"/>
               </a:srgbClr>
             </a:outerShdw>
           </a:effectLst>
         </p:spPr>
+        <p:txBody>
+          <a:bodyPr/>
+          <a:lstStyle/>
+          <a:p>
+            <a:endParaRPr lang="ko-KR" altLang="en-US"/>
+          </a:p>
+        </p:txBody>
       </p:sp>
       <p:sp>
         <p:nvSpPr>
@@ -4350,7 +4287,7 @@
           <a:bodyPr wrap="square" lIns="0" tIns="0" rIns="0" bIns="0" rtlCol="0" anchor="ctr"/>
           <a:lstStyle/>
           <a:p>
-            <a:pPr indent="0" marL="0">
+            <a:pPr marL="0" indent="0">
               <a:buNone/>
             </a:pPr>
             <a:r>
@@ -4497,6 +4434,13 @@
           </a:solidFill>
           <a:ln/>
         </p:spPr>
+        <p:txBody>
+          <a:bodyPr/>
+          <a:lstStyle/>
+          <a:p>
+            <a:endParaRPr lang="ko-KR" altLang="en-US"/>
+          </a:p>
+        </p:txBody>
       </p:sp>
       <p:sp>
         <p:nvSpPr>
@@ -4519,7 +4463,7 @@
           <a:bodyPr wrap="square" lIns="0" tIns="0" rIns="0" bIns="0" rtlCol="0" anchor="ctr"/>
           <a:lstStyle/>
           <a:p>
-            <a:pPr algn="ctr" indent="0" marL="0">
+            <a:pPr marL="0" indent="0" algn="ctr">
               <a:buNone/>
             </a:pPr>
             <a:r>
@@ -4558,7 +4502,7 @@
           <a:bodyPr wrap="square" lIns="0" tIns="0" rIns="0" bIns="0" rtlCol="0" anchor="ctr"/>
           <a:lstStyle/>
           <a:p>
-            <a:pPr algn="l" indent="0" marL="0">
+            <a:pPr marL="0" indent="0" algn="l">
               <a:buNone/>
             </a:pPr>
             <a:r>
@@ -4597,7 +4541,7 @@
           <a:bodyPr wrap="square" lIns="0" tIns="0" rIns="0" bIns="0" rtlCol="0" anchor="ctr"/>
           <a:lstStyle/>
           <a:p>
-            <a:pPr algn="l" indent="0" marL="0">
+            <a:pPr marL="0" indent="0" algn="l">
               <a:buNone/>
             </a:pPr>
             <a:r>
@@ -4641,6 +4585,13 @@
             <a:prstDash val="solid"/>
           </a:ln>
         </p:spPr>
+        <p:txBody>
+          <a:bodyPr/>
+          <a:lstStyle/>
+          <a:p>
+            <a:endParaRPr lang="ko-KR" altLang="en-US"/>
+          </a:p>
+        </p:txBody>
       </p:sp>
       <p:sp>
         <p:nvSpPr>
@@ -4663,9 +4614,6 @@
           <a:bodyPr wrap="square" lIns="0" tIns="0" rIns="0" bIns="0" rtlCol="0" anchor="ctr"/>
           <a:lstStyle/>
           <a:p>
-            <a:pPr algn="l" indent="0" marL="0">
-              <a:buNone/>
-            </a:pPr>
             <a:r>
               <a:rPr lang="en-US" sz="1100" b="1" dirty="0">
                 <a:solidFill>
@@ -4675,7 +4623,7 @@
                 <a:ea typeface="맑은 고딕" pitchFamily="34" charset="-122"/>
                 <a:cs typeface="맑은 고딕" pitchFamily="34" charset="-120"/>
               </a:rPr>
-              <a:t>https://naming-link.com/ko/pricing  (하단 푸터)</a:t>
+              <a:t>https://naming-link.com/ko</a:t>
             </a:r>
             <a:endParaRPr lang="en-US" sz="1100" dirty="0"/>
           </a:p>
@@ -4683,7 +4631,7 @@
       </p:sp>
       <p:graphicFrame>
         <p:nvGraphicFramePr>
-          <p:cNvPr id="4" name="Table 0"/>
+          <p:cNvPr id="8" name="Table 0"/>
           <p:cNvGraphicFramePr>
             <a:graphicFrameLocks noGrp="1"/>
           </p:cNvGraphicFramePr>
@@ -4697,15 +4645,27 @@
         </p:nvGraphicFramePr>
         <p:xfrm>
           <a:off x="685800" y="2011680"/>
-          <a:ext cx="5532120" cy="914400"/>
+          <a:ext cx="5532120" cy="2578608"/>
         </p:xfrm>
         <a:graphic>
           <a:graphicData uri="http://schemas.openxmlformats.org/drawingml/2006/table">
             <a:tbl>
               <a:tblPr/>
               <a:tblGrid>
-                <a:gridCol w="1828800"/>
-                <a:gridCol w="3703320"/>
+                <a:gridCol w="1828800">
+                  <a:extLst>
+                    <a:ext uri="{9D8B030D-6E8A-4147-A177-3AD203B41FA5}">
+                      <a16:colId xmlns:a16="http://schemas.microsoft.com/office/drawing/2014/main" val="20000"/>
+                    </a:ext>
+                  </a:extLst>
+                </a:gridCol>
+                <a:gridCol w="3703320">
+                  <a:extLst>
+                    <a:ext uri="{9D8B030D-6E8A-4147-A177-3AD203B41FA5}">
+                      <a16:colId xmlns:a16="http://schemas.microsoft.com/office/drawing/2014/main" val="20001"/>
+                    </a:ext>
+                  </a:extLst>
+                </a:gridCol>
               </a:tblGrid>
               <a:tr h="384048">
                 <a:tc>
@@ -4713,7 +4673,7 @@
                     <a:bodyPr/>
                     <a:lstStyle/>
                     <a:p>
-                      <a:pPr indent="0" marL="0">
+                      <a:pPr marL="0" indent="0">
                         <a:buNone/>
                       </a:pPr>
                       <a:r>
@@ -4781,7 +4741,7 @@
                     <a:bodyPr/>
                     <a:lstStyle/>
                     <a:p>
-                      <a:pPr indent="0" marL="0">
+                      <a:pPr marL="0" indent="0">
                         <a:buNone/>
                       </a:pPr>
                       <a:r>
@@ -4844,6 +4804,11 @@
                     </a:solidFill>
                   </a:tcPr>
                 </a:tc>
+                <a:extLst>
+                  <a:ext uri="{0D108BD9-81ED-4DB2-BD59-A6C34878D82A}">
+                    <a16:rowId xmlns:a16="http://schemas.microsoft.com/office/drawing/2014/main" val="10000"/>
+                  </a:ext>
+                </a:extLst>
               </a:tr>
               <a:tr h="384048">
                 <a:tc>
@@ -4851,7 +4816,7 @@
                     <a:bodyPr/>
                     <a:lstStyle/>
                     <a:p>
-                      <a:pPr indent="0" marL="0">
+                      <a:pPr marL="0" indent="0">
                         <a:buNone/>
                       </a:pPr>
                       <a:r>
@@ -4919,7 +4884,7 @@
                     <a:bodyPr/>
                     <a:lstStyle/>
                     <a:p>
-                      <a:pPr indent="0" marL="0">
+                      <a:pPr marL="0" indent="0">
                         <a:buNone/>
                       </a:pPr>
                       <a:r>
@@ -4982,6 +4947,11 @@
                     </a:solidFill>
                   </a:tcPr>
                 </a:tc>
+                <a:extLst>
+                  <a:ext uri="{0D108BD9-81ED-4DB2-BD59-A6C34878D82A}">
+                    <a16:rowId xmlns:a16="http://schemas.microsoft.com/office/drawing/2014/main" val="10001"/>
+                  </a:ext>
+                </a:extLst>
               </a:tr>
               <a:tr h="384048">
                 <a:tc>
@@ -4989,7 +4959,7 @@
                     <a:bodyPr/>
                     <a:lstStyle/>
                     <a:p>
-                      <a:pPr indent="0" marL="0">
+                      <a:pPr marL="0" indent="0">
                         <a:buNone/>
                       </a:pPr>
                       <a:r>
@@ -5057,7 +5027,7 @@
                     <a:bodyPr/>
                     <a:lstStyle/>
                     <a:p>
-                      <a:pPr indent="0" marL="0">
+                      <a:pPr marL="0" indent="0">
                         <a:buNone/>
                       </a:pPr>
                       <a:r>
@@ -5120,6 +5090,11 @@
                     </a:solidFill>
                   </a:tcPr>
                 </a:tc>
+                <a:extLst>
+                  <a:ext uri="{0D108BD9-81ED-4DB2-BD59-A6C34878D82A}">
+                    <a16:rowId xmlns:a16="http://schemas.microsoft.com/office/drawing/2014/main" val="10002"/>
+                  </a:ext>
+                </a:extLst>
               </a:tr>
               <a:tr h="384048">
                 <a:tc>
@@ -5127,7 +5102,7 @@
                     <a:bodyPr/>
                     <a:lstStyle/>
                     <a:p>
-                      <a:pPr indent="0" marL="0">
+                      <a:pPr marL="0" indent="0">
                         <a:buNone/>
                       </a:pPr>
                       <a:r>
@@ -5195,7 +5170,7 @@
                     <a:bodyPr/>
                     <a:lstStyle/>
                     <a:p>
-                      <a:pPr indent="0" marL="0">
+                      <a:pPr marL="0" indent="0">
                         <a:buNone/>
                       </a:pPr>
                       <a:r>
@@ -5258,6 +5233,11 @@
                     </a:solidFill>
                   </a:tcPr>
                 </a:tc>
+                <a:extLst>
+                  <a:ext uri="{0D108BD9-81ED-4DB2-BD59-A6C34878D82A}">
+                    <a16:rowId xmlns:a16="http://schemas.microsoft.com/office/drawing/2014/main" val="10003"/>
+                  </a:ext>
+                </a:extLst>
               </a:tr>
               <a:tr h="658368">
                 <a:tc>
@@ -5265,7 +5245,7 @@
                     <a:bodyPr/>
                     <a:lstStyle/>
                     <a:p>
-                      <a:pPr indent="0" marL="0">
+                      <a:pPr marL="0" indent="0">
                         <a:buNone/>
                       </a:pPr>
                       <a:r>
@@ -5333,7 +5313,7 @@
                     <a:bodyPr/>
                     <a:lstStyle/>
                     <a:p>
-                      <a:pPr indent="0" marL="0">
+                      <a:pPr marL="0" indent="0">
                         <a:buNone/>
                       </a:pPr>
                       <a:r>
@@ -5354,7 +5334,7 @@
                       </a:endParaRPr>
                     </a:p>
                     <a:p>
-                      <a:pPr indent="0" marL="0">
+                      <a:pPr marL="0" indent="0">
                         <a:buNone/>
                       </a:pPr>
                       <a:r>
@@ -5417,6 +5397,11 @@
                     </a:solidFill>
                   </a:tcPr>
                 </a:tc>
+                <a:extLst>
+                  <a:ext uri="{0D108BD9-81ED-4DB2-BD59-A6C34878D82A}">
+                    <a16:rowId xmlns:a16="http://schemas.microsoft.com/office/drawing/2014/main" val="10004"/>
+                  </a:ext>
+                </a:extLst>
               </a:tr>
               <a:tr h="384048">
                 <a:tc>
@@ -5424,7 +5409,7 @@
                     <a:bodyPr/>
                     <a:lstStyle/>
                     <a:p>
-                      <a:pPr indent="0" marL="0">
+                      <a:pPr marL="0" indent="0">
                         <a:buNone/>
                       </a:pPr>
                       <a:r>
@@ -5492,7 +5477,7 @@
                     <a:bodyPr/>
                     <a:lstStyle/>
                     <a:p>
-                      <a:pPr indent="0" marL="0">
+                      <a:pPr marL="0" indent="0">
                         <a:buNone/>
                       </a:pPr>
                       <a:r>
@@ -5555,6 +5540,11 @@
                     </a:solidFill>
                   </a:tcPr>
                 </a:tc>
+                <a:extLst>
+                  <a:ext uri="{0D108BD9-81ED-4DB2-BD59-A6C34878D82A}">
+                    <a16:rowId xmlns:a16="http://schemas.microsoft.com/office/drawing/2014/main" val="10005"/>
+                  </a:ext>
+                </a:extLst>
               </a:tr>
             </a:tbl>
           </a:graphicData>
@@ -5562,33 +5552,6 @@
       </p:graphicFrame>
       <p:sp>
         <p:nvSpPr>
-          <p:cNvPr id="9" name="Shape 6"/>
-          <p:cNvSpPr/>
-          <p:nvPr/>
-        </p:nvSpPr>
-        <p:spPr>
-          <a:xfrm>
-            <a:off x="6583680" y="1335024"/>
-            <a:ext cx="4892040" cy="4846320"/>
-          </a:xfrm>
-          <a:prstGeom prst="roundRect">
-            <a:avLst>
-              <a:gd name="adj" fmla="val 1132"/>
-            </a:avLst>
-          </a:prstGeom>
-          <a:solidFill>
-            <a:srgbClr val="F1F6F7"/>
-          </a:solidFill>
-          <a:ln w="19050">
-            <a:solidFill>
-              <a:srgbClr val="00A896"/>
-            </a:solidFill>
-            <a:prstDash val="dash"/>
-          </a:ln>
-        </p:spPr>
-      </p:sp>
-      <p:sp>
-        <p:nvSpPr>
           <p:cNvPr id="10" name="Text 7"/>
           <p:cNvSpPr/>
           <p:nvPr/>
@@ -5608,7 +5571,7 @@
           <a:bodyPr wrap="square" lIns="0" tIns="0" rIns="0" bIns="0" rtlCol="0" anchor="ctr"/>
           <a:lstStyle/>
           <a:p>
-            <a:pPr algn="ctr" indent="0" marL="0">
+            <a:pPr marL="0" indent="0" algn="ctr">
               <a:buNone/>
             </a:pPr>
             <a:r>
@@ -5625,7 +5588,7 @@
             <a:endParaRPr lang="en-US" sz="1500" dirty="0"/>
           </a:p>
           <a:p>
-            <a:pPr algn="ctr" indent="0" marL="0">
+            <a:pPr marL="0" indent="0" algn="ctr">
               <a:buNone/>
             </a:pPr>
             <a:r>
@@ -5664,7 +5627,7 @@
           <a:bodyPr wrap="square" lIns="0" tIns="0" rIns="0" bIns="0" rtlCol="0" anchor="ctr"/>
           <a:lstStyle/>
           <a:p>
-            <a:pPr algn="l" indent="0" marL="0">
+            <a:pPr marL="0" indent="0" algn="l">
               <a:buNone/>
             </a:pPr>
             <a:r>
@@ -5682,6 +5645,66 @@
           </a:p>
         </p:txBody>
       </p:sp>
+      <p:pic>
+        <p:nvPicPr>
+          <p:cNvPr id="13" name="그림 12">
+            <a:extLst>
+              <a:ext uri="{FF2B5EF4-FFF2-40B4-BE49-F238E27FC236}">
+                <a16:creationId xmlns:a16="http://schemas.microsoft.com/office/drawing/2014/main" id="{E5064989-738C-22D3-F06D-A4757C3F2901}"/>
+              </a:ext>
+            </a:extLst>
+          </p:cNvPr>
+          <p:cNvPicPr>
+            <a:picLocks noChangeAspect="1"/>
+          </p:cNvPicPr>
+          <p:nvPr/>
+        </p:nvPicPr>
+        <p:blipFill>
+          <a:blip r:embed="rId3"/>
+          <a:stretch>
+            <a:fillRect/>
+          </a:stretch>
+        </p:blipFill>
+        <p:spPr>
+          <a:xfrm>
+            <a:off x="6582143" y="1670092"/>
+            <a:ext cx="4892040" cy="2661244"/>
+          </a:xfrm>
+          <a:prstGeom prst="rect">
+            <a:avLst/>
+          </a:prstGeom>
+        </p:spPr>
+      </p:pic>
+      <p:pic>
+        <p:nvPicPr>
+          <p:cNvPr id="15" name="그림 14">
+            <a:extLst>
+              <a:ext uri="{FF2B5EF4-FFF2-40B4-BE49-F238E27FC236}">
+                <a16:creationId xmlns:a16="http://schemas.microsoft.com/office/drawing/2014/main" id="{88C940C9-C762-4A89-422A-67BBFC3F3F83}"/>
+              </a:ext>
+            </a:extLst>
+          </p:cNvPr>
+          <p:cNvPicPr>
+            <a:picLocks noChangeAspect="1"/>
+          </p:cNvPicPr>
+          <p:nvPr/>
+        </p:nvPicPr>
+        <p:blipFill>
+          <a:blip r:embed="rId4"/>
+          <a:stretch>
+            <a:fillRect/>
+          </a:stretch>
+        </p:blipFill>
+        <p:spPr>
+          <a:xfrm>
+            <a:off x="6582143" y="4642232"/>
+            <a:ext cx="4892040" cy="887209"/>
+          </a:xfrm>
+          <a:prstGeom prst="rect">
+            <a:avLst/>
+          </a:prstGeom>
+        </p:spPr>
+      </p:pic>
     </p:spTree>
   </p:cSld>
   <p:clrMapOvr>
@@ -5726,6 +5749,13 @@
           </a:solidFill>
           <a:ln/>
         </p:spPr>
+        <p:txBody>
+          <a:bodyPr/>
+          <a:lstStyle/>
+          <a:p>
+            <a:endParaRPr lang="ko-KR" altLang="en-US"/>
+          </a:p>
+        </p:txBody>
       </p:sp>
       <p:sp>
         <p:nvSpPr>
@@ -5748,7 +5778,7 @@
           <a:bodyPr wrap="square" lIns="0" tIns="0" rIns="0" bIns="0" rtlCol="0" anchor="ctr"/>
           <a:lstStyle/>
           <a:p>
-            <a:pPr algn="ctr" indent="0" marL="0">
+            <a:pPr marL="0" indent="0" algn="ctr">
               <a:buNone/>
             </a:pPr>
             <a:r>
@@ -5787,7 +5817,7 @@
           <a:bodyPr wrap="square" lIns="0" tIns="0" rIns="0" bIns="0" rtlCol="0" anchor="ctr"/>
           <a:lstStyle/>
           <a:p>
-            <a:pPr algn="l" indent="0" marL="0">
+            <a:pPr marL="0" indent="0" algn="l">
               <a:buNone/>
             </a:pPr>
             <a:r>
@@ -5826,7 +5856,7 @@
           <a:bodyPr wrap="square" lIns="0" tIns="0" rIns="0" bIns="0" rtlCol="0" anchor="ctr"/>
           <a:lstStyle/>
           <a:p>
-            <a:pPr algn="l" indent="0" marL="0">
+            <a:pPr marL="0" indent="0" algn="l">
               <a:buNone/>
             </a:pPr>
             <a:r>
@@ -5870,6 +5900,13 @@
             <a:prstDash val="solid"/>
           </a:ln>
         </p:spPr>
+        <p:txBody>
+          <a:bodyPr/>
+          <a:lstStyle/>
+          <a:p>
+            <a:endParaRPr lang="ko-KR" altLang="en-US"/>
+          </a:p>
+        </p:txBody>
       </p:sp>
       <p:sp>
         <p:nvSpPr>
@@ -5892,7 +5929,7 @@
           <a:bodyPr wrap="square" lIns="0" tIns="0" rIns="0" bIns="0" rtlCol="0" anchor="ctr"/>
           <a:lstStyle/>
           <a:p>
-            <a:pPr algn="l" indent="0" marL="0">
+            <a:pPr marL="0" indent="0" algn="l">
               <a:buNone/>
             </a:pPr>
             <a:r>
@@ -5912,30 +5949,48 @@
       </p:sp>
       <p:graphicFrame>
         <p:nvGraphicFramePr>
-          <p:cNvPr id="5" name="Table 0"/>
+          <p:cNvPr id="8" name="Table 0"/>
           <p:cNvGraphicFramePr>
             <a:graphicFrameLocks noGrp="1"/>
           </p:cNvGraphicFramePr>
           <p:nvPr>
             <p:extLst>
               <p:ext uri="{D42A27DB-BD31-4B8C-83A1-F6EECF244321}">
-                <p14:modId xmlns:p14="http://schemas.microsoft.com/office/powerpoint/2010/main" val="1579011935"/>
+                <p14:modId xmlns:p14="http://schemas.microsoft.com/office/powerpoint/2010/main" val="3763190041"/>
               </p:ext>
             </p:extLst>
           </p:nvPr>
         </p:nvGraphicFramePr>
         <p:xfrm>
           <a:off x="685800" y="1965960"/>
-          <a:ext cx="5532120" cy="914400"/>
+          <a:ext cx="5532120" cy="2651760"/>
         </p:xfrm>
         <a:graphic>
           <a:graphicData uri="http://schemas.openxmlformats.org/drawingml/2006/table">
             <a:tbl>
               <a:tblPr/>
               <a:tblGrid>
-                <a:gridCol w="3063240"/>
-                <a:gridCol w="1280160"/>
-                <a:gridCol w="1188720"/>
+                <a:gridCol w="3063240">
+                  <a:extLst>
+                    <a:ext uri="{9D8B030D-6E8A-4147-A177-3AD203B41FA5}">
+                      <a16:colId xmlns:a16="http://schemas.microsoft.com/office/drawing/2014/main" val="20000"/>
+                    </a:ext>
+                  </a:extLst>
+                </a:gridCol>
+                <a:gridCol w="1280160">
+                  <a:extLst>
+                    <a:ext uri="{9D8B030D-6E8A-4147-A177-3AD203B41FA5}">
+                      <a16:colId xmlns:a16="http://schemas.microsoft.com/office/drawing/2014/main" val="20001"/>
+                    </a:ext>
+                  </a:extLst>
+                </a:gridCol>
+                <a:gridCol w="1188720">
+                  <a:extLst>
+                    <a:ext uri="{9D8B030D-6E8A-4147-A177-3AD203B41FA5}">
+                      <a16:colId xmlns:a16="http://schemas.microsoft.com/office/drawing/2014/main" val="20002"/>
+                    </a:ext>
+                  </a:extLst>
+                </a:gridCol>
               </a:tblGrid>
               <a:tr h="457200">
                 <a:tc>
@@ -5943,7 +5998,7 @@
                     <a:bodyPr/>
                     <a:lstStyle/>
                     <a:p>
-                      <a:pPr indent="0" marL="0">
+                      <a:pPr marL="0" indent="0">
                         <a:buNone/>
                       </a:pPr>
                       <a:r>
@@ -6011,7 +6066,7 @@
                     <a:bodyPr/>
                     <a:lstStyle/>
                     <a:p>
-                      <a:pPr indent="0" marL="0">
+                      <a:pPr marL="0" indent="0">
                         <a:buNone/>
                       </a:pPr>
                       <a:r>
@@ -6079,7 +6134,7 @@
                     <a:bodyPr/>
                     <a:lstStyle/>
                     <a:p>
-                      <a:pPr algn="r" indent="0" marL="0">
+                      <a:pPr marL="0" indent="0" algn="r">
                         <a:buNone/>
                       </a:pPr>
                       <a:r>
@@ -6142,6 +6197,11 @@
                     </a:solidFill>
                   </a:tcPr>
                 </a:tc>
+                <a:extLst>
+                  <a:ext uri="{0D108BD9-81ED-4DB2-BD59-A6C34878D82A}">
+                    <a16:rowId xmlns:a16="http://schemas.microsoft.com/office/drawing/2014/main" val="10000"/>
+                  </a:ext>
+                </a:extLst>
               </a:tr>
               <a:tr h="548640">
                 <a:tc>
@@ -6149,7 +6209,7 @@
                     <a:bodyPr/>
                     <a:lstStyle/>
                     <a:p>
-                      <a:pPr indent="0" marL="0">
+                      <a:pPr marL="0" indent="0">
                         <a:buNone/>
                       </a:pPr>
                       <a:r>
@@ -6217,7 +6277,7 @@
                     <a:bodyPr/>
                     <a:lstStyle/>
                     <a:p>
-                      <a:pPr indent="0" marL="0">
+                      <a:pPr marL="0" indent="0">
                         <a:buNone/>
                       </a:pPr>
                       <a:r>
@@ -6285,7 +6345,7 @@
                     <a:bodyPr/>
                     <a:lstStyle/>
                     <a:p>
-                      <a:pPr algn="r" indent="0" marL="0">
+                      <a:pPr marL="0" indent="0" algn="r">
                         <a:buNone/>
                       </a:pPr>
                       <a:r>
@@ -6348,6 +6408,11 @@
                     </a:solidFill>
                   </a:tcPr>
                 </a:tc>
+                <a:extLst>
+                  <a:ext uri="{0D108BD9-81ED-4DB2-BD59-A6C34878D82A}">
+                    <a16:rowId xmlns:a16="http://schemas.microsoft.com/office/drawing/2014/main" val="10001"/>
+                  </a:ext>
+                </a:extLst>
               </a:tr>
               <a:tr h="548640">
                 <a:tc>
@@ -6355,7 +6420,7 @@
                     <a:bodyPr/>
                     <a:lstStyle/>
                     <a:p>
-                      <a:pPr indent="0" marL="0">
+                      <a:pPr marL="0" indent="0">
                         <a:buNone/>
                       </a:pPr>
                       <a:r>
@@ -6423,7 +6488,7 @@
                     <a:bodyPr/>
                     <a:lstStyle/>
                     <a:p>
-                      <a:pPr indent="0" marL="0">
+                      <a:pPr marL="0" indent="0">
                         <a:buNone/>
                       </a:pPr>
                       <a:r>
@@ -6491,7 +6556,7 @@
                     <a:bodyPr/>
                     <a:lstStyle/>
                     <a:p>
-                      <a:pPr algn="r" indent="0" marL="0">
+                      <a:pPr marL="0" indent="0" algn="r">
                         <a:buNone/>
                       </a:pPr>
                       <a:r>
@@ -6554,6 +6619,11 @@
                     </a:solidFill>
                   </a:tcPr>
                 </a:tc>
+                <a:extLst>
+                  <a:ext uri="{0D108BD9-81ED-4DB2-BD59-A6C34878D82A}">
+                    <a16:rowId xmlns:a16="http://schemas.microsoft.com/office/drawing/2014/main" val="10002"/>
+                  </a:ext>
+                </a:extLst>
               </a:tr>
               <a:tr h="548640">
                 <a:tc>
@@ -6561,7 +6631,7 @@
                     <a:bodyPr/>
                     <a:lstStyle/>
                     <a:p>
-                      <a:pPr indent="0" marL="0">
+                      <a:pPr marL="0" indent="0">
                         <a:buNone/>
                       </a:pPr>
                       <a:r>
@@ -6629,7 +6699,7 @@
                     <a:bodyPr/>
                     <a:lstStyle/>
                     <a:p>
-                      <a:pPr indent="0" marL="0">
+                      <a:pPr marL="0" indent="0">
                         <a:buNone/>
                       </a:pPr>
                       <a:r>
@@ -6697,7 +6767,7 @@
                     <a:bodyPr/>
                     <a:lstStyle/>
                     <a:p>
-                      <a:pPr algn="r" indent="0" marL="0">
+                      <a:pPr marL="0" indent="0" algn="r">
                         <a:buNone/>
                       </a:pPr>
                       <a:r>
@@ -6760,6 +6830,11 @@
                     </a:solidFill>
                   </a:tcPr>
                 </a:tc>
+                <a:extLst>
+                  <a:ext uri="{0D108BD9-81ED-4DB2-BD59-A6C34878D82A}">
+                    <a16:rowId xmlns:a16="http://schemas.microsoft.com/office/drawing/2014/main" val="10003"/>
+                  </a:ext>
+                </a:extLst>
               </a:tr>
               <a:tr h="548640">
                 <a:tc>
@@ -6767,7 +6842,7 @@
                     <a:bodyPr/>
                     <a:lstStyle/>
                     <a:p>
-                      <a:pPr indent="0" marL="0">
+                      <a:pPr marL="0" indent="0">
                         <a:buNone/>
                       </a:pPr>
                       <a:r>
@@ -6779,7 +6854,51 @@
                           <a:ea typeface="맑은 고딕" pitchFamily="34" charset="-122"/>
                           <a:cs typeface="맑은 고딕" pitchFamily="34" charset="-120"/>
                         </a:rPr>
-                        <a:t>후보 전체 일괄 공개</a:t>
+                        <a:t>후보 전체 </a:t>
+                      </a:r>
+                      <a:r>
+                        <a:rPr lang="en-US" sz="1100" dirty="0" err="1">
+                          <a:solidFill>
+                            <a:srgbClr val="1F2933"/>
+                          </a:solidFill>
+                          <a:latin typeface="맑은 고딕" pitchFamily="34" charset="0"/>
+                          <a:ea typeface="맑은 고딕" pitchFamily="34" charset="-122"/>
+                          <a:cs typeface="맑은 고딕" pitchFamily="34" charset="-120"/>
+                        </a:rPr>
+                        <a:t>일괄</a:t>
+                      </a:r>
+                      <a:r>
+                        <a:rPr lang="en-US" sz="1100" dirty="0">
+                          <a:solidFill>
+                            <a:srgbClr val="1F2933"/>
+                          </a:solidFill>
+                          <a:latin typeface="맑은 고딕" pitchFamily="34" charset="0"/>
+                          <a:ea typeface="맑은 고딕" pitchFamily="34" charset="-122"/>
+                          <a:cs typeface="맑은 고딕" pitchFamily="34" charset="-120"/>
+                        </a:rPr>
+                        <a:t> </a:t>
+                      </a:r>
+                      <a:r>
+                        <a:rPr lang="en-US" sz="1100" dirty="0" err="1">
+                          <a:solidFill>
+                            <a:srgbClr val="1F2933"/>
+                          </a:solidFill>
+                          <a:latin typeface="맑은 고딕" pitchFamily="34" charset="0"/>
+                          <a:ea typeface="맑은 고딕" pitchFamily="34" charset="-122"/>
+                          <a:cs typeface="맑은 고딕" pitchFamily="34" charset="-120"/>
+                        </a:rPr>
+                        <a:t>공개</a:t>
+                      </a:r>
+                      <a:r>
+                        <a:rPr lang="en-US" sz="1100" dirty="0">
+                          <a:solidFill>
+                            <a:srgbClr val="1F2933"/>
+                          </a:solidFill>
+                          <a:latin typeface="맑은 고딕" pitchFamily="34" charset="0"/>
+                          <a:ea typeface="맑은 고딕" pitchFamily="34" charset="-122"/>
+                          <a:cs typeface="맑은 고딕" pitchFamily="34" charset="-120"/>
+                        </a:rPr>
+                        <a:t> (Korean to Global)</a:t>
                       </a:r>
                       <a:endParaRPr lang="en-US" sz="1100" dirty="0">
                         <a:latin typeface="맑은 고딕" charset="0"/>
@@ -6835,7 +6954,7 @@
                     <a:bodyPr/>
                     <a:lstStyle/>
                     <a:p>
-                      <a:pPr indent="0" marL="0">
+                      <a:pPr marL="0" indent="0">
                         <a:buNone/>
                       </a:pPr>
                       <a:r>
@@ -6903,7 +7022,7 @@
                     <a:bodyPr/>
                     <a:lstStyle/>
                     <a:p>
-                      <a:pPr algn="r" indent="0" marL="0">
+                      <a:pPr marL="0" indent="0" algn="r">
                         <a:buNone/>
                       </a:pPr>
                       <a:r>
@@ -6966,6 +7085,11 @@
                     </a:solidFill>
                   </a:tcPr>
                 </a:tc>
+                <a:extLst>
+                  <a:ext uri="{0D108BD9-81ED-4DB2-BD59-A6C34878D82A}">
+                    <a16:rowId xmlns:a16="http://schemas.microsoft.com/office/drawing/2014/main" val="10004"/>
+                  </a:ext>
+                </a:extLst>
               </a:tr>
             </a:tbl>
           </a:graphicData>
@@ -6997,13 +7121,20 @@
             <a:prstDash val="solid"/>
           </a:ln>
           <a:effectLst>
-            <a:outerShdw sx="100000" sy="100000" kx="0" ky="0" algn="bl" rotWithShape="0" blurRad="101600" dist="12700" dir="5400000">
+            <a:outerShdw blurRad="101600" dist="12700" dir="5400000" algn="bl" rotWithShape="0">
               <a:srgbClr val="000000">
                 <a:alpha val="8000"/>
               </a:srgbClr>
             </a:outerShdw>
           </a:effectLst>
         </p:spPr>
+        <p:txBody>
+          <a:bodyPr/>
+          <a:lstStyle/>
+          <a:p>
+            <a:endParaRPr lang="ko-KR" altLang="en-US"/>
+          </a:p>
+        </p:txBody>
       </p:sp>
       <p:sp>
         <p:nvSpPr>
@@ -7026,7 +7157,7 @@
           <a:bodyPr wrap="square" lIns="0" tIns="0" rIns="0" bIns="0" rtlCol="0" anchor="ctr"/>
           <a:lstStyle/>
           <a:p>
-            <a:pPr indent="0" marL="0">
+            <a:pPr marL="0" indent="0">
               <a:buNone/>
             </a:pPr>
             <a:r>
@@ -7134,6 +7265,13 @@
             <a:prstDash val="dash"/>
           </a:ln>
         </p:spPr>
+        <p:txBody>
+          <a:bodyPr/>
+          <a:lstStyle/>
+          <a:p>
+            <a:endParaRPr lang="ko-KR" altLang="en-US"/>
+          </a:p>
+        </p:txBody>
       </p:sp>
       <p:sp>
         <p:nvSpPr>
@@ -7156,7 +7294,7 @@
           <a:bodyPr wrap="square" lIns="0" tIns="0" rIns="0" bIns="0" rtlCol="0" anchor="ctr"/>
           <a:lstStyle/>
           <a:p>
-            <a:pPr algn="ctr" indent="0" marL="0">
+            <a:pPr marL="0" indent="0" algn="ctr">
               <a:buNone/>
             </a:pPr>
             <a:r>
@@ -7173,7 +7311,7 @@
             <a:endParaRPr lang="en-US" sz="1500" dirty="0"/>
           </a:p>
           <a:p>
-            <a:pPr algn="ctr" indent="0" marL="0">
+            <a:pPr marL="0" indent="0" algn="ctr">
               <a:buNone/>
             </a:pPr>
             <a:r>
@@ -7191,6 +7329,36 @@
           </a:p>
         </p:txBody>
       </p:sp>
+      <p:pic>
+        <p:nvPicPr>
+          <p:cNvPr id="15" name="그림 14">
+            <a:extLst>
+              <a:ext uri="{FF2B5EF4-FFF2-40B4-BE49-F238E27FC236}">
+                <a16:creationId xmlns:a16="http://schemas.microsoft.com/office/drawing/2014/main" id="{39079B1A-8392-C694-BBB2-636E38873838}"/>
+              </a:ext>
+            </a:extLst>
+          </p:cNvPr>
+          <p:cNvPicPr>
+            <a:picLocks noChangeAspect="1"/>
+          </p:cNvPicPr>
+          <p:nvPr/>
+        </p:nvPicPr>
+        <p:blipFill>
+          <a:blip r:embed="rId3"/>
+          <a:stretch>
+            <a:fillRect/>
+          </a:stretch>
+        </p:blipFill>
+        <p:spPr>
+          <a:xfrm>
+            <a:off x="6531866" y="1297086"/>
+            <a:ext cx="4971286" cy="5178423"/>
+          </a:xfrm>
+          <a:prstGeom prst="rect">
+            <a:avLst/>
+          </a:prstGeom>
+        </p:spPr>
+      </p:pic>
     </p:spTree>
   </p:cSld>
   <p:clrMapOvr>
@@ -7235,6 +7403,13 @@
           </a:solidFill>
           <a:ln/>
         </p:spPr>
+        <p:txBody>
+          <a:bodyPr/>
+          <a:lstStyle/>
+          <a:p>
+            <a:endParaRPr lang="ko-KR" altLang="en-US"/>
+          </a:p>
+        </p:txBody>
       </p:sp>
       <p:sp>
         <p:nvSpPr>
@@ -7257,7 +7432,7 @@
           <a:bodyPr wrap="square" lIns="0" tIns="0" rIns="0" bIns="0" rtlCol="0" anchor="ctr"/>
           <a:lstStyle/>
           <a:p>
-            <a:pPr algn="ctr" indent="0" marL="0">
+            <a:pPr marL="0" indent="0" algn="ctr">
               <a:buNone/>
             </a:pPr>
             <a:r>
@@ -7296,7 +7471,7 @@
           <a:bodyPr wrap="square" lIns="0" tIns="0" rIns="0" bIns="0" rtlCol="0" anchor="ctr"/>
           <a:lstStyle/>
           <a:p>
-            <a:pPr algn="l" indent="0" marL="0">
+            <a:pPr marL="0" indent="0" algn="l">
               <a:buNone/>
             </a:pPr>
             <a:r>
@@ -7335,7 +7510,7 @@
           <a:bodyPr wrap="square" lIns="0" tIns="0" rIns="0" bIns="0" rtlCol="0" anchor="ctr"/>
           <a:lstStyle/>
           <a:p>
-            <a:pPr algn="l" indent="0" marL="0">
+            <a:pPr marL="0" indent="0" algn="l">
               <a:buNone/>
             </a:pPr>
             <a:r>
@@ -7379,6 +7554,13 @@
             <a:prstDash val="solid"/>
           </a:ln>
         </p:spPr>
+        <p:txBody>
+          <a:bodyPr/>
+          <a:lstStyle/>
+          <a:p>
+            <a:endParaRPr lang="ko-KR" altLang="en-US"/>
+          </a:p>
+        </p:txBody>
       </p:sp>
       <p:sp>
         <p:nvSpPr>
@@ -7401,7 +7583,7 @@
           <a:bodyPr wrap="square" lIns="0" tIns="0" rIns="0" bIns="0" rtlCol="0" anchor="ctr"/>
           <a:lstStyle/>
           <a:p>
-            <a:pPr algn="l" indent="0" marL="0">
+            <a:pPr marL="0" indent="0" algn="l">
               <a:buNone/>
             </a:pPr>
             <a:r>
@@ -7445,13 +7627,20 @@
             <a:prstDash val="solid"/>
           </a:ln>
           <a:effectLst>
-            <a:outerShdw sx="100000" sy="100000" kx="0" ky="0" algn="bl" rotWithShape="0" blurRad="101600" dist="12700" dir="5400000">
+            <a:outerShdw blurRad="101600" dist="12700" dir="5400000" algn="bl" rotWithShape="0">
               <a:srgbClr val="000000">
                 <a:alpha val="8000"/>
               </a:srgbClr>
             </a:outerShdw>
           </a:effectLst>
         </p:spPr>
+        <p:txBody>
+          <a:bodyPr/>
+          <a:lstStyle/>
+          <a:p>
+            <a:endParaRPr lang="ko-KR" altLang="en-US"/>
+          </a:p>
+        </p:txBody>
       </p:sp>
       <p:sp>
         <p:nvSpPr>
@@ -7474,7 +7663,7 @@
           <a:bodyPr wrap="square" lIns="0" tIns="0" rIns="0" bIns="0" rtlCol="0" anchor="ctr"/>
           <a:lstStyle/>
           <a:p>
-            <a:pPr indent="0" marL="0">
+            <a:pPr marL="0" indent="0">
               <a:buNone/>
             </a:pPr>
             <a:r>
@@ -7624,13 +7813,20 @@
             <a:prstDash val="solid"/>
           </a:ln>
           <a:effectLst>
-            <a:outerShdw sx="100000" sy="100000" kx="0" ky="0" algn="bl" rotWithShape="0" blurRad="101600" dist="12700" dir="5400000">
+            <a:outerShdw blurRad="101600" dist="12700" dir="5400000" algn="bl" rotWithShape="0">
               <a:srgbClr val="000000">
                 <a:alpha val="8000"/>
               </a:srgbClr>
             </a:outerShdw>
           </a:effectLst>
         </p:spPr>
+        <p:txBody>
+          <a:bodyPr/>
+          <a:lstStyle/>
+          <a:p>
+            <a:endParaRPr lang="ko-KR" altLang="en-US"/>
+          </a:p>
+        </p:txBody>
       </p:sp>
       <p:sp>
         <p:nvSpPr>
@@ -7653,7 +7849,7 @@
           <a:bodyPr wrap="square" lIns="0" tIns="0" rIns="0" bIns="0" rtlCol="0" anchor="ctr"/>
           <a:lstStyle/>
           <a:p>
-            <a:pPr indent="0" marL="0">
+            <a:pPr marL="0" indent="0">
               <a:buNone/>
             </a:pPr>
             <a:r>
@@ -7779,33 +7975,6 @@
       </p:sp>
       <p:sp>
         <p:nvSpPr>
-          <p:cNvPr id="14" name="Shape 12"/>
-          <p:cNvSpPr/>
-          <p:nvPr/>
-        </p:nvSpPr>
-        <p:spPr>
-          <a:xfrm>
-            <a:off x="6583680" y="1335024"/>
-            <a:ext cx="4892040" cy="4809744"/>
-          </a:xfrm>
-          <a:prstGeom prst="roundRect">
-            <a:avLst>
-              <a:gd name="adj" fmla="val 1141"/>
-            </a:avLst>
-          </a:prstGeom>
-          <a:solidFill>
-            <a:srgbClr val="F1F6F7"/>
-          </a:solidFill>
-          <a:ln w="19050">
-            <a:solidFill>
-              <a:srgbClr val="00A896"/>
-            </a:solidFill>
-            <a:prstDash val="dash"/>
-          </a:ln>
-        </p:spPr>
-      </p:sp>
-      <p:sp>
-        <p:nvSpPr>
           <p:cNvPr id="15" name="Text 13"/>
           <p:cNvSpPr/>
           <p:nvPr/>
@@ -7825,7 +7994,7 @@
           <a:bodyPr wrap="square" lIns="0" tIns="0" rIns="0" bIns="0" rtlCol="0" anchor="ctr"/>
           <a:lstStyle/>
           <a:p>
-            <a:pPr algn="ctr" indent="0" marL="0">
+            <a:pPr marL="0" indent="0" algn="ctr">
               <a:buNone/>
             </a:pPr>
             <a:r>
@@ -7842,7 +8011,7 @@
             <a:endParaRPr lang="en-US" sz="1500" dirty="0"/>
           </a:p>
           <a:p>
-            <a:pPr algn="ctr" indent="0" marL="0">
+            <a:pPr marL="0" indent="0" algn="ctr">
               <a:buNone/>
             </a:pPr>
             <a:r>
@@ -7860,6 +8029,118 @@
           </a:p>
         </p:txBody>
       </p:sp>
+      <p:grpSp>
+        <p:nvGrpSpPr>
+          <p:cNvPr id="20" name="그룹 19">
+            <a:extLst>
+              <a:ext uri="{FF2B5EF4-FFF2-40B4-BE49-F238E27FC236}">
+                <a16:creationId xmlns:a16="http://schemas.microsoft.com/office/drawing/2014/main" id="{0E91A08F-1D61-72E8-90DF-0384841A599D}"/>
+              </a:ext>
+            </a:extLst>
+          </p:cNvPr>
+          <p:cNvGrpSpPr/>
+          <p:nvPr/>
+        </p:nvGrpSpPr>
+        <p:grpSpPr>
+          <a:xfrm>
+            <a:off x="6473952" y="975264"/>
+            <a:ext cx="3759546" cy="5055885"/>
+            <a:chOff x="6300215" y="1279187"/>
+            <a:chExt cx="4415428" cy="5893918"/>
+          </a:xfrm>
+        </p:grpSpPr>
+        <p:pic>
+          <p:nvPicPr>
+            <p:cNvPr id="21" name="그림 20">
+              <a:extLst>
+                <a:ext uri="{FF2B5EF4-FFF2-40B4-BE49-F238E27FC236}">
+                  <a16:creationId xmlns:a16="http://schemas.microsoft.com/office/drawing/2014/main" id="{A355FB19-5262-F476-0EB2-25F99962EA37}"/>
+                </a:ext>
+              </a:extLst>
+            </p:cNvPr>
+            <p:cNvPicPr>
+              <a:picLocks noChangeAspect="1"/>
+            </p:cNvPicPr>
+            <p:nvPr/>
+          </p:nvPicPr>
+          <p:blipFill>
+            <a:blip r:embed="rId3"/>
+            <a:srcRect l="380"/>
+            <a:stretch>
+              <a:fillRect/>
+            </a:stretch>
+          </p:blipFill>
+          <p:spPr>
+            <a:xfrm>
+              <a:off x="6300216" y="1279187"/>
+              <a:ext cx="4415427" cy="4582312"/>
+            </a:xfrm>
+            <a:prstGeom prst="rect">
+              <a:avLst/>
+            </a:prstGeom>
+          </p:spPr>
+        </p:pic>
+        <p:pic>
+          <p:nvPicPr>
+            <p:cNvPr id="22" name="그림 21">
+              <a:extLst>
+                <a:ext uri="{FF2B5EF4-FFF2-40B4-BE49-F238E27FC236}">
+                  <a16:creationId xmlns:a16="http://schemas.microsoft.com/office/drawing/2014/main" id="{107AC481-DE78-ABA6-E85A-FD4C0B9DA2C2}"/>
+                </a:ext>
+              </a:extLst>
+            </p:cNvPr>
+            <p:cNvPicPr>
+              <a:picLocks noChangeAspect="1"/>
+            </p:cNvPicPr>
+            <p:nvPr/>
+          </p:nvPicPr>
+          <p:blipFill>
+            <a:blip r:embed="rId4"/>
+            <a:stretch>
+              <a:fillRect/>
+            </a:stretch>
+          </p:blipFill>
+          <p:spPr>
+            <a:xfrm>
+              <a:off x="6300215" y="5197172"/>
+              <a:ext cx="4415427" cy="1975933"/>
+            </a:xfrm>
+            <a:prstGeom prst="rect">
+              <a:avLst/>
+            </a:prstGeom>
+          </p:spPr>
+        </p:pic>
+      </p:grpSp>
+      <p:pic>
+        <p:nvPicPr>
+          <p:cNvPr id="26" name="그림 25">
+            <a:extLst>
+              <a:ext uri="{FF2B5EF4-FFF2-40B4-BE49-F238E27FC236}">
+                <a16:creationId xmlns:a16="http://schemas.microsoft.com/office/drawing/2014/main" id="{5495CCD0-8D16-747F-BE53-FDC812284E7B}"/>
+              </a:ext>
+            </a:extLst>
+          </p:cNvPr>
+          <p:cNvPicPr>
+            <a:picLocks noChangeAspect="1"/>
+          </p:cNvPicPr>
+          <p:nvPr/>
+        </p:nvPicPr>
+        <p:blipFill>
+          <a:blip r:embed="rId5"/>
+          <a:stretch>
+            <a:fillRect/>
+          </a:stretch>
+        </p:blipFill>
+        <p:spPr>
+          <a:xfrm>
+            <a:off x="7590201" y="4069080"/>
+            <a:ext cx="4343400" cy="2453976"/>
+          </a:xfrm>
+          <a:prstGeom prst="rect">
+            <a:avLst/>
+          </a:prstGeom>
+        </p:spPr>
+      </p:pic>
     </p:spTree>
   </p:cSld>
   <p:clrMapOvr>
@@ -7904,6 +8185,13 @@
           </a:solidFill>
           <a:ln/>
         </p:spPr>
+        <p:txBody>
+          <a:bodyPr/>
+          <a:lstStyle/>
+          <a:p>
+            <a:endParaRPr lang="ko-KR" altLang="en-US"/>
+          </a:p>
+        </p:txBody>
       </p:sp>
       <p:sp>
         <p:nvSpPr>
@@ -7926,7 +8214,7 @@
           <a:bodyPr wrap="square" lIns="0" tIns="0" rIns="0" bIns="0" rtlCol="0" anchor="ctr"/>
           <a:lstStyle/>
           <a:p>
-            <a:pPr algn="ctr" indent="0" marL="0">
+            <a:pPr marL="0" indent="0" algn="ctr">
               <a:buNone/>
             </a:pPr>
             <a:r>
@@ -7965,7 +8253,7 @@
           <a:bodyPr wrap="square" lIns="0" tIns="0" rIns="0" bIns="0" rtlCol="0" anchor="ctr"/>
           <a:lstStyle/>
           <a:p>
-            <a:pPr algn="l" indent="0" marL="0">
+            <a:pPr marL="0" indent="0" algn="l">
               <a:buNone/>
             </a:pPr>
             <a:r>
@@ -8004,7 +8292,7 @@
           <a:bodyPr wrap="square" lIns="0" tIns="0" rIns="0" bIns="0" rtlCol="0" anchor="ctr"/>
           <a:lstStyle/>
           <a:p>
-            <a:pPr algn="l" indent="0" marL="0">
+            <a:pPr marL="0" indent="0" algn="l">
               <a:buNone/>
             </a:pPr>
             <a:r>
@@ -8048,6 +8336,13 @@
             <a:prstDash val="solid"/>
           </a:ln>
         </p:spPr>
+        <p:txBody>
+          <a:bodyPr/>
+          <a:lstStyle/>
+          <a:p>
+            <a:endParaRPr lang="ko-KR" altLang="en-US"/>
+          </a:p>
+        </p:txBody>
       </p:sp>
       <p:sp>
         <p:nvSpPr>
@@ -8070,7 +8365,7 @@
           <a:bodyPr wrap="square" lIns="0" tIns="0" rIns="0" bIns="0" rtlCol="0" anchor="ctr"/>
           <a:lstStyle/>
           <a:p>
-            <a:pPr algn="l" indent="0" marL="0">
+            <a:pPr marL="0" indent="0" algn="l">
               <a:buNone/>
             </a:pPr>
             <a:r>
@@ -8107,6 +8402,13 @@
           </a:solidFill>
           <a:ln/>
         </p:spPr>
+        <p:txBody>
+          <a:bodyPr/>
+          <a:lstStyle/>
+          <a:p>
+            <a:endParaRPr lang="ko-KR" altLang="en-US"/>
+          </a:p>
+        </p:txBody>
       </p:sp>
       <p:sp>
         <p:nvSpPr>
@@ -8129,7 +8431,7 @@
           <a:bodyPr wrap="square" lIns="0" tIns="0" rIns="0" bIns="0" rtlCol="0" anchor="ctr"/>
           <a:lstStyle/>
           <a:p>
-            <a:pPr algn="ctr" indent="0" marL="0">
+            <a:pPr marL="0" indent="0" algn="ctr">
               <a:buNone/>
             </a:pPr>
             <a:r>
@@ -8168,7 +8470,7 @@
           <a:bodyPr wrap="square" lIns="0" tIns="0" rIns="0" bIns="0" rtlCol="0" anchor="ctr"/>
           <a:lstStyle/>
           <a:p>
-            <a:pPr indent="0" marL="0">
+            <a:pPr marL="0" indent="0">
               <a:buNone/>
             </a:pPr>
             <a:r>
@@ -8207,7 +8509,7 @@
           <a:bodyPr wrap="square" lIns="0" tIns="0" rIns="0" bIns="0" rtlCol="0" anchor="t"/>
           <a:lstStyle/>
           <a:p>
-            <a:pPr indent="0" marL="0">
+            <a:pPr marL="0" indent="0">
               <a:buNone/>
             </a:pPr>
             <a:r>
@@ -8244,6 +8546,13 @@
           </a:solidFill>
           <a:ln/>
         </p:spPr>
+        <p:txBody>
+          <a:bodyPr/>
+          <a:lstStyle/>
+          <a:p>
+            <a:endParaRPr lang="ko-KR" altLang="en-US"/>
+          </a:p>
+        </p:txBody>
       </p:sp>
       <p:sp>
         <p:nvSpPr>
@@ -8266,7 +8575,7 @@
           <a:bodyPr wrap="square" lIns="0" tIns="0" rIns="0" bIns="0" rtlCol="0" anchor="ctr"/>
           <a:lstStyle/>
           <a:p>
-            <a:pPr algn="ctr" indent="0" marL="0">
+            <a:pPr marL="0" indent="0" algn="ctr">
               <a:buNone/>
             </a:pPr>
             <a:r>
@@ -8305,7 +8614,7 @@
           <a:bodyPr wrap="square" lIns="0" tIns="0" rIns="0" bIns="0" rtlCol="0" anchor="ctr"/>
           <a:lstStyle/>
           <a:p>
-            <a:pPr indent="0" marL="0">
+            <a:pPr marL="0" indent="0">
               <a:buNone/>
             </a:pPr>
             <a:r>
@@ -8344,7 +8653,7 @@
           <a:bodyPr wrap="square" lIns="0" tIns="0" rIns="0" bIns="0" rtlCol="0" anchor="t"/>
           <a:lstStyle/>
           <a:p>
-            <a:pPr indent="0" marL="0">
+            <a:pPr marL="0" indent="0">
               <a:buNone/>
             </a:pPr>
             <a:r>
@@ -8381,6 +8690,13 @@
           </a:solidFill>
           <a:ln/>
         </p:spPr>
+        <p:txBody>
+          <a:bodyPr/>
+          <a:lstStyle/>
+          <a:p>
+            <a:endParaRPr lang="ko-KR" altLang="en-US"/>
+          </a:p>
+        </p:txBody>
       </p:sp>
       <p:sp>
         <p:nvSpPr>
@@ -8403,7 +8719,7 @@
           <a:bodyPr wrap="square" lIns="0" tIns="0" rIns="0" bIns="0" rtlCol="0" anchor="ctr"/>
           <a:lstStyle/>
           <a:p>
-            <a:pPr algn="ctr" indent="0" marL="0">
+            <a:pPr marL="0" indent="0" algn="ctr">
               <a:buNone/>
             </a:pPr>
             <a:r>
@@ -8442,7 +8758,7 @@
           <a:bodyPr wrap="square" lIns="0" tIns="0" rIns="0" bIns="0" rtlCol="0" anchor="ctr"/>
           <a:lstStyle/>
           <a:p>
-            <a:pPr indent="0" marL="0">
+            <a:pPr marL="0" indent="0">
               <a:buNone/>
             </a:pPr>
             <a:r>
@@ -8481,7 +8797,7 @@
           <a:bodyPr wrap="square" lIns="0" tIns="0" rIns="0" bIns="0" rtlCol="0" anchor="t"/>
           <a:lstStyle/>
           <a:p>
-            <a:pPr indent="0" marL="0">
+            <a:pPr marL="0" indent="0">
               <a:buNone/>
             </a:pPr>
             <a:r>
@@ -8498,33 +8814,6 @@
             <a:endParaRPr lang="en-US" sz="1100" dirty="0"/>
           </a:p>
         </p:txBody>
-      </p:sp>
-      <p:sp>
-        <p:nvSpPr>
-          <p:cNvPr id="20" name="Shape 18"/>
-          <p:cNvSpPr/>
-          <p:nvPr/>
-        </p:nvSpPr>
-        <p:spPr>
-          <a:xfrm>
-            <a:off x="6583680" y="1335024"/>
-            <a:ext cx="4892040" cy="4809744"/>
-          </a:xfrm>
-          <a:prstGeom prst="roundRect">
-            <a:avLst>
-              <a:gd name="adj" fmla="val 1141"/>
-            </a:avLst>
-          </a:prstGeom>
-          <a:solidFill>
-            <a:srgbClr val="F1F6F7"/>
-          </a:solidFill>
-          <a:ln w="19050">
-            <a:solidFill>
-              <a:srgbClr val="00A896"/>
-            </a:solidFill>
-            <a:prstDash val="dash"/>
-          </a:ln>
-        </p:spPr>
       </p:sp>
       <p:sp>
         <p:nvSpPr>
@@ -8547,7 +8836,7 @@
           <a:bodyPr wrap="square" lIns="0" tIns="0" rIns="0" bIns="0" rtlCol="0" anchor="ctr"/>
           <a:lstStyle/>
           <a:p>
-            <a:pPr algn="ctr" indent="0" marL="0">
+            <a:pPr marL="0" indent="0" algn="ctr">
               <a:buNone/>
             </a:pPr>
             <a:r>
@@ -8564,7 +8853,7 @@
             <a:endParaRPr lang="en-US" sz="1500" dirty="0"/>
           </a:p>
           <a:p>
-            <a:pPr algn="ctr" indent="0" marL="0">
+            <a:pPr marL="0" indent="0" algn="ctr">
               <a:buNone/>
             </a:pPr>
             <a:r>
@@ -8601,6 +8890,13 @@
           </a:solidFill>
           <a:ln/>
         </p:spPr>
+        <p:txBody>
+          <a:bodyPr/>
+          <a:lstStyle/>
+          <a:p>
+            <a:endParaRPr lang="ko-KR" altLang="en-US"/>
+          </a:p>
+        </p:txBody>
       </p:sp>
       <p:sp>
         <p:nvSpPr>
@@ -8623,7 +8919,7 @@
           <a:bodyPr wrap="square" lIns="0" tIns="0" rIns="0" bIns="0" rtlCol="0" anchor="ctr"/>
           <a:lstStyle/>
           <a:p>
-            <a:pPr algn="ctr" indent="0" marL="0">
+            <a:pPr marL="0" indent="0" algn="ctr">
               <a:buNone/>
             </a:pPr>
             <a:r>
@@ -8662,7 +8958,7 @@
           <a:bodyPr wrap="square" lIns="0" tIns="0" rIns="0" bIns="0" rtlCol="0" anchor="ctr"/>
           <a:lstStyle/>
           <a:p>
-            <a:pPr indent="0" marL="0">
+            <a:pPr marL="0" indent="0">
               <a:buNone/>
             </a:pPr>
             <a:r>
@@ -8701,7 +8997,7 @@
           <a:bodyPr wrap="square" lIns="0" tIns="0" rIns="0" bIns="0" rtlCol="0" anchor="t"/>
           <a:lstStyle/>
           <a:p>
-            <a:pPr indent="0" marL="0">
+            <a:pPr marL="0" indent="0">
               <a:buNone/>
             </a:pPr>
             <a:r>
@@ -8740,7 +9036,7 @@
           <a:bodyPr wrap="square" lIns="0" tIns="0" rIns="0" bIns="0" rtlCol="0" anchor="t"/>
           <a:lstStyle/>
           <a:p>
-            <a:pPr indent="0" marL="0">
+            <a:pPr marL="0" indent="0">
               <a:buNone/>
             </a:pPr>
             <a:r>
@@ -8757,7 +9053,7 @@
             <a:endParaRPr lang="en-US" sz="1100" dirty="0"/>
           </a:p>
           <a:p>
-            <a:pPr indent="0" marL="0">
+            <a:pPr marL="0" indent="0">
               <a:buNone/>
             </a:pPr>
             <a:r>
@@ -8775,6 +9071,88 @@
           </a:p>
         </p:txBody>
       </p:sp>
+      <p:grpSp>
+        <p:nvGrpSpPr>
+          <p:cNvPr id="31" name="그룹 30">
+            <a:extLst>
+              <a:ext uri="{FF2B5EF4-FFF2-40B4-BE49-F238E27FC236}">
+                <a16:creationId xmlns:a16="http://schemas.microsoft.com/office/drawing/2014/main" id="{751D6D90-D047-398A-8FDA-0F35A3C02C22}"/>
+              </a:ext>
+            </a:extLst>
+          </p:cNvPr>
+          <p:cNvGrpSpPr/>
+          <p:nvPr/>
+        </p:nvGrpSpPr>
+        <p:grpSpPr>
+          <a:xfrm>
+            <a:off x="7462628" y="1230712"/>
+            <a:ext cx="4040524" cy="5529264"/>
+            <a:chOff x="6300215" y="1279187"/>
+            <a:chExt cx="4415428" cy="5893918"/>
+          </a:xfrm>
+        </p:grpSpPr>
+        <p:pic>
+          <p:nvPicPr>
+            <p:cNvPr id="28" name="그림 27">
+              <a:extLst>
+                <a:ext uri="{FF2B5EF4-FFF2-40B4-BE49-F238E27FC236}">
+                  <a16:creationId xmlns:a16="http://schemas.microsoft.com/office/drawing/2014/main" id="{526CB7B8-ED80-EF38-DEC3-56CB0EF6EA8F}"/>
+                </a:ext>
+              </a:extLst>
+            </p:cNvPr>
+            <p:cNvPicPr>
+              <a:picLocks noChangeAspect="1"/>
+            </p:cNvPicPr>
+            <p:nvPr/>
+          </p:nvPicPr>
+          <p:blipFill>
+            <a:blip r:embed="rId3"/>
+            <a:srcRect l="380"/>
+            <a:stretch>
+              <a:fillRect/>
+            </a:stretch>
+          </p:blipFill>
+          <p:spPr>
+            <a:xfrm>
+              <a:off x="6300216" y="1279187"/>
+              <a:ext cx="4415427" cy="4582312"/>
+            </a:xfrm>
+            <a:prstGeom prst="rect">
+              <a:avLst/>
+            </a:prstGeom>
+          </p:spPr>
+        </p:pic>
+        <p:pic>
+          <p:nvPicPr>
+            <p:cNvPr id="30" name="그림 29">
+              <a:extLst>
+                <a:ext uri="{FF2B5EF4-FFF2-40B4-BE49-F238E27FC236}">
+                  <a16:creationId xmlns:a16="http://schemas.microsoft.com/office/drawing/2014/main" id="{7B9B9CB1-10BD-1171-7E84-AE2EEC879670}"/>
+                </a:ext>
+              </a:extLst>
+            </p:cNvPr>
+            <p:cNvPicPr>
+              <a:picLocks noChangeAspect="1"/>
+            </p:cNvPicPr>
+            <p:nvPr/>
+          </p:nvPicPr>
+          <p:blipFill>
+            <a:blip r:embed="rId4"/>
+            <a:stretch>
+              <a:fillRect/>
+            </a:stretch>
+          </p:blipFill>
+          <p:spPr>
+            <a:xfrm>
+              <a:off x="6300215" y="5197172"/>
+              <a:ext cx="4415427" cy="1975933"/>
+            </a:xfrm>
+            <a:prstGeom prst="rect">
+              <a:avLst/>
+            </a:prstGeom>
+          </p:spPr>
+        </p:pic>
+      </p:grpSp>
     </p:spTree>
   </p:cSld>
   <p:clrMapOvr>
@@ -8819,6 +9197,13 @@
           </a:solidFill>
           <a:ln/>
         </p:spPr>
+        <p:txBody>
+          <a:bodyPr/>
+          <a:lstStyle/>
+          <a:p>
+            <a:endParaRPr lang="ko-KR" altLang="en-US"/>
+          </a:p>
+        </p:txBody>
       </p:sp>
       <p:sp>
         <p:nvSpPr>
@@ -8841,7 +9226,7 @@
           <a:bodyPr wrap="square" lIns="0" tIns="0" rIns="0" bIns="0" rtlCol="0" anchor="ctr"/>
           <a:lstStyle/>
           <a:p>
-            <a:pPr algn="ctr" indent="0" marL="0">
+            <a:pPr marL="0" indent="0" algn="ctr">
               <a:buNone/>
             </a:pPr>
             <a:r>
@@ -8880,7 +9265,7 @@
           <a:bodyPr wrap="square" lIns="0" tIns="0" rIns="0" bIns="0" rtlCol="0" anchor="ctr"/>
           <a:lstStyle/>
           <a:p>
-            <a:pPr algn="l" indent="0" marL="0">
+            <a:pPr marL="0" indent="0" algn="l">
               <a:buNone/>
             </a:pPr>
             <a:r>
@@ -8919,7 +9304,7 @@
           <a:bodyPr wrap="square" lIns="0" tIns="0" rIns="0" bIns="0" rtlCol="0" anchor="ctr"/>
           <a:lstStyle/>
           <a:p>
-            <a:pPr algn="l" indent="0" marL="0">
+            <a:pPr marL="0" indent="0" algn="l">
               <a:buNone/>
             </a:pPr>
             <a:r>
@@ -8963,6 +9348,13 @@
             <a:prstDash val="solid"/>
           </a:ln>
         </p:spPr>
+        <p:txBody>
+          <a:bodyPr/>
+          <a:lstStyle/>
+          <a:p>
+            <a:endParaRPr lang="ko-KR" altLang="en-US"/>
+          </a:p>
+        </p:txBody>
       </p:sp>
       <p:sp>
         <p:nvSpPr>
@@ -8985,7 +9377,7 @@
           <a:bodyPr wrap="square" lIns="0" tIns="0" rIns="0" bIns="0" rtlCol="0" anchor="ctr"/>
           <a:lstStyle/>
           <a:p>
-            <a:pPr algn="l" indent="0" marL="0">
+            <a:pPr marL="0" indent="0" algn="l">
               <a:buNone/>
             </a:pPr>
             <a:r>
@@ -9002,33 +9394,6 @@
             <a:endParaRPr lang="en-US" sz="1100" dirty="0"/>
           </a:p>
         </p:txBody>
-      </p:sp>
-      <p:sp>
-        <p:nvSpPr>
-          <p:cNvPr id="8" name="Shape 6"/>
-          <p:cNvSpPr/>
-          <p:nvPr/>
-        </p:nvSpPr>
-        <p:spPr>
-          <a:xfrm>
-            <a:off x="685800" y="2011680"/>
-            <a:ext cx="7315200" cy="4133088"/>
-          </a:xfrm>
-          <a:prstGeom prst="roundRect">
-            <a:avLst>
-              <a:gd name="adj" fmla="val 1327"/>
-            </a:avLst>
-          </a:prstGeom>
-          <a:solidFill>
-            <a:srgbClr val="F1F6F7"/>
-          </a:solidFill>
-          <a:ln w="19050">
-            <a:solidFill>
-              <a:srgbClr val="00A896"/>
-            </a:solidFill>
-            <a:prstDash val="dash"/>
-          </a:ln>
-        </p:spPr>
       </p:sp>
       <p:sp>
         <p:nvSpPr>
@@ -9051,7 +9416,7 @@
           <a:bodyPr wrap="square" lIns="0" tIns="0" rIns="0" bIns="0" rtlCol="0" anchor="ctr"/>
           <a:lstStyle/>
           <a:p>
-            <a:pPr algn="ctr" indent="0" marL="0">
+            <a:pPr marL="0" indent="0" algn="ctr">
               <a:buNone/>
             </a:pPr>
             <a:r>
@@ -9068,7 +9433,7 @@
             <a:endParaRPr lang="en-US" sz="1500" dirty="0"/>
           </a:p>
           <a:p>
-            <a:pPr algn="ctr" indent="0" marL="0">
+            <a:pPr marL="0" indent="0" algn="ctr">
               <a:buNone/>
             </a:pPr>
             <a:r>
@@ -9112,13 +9477,20 @@
             <a:prstDash val="solid"/>
           </a:ln>
           <a:effectLst>
-            <a:outerShdw sx="100000" sy="100000" kx="0" ky="0" algn="bl" rotWithShape="0" blurRad="101600" dist="12700" dir="5400000">
+            <a:outerShdw blurRad="101600" dist="12700" dir="5400000" algn="bl" rotWithShape="0">
               <a:srgbClr val="000000">
                 <a:alpha val="8000"/>
               </a:srgbClr>
             </a:outerShdw>
           </a:effectLst>
         </p:spPr>
+        <p:txBody>
+          <a:bodyPr/>
+          <a:lstStyle/>
+          <a:p>
+            <a:endParaRPr lang="ko-KR" altLang="en-US"/>
+          </a:p>
+        </p:txBody>
       </p:sp>
       <p:sp>
         <p:nvSpPr>
@@ -9141,7 +9513,7 @@
           <a:bodyPr wrap="square" lIns="0" tIns="0" rIns="0" bIns="0" rtlCol="0" anchor="ctr"/>
           <a:lstStyle/>
           <a:p>
-            <a:pPr indent="0" marL="0">
+            <a:pPr marL="0" indent="0">
               <a:buNone/>
             </a:pPr>
             <a:r>
@@ -9238,12 +9610,154 @@
                 <a:ea typeface="맑은 고딕" pitchFamily="34" charset="-122"/>
                 <a:cs typeface="맑은 고딕" pitchFamily="34" charset="-120"/>
               </a:rPr>
-              <a:t>회원 가입이나 로그인 없이 비회원으로 진행할 수 있습니다.</a:t>
+              <a:t>회원 가입이나 로그인 없이 비회원으로 진행할 수 </a:t>
+            </a:r>
+            <a:r>
+              <a:rPr lang="en-US" sz="1150" dirty="0" err="1">
+                <a:solidFill>
+                  <a:srgbClr val="1F2933"/>
+                </a:solidFill>
+                <a:latin typeface="맑은 고딕" pitchFamily="34" charset="0"/>
+                <a:ea typeface="맑은 고딕" pitchFamily="34" charset="-122"/>
+                <a:cs typeface="맑은 고딕" pitchFamily="34" charset="-120"/>
+              </a:rPr>
+              <a:t>있습니다</a:t>
+            </a:r>
+            <a:r>
+              <a:rPr lang="en-US" sz="1150" dirty="0">
+                <a:solidFill>
+                  <a:srgbClr val="1F2933"/>
+                </a:solidFill>
+                <a:latin typeface="맑은 고딕" pitchFamily="34" charset="0"/>
+                <a:ea typeface="맑은 고딕" pitchFamily="34" charset="-122"/>
+                <a:cs typeface="맑은 고딕" pitchFamily="34" charset="-120"/>
+              </a:rPr>
+              <a:t>.</a:t>
+            </a:r>
+          </a:p>
+          <a:p>
+            <a:pPr marL="342900" indent="-342900">
+              <a:spcAft>
+                <a:spcPts val="600"/>
+              </a:spcAft>
+              <a:buSzPct val="100000"/>
+              <a:buChar char="•"/>
+            </a:pPr>
+            <a:r>
+              <a:rPr lang="en-US" sz="1150" dirty="0">
+                <a:solidFill>
+                  <a:srgbClr val="1F2933"/>
+                </a:solidFill>
+                <a:latin typeface="맑은 고딕" pitchFamily="34" charset="0"/>
+                <a:ea typeface="맑은 고딕" pitchFamily="34" charset="-122"/>
+              </a:rPr>
+              <a:t>9,900</a:t>
+            </a:r>
+            <a:r>
+              <a:rPr lang="ko-KR" altLang="en-US" sz="1150" dirty="0">
+                <a:solidFill>
+                  <a:srgbClr val="1F2933"/>
+                </a:solidFill>
+                <a:latin typeface="맑은 고딕" pitchFamily="34" charset="0"/>
+                <a:ea typeface="맑은 고딕" pitchFamily="34" charset="-122"/>
+              </a:rPr>
+              <a:t>원의 상품의 경우에는 추가 정밀 사주 계산 정보를</a:t>
+            </a:r>
+            <a:r>
+              <a:rPr lang="en-US" altLang="ko-KR" sz="1150" dirty="0">
+                <a:solidFill>
+                  <a:srgbClr val="1F2933"/>
+                </a:solidFill>
+                <a:latin typeface="맑은 고딕" pitchFamily="34" charset="0"/>
+                <a:ea typeface="맑은 고딕" pitchFamily="34" charset="-122"/>
+              </a:rPr>
+              <a:t> </a:t>
+            </a:r>
+            <a:r>
+              <a:rPr lang="ko-KR" altLang="en-US" sz="1150" dirty="0">
+                <a:solidFill>
+                  <a:srgbClr val="1F2933"/>
+                </a:solidFill>
+                <a:latin typeface="맑은 고딕" pitchFamily="34" charset="0"/>
+                <a:ea typeface="맑은 고딕" pitchFamily="34" charset="-122"/>
+              </a:rPr>
+              <a:t>입력해야만 결제가 가능합니다</a:t>
+            </a:r>
+            <a:r>
+              <a:rPr lang="en-US" altLang="ko-KR" sz="1150" dirty="0">
+                <a:solidFill>
+                  <a:srgbClr val="1F2933"/>
+                </a:solidFill>
+                <a:latin typeface="맑은 고딕" pitchFamily="34" charset="0"/>
+                <a:ea typeface="맑은 고딕" pitchFamily="34" charset="-122"/>
+              </a:rPr>
+              <a:t>.</a:t>
             </a:r>
             <a:endParaRPr lang="en-US" sz="1150" dirty="0"/>
           </a:p>
         </p:txBody>
       </p:sp>
+      <p:pic>
+        <p:nvPicPr>
+          <p:cNvPr id="14" name="그림 13">
+            <a:extLst>
+              <a:ext uri="{FF2B5EF4-FFF2-40B4-BE49-F238E27FC236}">
+                <a16:creationId xmlns:a16="http://schemas.microsoft.com/office/drawing/2014/main" id="{E431BD25-8C7C-3786-966E-DE34374C88BD}"/>
+              </a:ext>
+            </a:extLst>
+          </p:cNvPr>
+          <p:cNvPicPr>
+            <a:picLocks noChangeAspect="1"/>
+          </p:cNvPicPr>
+          <p:nvPr/>
+        </p:nvPicPr>
+        <p:blipFill>
+          <a:blip r:embed="rId3"/>
+          <a:srcRect b="9588"/>
+          <a:stretch>
+            <a:fillRect/>
+          </a:stretch>
+        </p:blipFill>
+        <p:spPr>
+          <a:xfrm>
+            <a:off x="704088" y="1929384"/>
+            <a:ext cx="5630660" cy="3901180"/>
+          </a:xfrm>
+          <a:prstGeom prst="rect">
+            <a:avLst/>
+          </a:prstGeom>
+        </p:spPr>
+      </p:pic>
+      <p:pic>
+        <p:nvPicPr>
+          <p:cNvPr id="16" name="그림 15">
+            <a:extLst>
+              <a:ext uri="{FF2B5EF4-FFF2-40B4-BE49-F238E27FC236}">
+                <a16:creationId xmlns:a16="http://schemas.microsoft.com/office/drawing/2014/main" id="{DC02F3E0-4F2D-577A-A318-A5ADA3A7A056}"/>
+              </a:ext>
+            </a:extLst>
+          </p:cNvPr>
+          <p:cNvPicPr>
+            <a:picLocks noChangeAspect="1"/>
+          </p:cNvPicPr>
+          <p:nvPr/>
+        </p:nvPicPr>
+        <p:blipFill>
+          <a:blip r:embed="rId4"/>
+          <a:stretch>
+            <a:fillRect/>
+          </a:stretch>
+        </p:blipFill>
+        <p:spPr>
+          <a:xfrm>
+            <a:off x="1819267" y="4209077"/>
+            <a:ext cx="6200021" cy="2508455"/>
+          </a:xfrm>
+          <a:prstGeom prst="rect">
+            <a:avLst/>
+          </a:prstGeom>
+        </p:spPr>
+      </p:pic>
     </p:spTree>
   </p:cSld>
   <p:clrMapOvr>
@@ -9288,6 +9802,13 @@
           </a:solidFill>
           <a:ln/>
         </p:spPr>
+        <p:txBody>
+          <a:bodyPr/>
+          <a:lstStyle/>
+          <a:p>
+            <a:endParaRPr lang="ko-KR" altLang="en-US"/>
+          </a:p>
+        </p:txBody>
       </p:sp>
       <p:sp>
         <p:nvSpPr>
@@ -9310,7 +9831,7 @@
           <a:bodyPr wrap="square" lIns="0" tIns="0" rIns="0" bIns="0" rtlCol="0" anchor="ctr"/>
           <a:lstStyle/>
           <a:p>
-            <a:pPr algn="ctr" indent="0" marL="0">
+            <a:pPr marL="0" indent="0" algn="ctr">
               <a:buNone/>
             </a:pPr>
             <a:r>
@@ -9349,7 +9870,7 @@
           <a:bodyPr wrap="square" lIns="0" tIns="0" rIns="0" bIns="0" rtlCol="0" anchor="ctr"/>
           <a:lstStyle/>
           <a:p>
-            <a:pPr algn="l" indent="0" marL="0">
+            <a:pPr marL="0" indent="0" algn="l">
               <a:buNone/>
             </a:pPr>
             <a:r>
@@ -9388,7 +9909,7 @@
           <a:bodyPr wrap="square" lIns="0" tIns="0" rIns="0" bIns="0" rtlCol="0" anchor="ctr"/>
           <a:lstStyle/>
           <a:p>
-            <a:pPr algn="l" indent="0" marL="0">
+            <a:pPr marL="0" indent="0" algn="l">
               <a:buNone/>
             </a:pPr>
             <a:r>
@@ -9432,6 +9953,13 @@
             <a:prstDash val="solid"/>
           </a:ln>
         </p:spPr>
+        <p:txBody>
+          <a:bodyPr/>
+          <a:lstStyle/>
+          <a:p>
+            <a:endParaRPr lang="ko-KR" altLang="en-US"/>
+          </a:p>
+        </p:txBody>
       </p:sp>
       <p:sp>
         <p:nvSpPr>
@@ -9454,7 +9982,7 @@
           <a:bodyPr wrap="square" lIns="0" tIns="0" rIns="0" bIns="0" rtlCol="0" anchor="ctr"/>
           <a:lstStyle/>
           <a:p>
-            <a:pPr algn="l" indent="0" marL="0">
+            <a:pPr marL="0" indent="0" algn="l">
               <a:buNone/>
             </a:pPr>
             <a:r>
@@ -9471,33 +9999,6 @@
             <a:endParaRPr lang="en-US" sz="1100" dirty="0"/>
           </a:p>
         </p:txBody>
-      </p:sp>
-      <p:sp>
-        <p:nvSpPr>
-          <p:cNvPr id="8" name="Shape 6"/>
-          <p:cNvSpPr/>
-          <p:nvPr/>
-        </p:nvSpPr>
-        <p:spPr>
-          <a:xfrm>
-            <a:off x="685800" y="2011680"/>
-            <a:ext cx="7315200" cy="4133088"/>
-          </a:xfrm>
-          <a:prstGeom prst="roundRect">
-            <a:avLst>
-              <a:gd name="adj" fmla="val 1327"/>
-            </a:avLst>
-          </a:prstGeom>
-          <a:solidFill>
-            <a:srgbClr val="F1F6F7"/>
-          </a:solidFill>
-          <a:ln w="19050">
-            <a:solidFill>
-              <a:srgbClr val="00A896"/>
-            </a:solidFill>
-            <a:prstDash val="dash"/>
-          </a:ln>
-        </p:spPr>
       </p:sp>
       <p:sp>
         <p:nvSpPr>
@@ -9520,7 +10021,7 @@
           <a:bodyPr wrap="square" lIns="0" tIns="0" rIns="0" bIns="0" rtlCol="0" anchor="ctr"/>
           <a:lstStyle/>
           <a:p>
-            <a:pPr algn="ctr" indent="0" marL="0">
+            <a:pPr marL="0" indent="0" algn="ctr">
               <a:buNone/>
             </a:pPr>
             <a:r>
@@ -9537,7 +10038,7 @@
             <a:endParaRPr lang="en-US" sz="1500" dirty="0"/>
           </a:p>
           <a:p>
-            <a:pPr algn="ctr" indent="0" marL="0">
+            <a:pPr marL="0" indent="0" algn="ctr">
               <a:buNone/>
             </a:pPr>
             <a:r>
@@ -9581,13 +10082,20 @@
             <a:prstDash val="solid"/>
           </a:ln>
           <a:effectLst>
-            <a:outerShdw sx="100000" sy="100000" kx="0" ky="0" algn="bl" rotWithShape="0" blurRad="101600" dist="12700" dir="5400000">
+            <a:outerShdw blurRad="101600" dist="12700" dir="5400000" algn="bl" rotWithShape="0">
               <a:srgbClr val="000000">
                 <a:alpha val="8000"/>
               </a:srgbClr>
             </a:outerShdw>
           </a:effectLst>
         </p:spPr>
+        <p:txBody>
+          <a:bodyPr/>
+          <a:lstStyle/>
+          <a:p>
+            <a:endParaRPr lang="ko-KR" altLang="en-US"/>
+          </a:p>
+        </p:txBody>
       </p:sp>
       <p:sp>
         <p:nvSpPr>
@@ -9610,7 +10118,7 @@
           <a:bodyPr wrap="square" lIns="0" tIns="0" rIns="0" bIns="0" rtlCol="0" anchor="ctr"/>
           <a:lstStyle/>
           <a:p>
-            <a:pPr indent="0" marL="0">
+            <a:pPr marL="0" indent="0">
               <a:buNone/>
             </a:pPr>
             <a:r>
@@ -9713,6 +10221,96 @@
           </a:p>
         </p:txBody>
       </p:sp>
+      <p:pic>
+        <p:nvPicPr>
+          <p:cNvPr id="14" name="그림 13">
+            <a:extLst>
+              <a:ext uri="{FF2B5EF4-FFF2-40B4-BE49-F238E27FC236}">
+                <a16:creationId xmlns:a16="http://schemas.microsoft.com/office/drawing/2014/main" id="{3FE1C0F6-9B09-2F97-94FD-1FC62803E5AC}"/>
+              </a:ext>
+            </a:extLst>
+          </p:cNvPr>
+          <p:cNvPicPr>
+            <a:picLocks noChangeAspect="1"/>
+          </p:cNvPicPr>
+          <p:nvPr/>
+        </p:nvPicPr>
+        <p:blipFill>
+          <a:blip r:embed="rId3"/>
+          <a:stretch>
+            <a:fillRect/>
+          </a:stretch>
+        </p:blipFill>
+        <p:spPr>
+          <a:xfrm>
+            <a:off x="539496" y="1957894"/>
+            <a:ext cx="4361221" cy="3742516"/>
+          </a:xfrm>
+          <a:prstGeom prst="rect">
+            <a:avLst/>
+          </a:prstGeom>
+        </p:spPr>
+      </p:pic>
+      <p:pic>
+        <p:nvPicPr>
+          <p:cNvPr id="16" name="그림 15">
+            <a:extLst>
+              <a:ext uri="{FF2B5EF4-FFF2-40B4-BE49-F238E27FC236}">
+                <a16:creationId xmlns:a16="http://schemas.microsoft.com/office/drawing/2014/main" id="{3875B44F-9F5D-17FD-D7FA-E69BBF31D1F2}"/>
+              </a:ext>
+            </a:extLst>
+          </p:cNvPr>
+          <p:cNvPicPr>
+            <a:picLocks noChangeAspect="1"/>
+          </p:cNvPicPr>
+          <p:nvPr/>
+        </p:nvPicPr>
+        <p:blipFill>
+          <a:blip r:embed="rId4"/>
+          <a:stretch>
+            <a:fillRect/>
+          </a:stretch>
+        </p:blipFill>
+        <p:spPr>
+          <a:xfrm>
+            <a:off x="3482555" y="3577819"/>
+            <a:ext cx="2797287" cy="2805637"/>
+          </a:xfrm>
+          <a:prstGeom prst="rect">
+            <a:avLst/>
+          </a:prstGeom>
+        </p:spPr>
+      </p:pic>
+      <p:pic>
+        <p:nvPicPr>
+          <p:cNvPr id="18" name="그림 17">
+            <a:extLst>
+              <a:ext uri="{FF2B5EF4-FFF2-40B4-BE49-F238E27FC236}">
+                <a16:creationId xmlns:a16="http://schemas.microsoft.com/office/drawing/2014/main" id="{BC4B8232-F527-74CC-DA47-1305A6E3705F}"/>
+              </a:ext>
+            </a:extLst>
+          </p:cNvPr>
+          <p:cNvPicPr>
+            <a:picLocks noChangeAspect="1"/>
+          </p:cNvPicPr>
+          <p:nvPr/>
+        </p:nvPicPr>
+        <p:blipFill>
+          <a:blip r:embed="rId5"/>
+          <a:stretch>
+            <a:fillRect/>
+          </a:stretch>
+        </p:blipFill>
+        <p:spPr>
+          <a:xfrm>
+            <a:off x="5404583" y="1985139"/>
+            <a:ext cx="2366870" cy="2600144"/>
+          </a:xfrm>
+          <a:prstGeom prst="rect">
+            <a:avLst/>
+          </a:prstGeom>
+        </p:spPr>
+      </p:pic>
     </p:spTree>
   </p:cSld>
   <p:clrMapOvr>
@@ -9757,6 +10355,13 @@
           </a:solidFill>
           <a:ln/>
         </p:spPr>
+        <p:txBody>
+          <a:bodyPr/>
+          <a:lstStyle/>
+          <a:p>
+            <a:endParaRPr lang="ko-KR" altLang="en-US"/>
+          </a:p>
+        </p:txBody>
       </p:sp>
       <p:sp>
         <p:nvSpPr>
@@ -9779,7 +10384,7 @@
           <a:bodyPr wrap="square" lIns="0" tIns="0" rIns="0" bIns="0" rtlCol="0" anchor="ctr"/>
           <a:lstStyle/>
           <a:p>
-            <a:pPr algn="ctr" indent="0" marL="0">
+            <a:pPr marL="0" indent="0" algn="ctr">
               <a:buNone/>
             </a:pPr>
             <a:r>
@@ -9818,7 +10423,7 @@
           <a:bodyPr wrap="square" lIns="0" tIns="0" rIns="0" bIns="0" rtlCol="0" anchor="ctr"/>
           <a:lstStyle/>
           <a:p>
-            <a:pPr algn="l" indent="0" marL="0">
+            <a:pPr marL="0" indent="0" algn="l">
               <a:buNone/>
             </a:pPr>
             <a:r>
@@ -9857,7 +10462,7 @@
           <a:bodyPr wrap="square" lIns="0" tIns="0" rIns="0" bIns="0" rtlCol="0" anchor="ctr"/>
           <a:lstStyle/>
           <a:p>
-            <a:pPr algn="l" indent="0" marL="0">
+            <a:pPr marL="0" indent="0" algn="l">
               <a:buNone/>
             </a:pPr>
             <a:r>
@@ -9901,6 +10506,13 @@
             <a:prstDash val="solid"/>
           </a:ln>
         </p:spPr>
+        <p:txBody>
+          <a:bodyPr/>
+          <a:lstStyle/>
+          <a:p>
+            <a:endParaRPr lang="ko-KR" altLang="en-US"/>
+          </a:p>
+        </p:txBody>
       </p:sp>
       <p:sp>
         <p:nvSpPr>
@@ -9923,7 +10535,7 @@
           <a:bodyPr wrap="square" lIns="0" tIns="0" rIns="0" bIns="0" rtlCol="0" anchor="ctr"/>
           <a:lstStyle/>
           <a:p>
-            <a:pPr algn="l" indent="0" marL="0">
+            <a:pPr marL="0" indent="0" algn="l">
               <a:buNone/>
             </a:pPr>
             <a:r>
@@ -9938,89 +10550,6 @@
               <a:t>https://naming-link.com/hanja-meaning/result</a:t>
             </a:r>
             <a:endParaRPr lang="en-US" sz="1100" dirty="0"/>
-          </a:p>
-        </p:txBody>
-      </p:sp>
-      <p:sp>
-        <p:nvSpPr>
-          <p:cNvPr id="8" name="Shape 6"/>
-          <p:cNvSpPr/>
-          <p:nvPr/>
-        </p:nvSpPr>
-        <p:spPr>
-          <a:xfrm>
-            <a:off x="685800" y="2011680"/>
-            <a:ext cx="7315200" cy="4133088"/>
-          </a:xfrm>
-          <a:prstGeom prst="roundRect">
-            <a:avLst>
-              <a:gd name="adj" fmla="val 1327"/>
-            </a:avLst>
-          </a:prstGeom>
-          <a:solidFill>
-            <a:srgbClr val="F1F6F7"/>
-          </a:solidFill>
-          <a:ln w="19050">
-            <a:solidFill>
-              <a:srgbClr val="00A896"/>
-            </a:solidFill>
-            <a:prstDash val="dash"/>
-          </a:ln>
-        </p:spPr>
-      </p:sp>
-      <p:sp>
-        <p:nvSpPr>
-          <p:cNvPr id="9" name="Text 7"/>
-          <p:cNvSpPr/>
-          <p:nvPr/>
-        </p:nvSpPr>
-        <p:spPr>
-          <a:xfrm>
-            <a:off x="960120" y="2011680"/>
-            <a:ext cx="6766560" cy="4133088"/>
-          </a:xfrm>
-          <a:prstGeom prst="rect">
-            <a:avLst/>
-          </a:prstGeom>
-          <a:noFill/>
-          <a:ln/>
-        </p:spPr>
-        <p:txBody>
-          <a:bodyPr wrap="square" lIns="0" tIns="0" rIns="0" bIns="0" rtlCol="0" anchor="ctr"/>
-          <a:lstStyle/>
-          <a:p>
-            <a:pPr algn="ctr" indent="0" marL="0">
-              <a:buNone/>
-            </a:pPr>
-            <a:r>
-              <a:rPr lang="en-US" sz="1500" b="1" dirty="0">
-                <a:solidFill>
-                  <a:srgbClr val="028090"/>
-                </a:solidFill>
-                <a:latin typeface="맑은 고딕" pitchFamily="34" charset="0"/>
-                <a:ea typeface="맑은 고딕" pitchFamily="34" charset="-122"/>
-                <a:cs typeface="맑은 고딕" pitchFamily="34" charset="-120"/>
-              </a:rPr>
-              <a:t>화면 캡처 삽입 위치</a:t>
-            </a:r>
-            <a:endParaRPr lang="en-US" sz="1500" dirty="0"/>
-          </a:p>
-          <a:p>
-            <a:pPr algn="ctr" indent="0" marL="0">
-              <a:buNone/>
-            </a:pPr>
-            <a:r>
-              <a:rPr lang="en-US" sz="1100" dirty="0">
-                <a:solidFill>
-                  <a:srgbClr val="6B7A85"/>
-                </a:solidFill>
-                <a:latin typeface="맑은 고딕" pitchFamily="34" charset="0"/>
-                <a:ea typeface="맑은 고딕" pitchFamily="34" charset="-122"/>
-                <a:cs typeface="맑은 고딕" pitchFamily="34" charset="-120"/>
-              </a:rPr>
-              <a:t>결제 완료 후 리포트가 제공된 화면 · 다운로드 버튼이 보이도록 캡처</a:t>
-            </a:r>
-            <a:endParaRPr lang="en-US" sz="1500" dirty="0"/>
           </a:p>
         </p:txBody>
       </p:sp>
@@ -10050,13 +10579,20 @@
             <a:prstDash val="solid"/>
           </a:ln>
           <a:effectLst>
-            <a:outerShdw sx="100000" sy="100000" kx="0" ky="0" algn="bl" rotWithShape="0" blurRad="101600" dist="12700" dir="5400000">
+            <a:outerShdw blurRad="101600" dist="12700" dir="5400000" algn="bl" rotWithShape="0">
               <a:srgbClr val="000000">
                 <a:alpha val="8000"/>
               </a:srgbClr>
             </a:outerShdw>
           </a:effectLst>
         </p:spPr>
+        <p:txBody>
+          <a:bodyPr/>
+          <a:lstStyle/>
+          <a:p>
+            <a:endParaRPr lang="ko-KR" altLang="en-US"/>
+          </a:p>
+        </p:txBody>
       </p:sp>
       <p:sp>
         <p:nvSpPr>
@@ -10079,7 +10615,7 @@
           <a:bodyPr wrap="square" lIns="0" tIns="0" rIns="0" bIns="0" rtlCol="0" anchor="ctr"/>
           <a:lstStyle/>
           <a:p>
-            <a:pPr indent="0" marL="0">
+            <a:pPr marL="0" indent="0">
               <a:buNone/>
             </a:pPr>
             <a:r>
@@ -10182,6 +10718,323 @@
           </a:p>
         </p:txBody>
       </p:sp>
+      <p:pic>
+        <p:nvPicPr>
+          <p:cNvPr id="14" name="그림 13">
+            <a:extLst>
+              <a:ext uri="{FF2B5EF4-FFF2-40B4-BE49-F238E27FC236}">
+                <a16:creationId xmlns:a16="http://schemas.microsoft.com/office/drawing/2014/main" id="{383FFEB5-EB84-1737-4DCC-18737DCE84C5}"/>
+              </a:ext>
+            </a:extLst>
+          </p:cNvPr>
+          <p:cNvPicPr>
+            <a:picLocks noChangeAspect="1"/>
+          </p:cNvPicPr>
+          <p:nvPr/>
+        </p:nvPicPr>
+        <p:blipFill>
+          <a:blip r:embed="rId3"/>
+          <a:stretch>
+            <a:fillRect/>
+          </a:stretch>
+        </p:blipFill>
+        <p:spPr>
+          <a:xfrm>
+            <a:off x="645357" y="2101029"/>
+            <a:ext cx="2691229" cy="4580696"/>
+          </a:xfrm>
+          <a:prstGeom prst="rect">
+            <a:avLst/>
+          </a:prstGeom>
+        </p:spPr>
+      </p:pic>
+      <p:pic>
+        <p:nvPicPr>
+          <p:cNvPr id="16" name="그림 15">
+            <a:extLst>
+              <a:ext uri="{FF2B5EF4-FFF2-40B4-BE49-F238E27FC236}">
+                <a16:creationId xmlns:a16="http://schemas.microsoft.com/office/drawing/2014/main" id="{BD671E00-3B27-B1CB-44D9-B53633ECB246}"/>
+              </a:ext>
+            </a:extLst>
+          </p:cNvPr>
+          <p:cNvPicPr>
+            <a:picLocks noChangeAspect="1"/>
+          </p:cNvPicPr>
+          <p:nvPr/>
+        </p:nvPicPr>
+        <p:blipFill>
+          <a:blip r:embed="rId4"/>
+          <a:stretch>
+            <a:fillRect/>
+          </a:stretch>
+        </p:blipFill>
+        <p:spPr>
+          <a:xfrm>
+            <a:off x="3800739" y="2101029"/>
+            <a:ext cx="3349869" cy="1327971"/>
+          </a:xfrm>
+          <a:prstGeom prst="rect">
+            <a:avLst/>
+          </a:prstGeom>
+        </p:spPr>
+      </p:pic>
+      <p:pic>
+        <p:nvPicPr>
+          <p:cNvPr id="18" name="그림 17">
+            <a:extLst>
+              <a:ext uri="{FF2B5EF4-FFF2-40B4-BE49-F238E27FC236}">
+                <a16:creationId xmlns:a16="http://schemas.microsoft.com/office/drawing/2014/main" id="{779EBAB5-868C-127A-BD32-9BA0B1FAE484}"/>
+              </a:ext>
+            </a:extLst>
+          </p:cNvPr>
+          <p:cNvPicPr>
+            <a:picLocks noChangeAspect="1"/>
+          </p:cNvPicPr>
+          <p:nvPr/>
+        </p:nvPicPr>
+        <p:blipFill>
+          <a:blip r:embed="rId5"/>
+          <a:stretch>
+            <a:fillRect/>
+          </a:stretch>
+        </p:blipFill>
+        <p:spPr>
+          <a:xfrm>
+            <a:off x="3808850" y="3429000"/>
+            <a:ext cx="3333645" cy="3255937"/>
+          </a:xfrm>
+          <a:prstGeom prst="rect">
+            <a:avLst/>
+          </a:prstGeom>
+        </p:spPr>
+      </p:pic>
+      <p:sp>
+        <p:nvSpPr>
+          <p:cNvPr id="19" name="Text 3">
+            <a:extLst>
+              <a:ext uri="{FF2B5EF4-FFF2-40B4-BE49-F238E27FC236}">
+                <a16:creationId xmlns:a16="http://schemas.microsoft.com/office/drawing/2014/main" id="{169007BA-6ABA-1CD4-DAE1-874FAB0F4A04}"/>
+              </a:ext>
+            </a:extLst>
+          </p:cNvPr>
+          <p:cNvSpPr/>
+          <p:nvPr/>
+        </p:nvSpPr>
+        <p:spPr>
+          <a:xfrm>
+            <a:off x="682209" y="1790133"/>
+            <a:ext cx="2462886" cy="310896"/>
+          </a:xfrm>
+          <a:prstGeom prst="rect">
+            <a:avLst/>
+          </a:prstGeom>
+          <a:noFill/>
+          <a:ln/>
+        </p:spPr>
+        <p:txBody>
+          <a:bodyPr wrap="square" lIns="0" tIns="0" rIns="0" bIns="0" rtlCol="0" anchor="ctr"/>
+          <a:lstStyle/>
+          <a:p>
+            <a:pPr marL="0" indent="0" algn="l">
+              <a:buNone/>
+            </a:pPr>
+            <a:r>
+              <a:rPr lang="en-US" sz="1200" dirty="0">
+                <a:solidFill>
+                  <a:srgbClr val="6B7A85"/>
+                </a:solidFill>
+                <a:latin typeface="맑은 고딕" pitchFamily="34" charset="0"/>
+                <a:ea typeface="맑은 고딕" pitchFamily="34" charset="-122"/>
+                <a:cs typeface="맑은 고딕" pitchFamily="34" charset="-120"/>
+              </a:rPr>
+              <a:t>2,900</a:t>
+            </a:r>
+            <a:r>
+              <a:rPr lang="ko-KR" altLang="en-US" sz="1200" dirty="0">
+                <a:solidFill>
+                  <a:srgbClr val="6B7A85"/>
+                </a:solidFill>
+                <a:latin typeface="맑은 고딕" pitchFamily="34" charset="0"/>
+                <a:ea typeface="맑은 고딕" pitchFamily="34" charset="-122"/>
+                <a:cs typeface="맑은 고딕" pitchFamily="34" charset="-120"/>
+              </a:rPr>
+              <a:t>원 결제 시</a:t>
+            </a:r>
+            <a:endParaRPr lang="en-US" sz="1200" dirty="0"/>
+          </a:p>
+        </p:txBody>
+      </p:sp>
+      <p:sp>
+        <p:nvSpPr>
+          <p:cNvPr id="20" name="Text 3">
+            <a:extLst>
+              <a:ext uri="{FF2B5EF4-FFF2-40B4-BE49-F238E27FC236}">
+                <a16:creationId xmlns:a16="http://schemas.microsoft.com/office/drawing/2014/main" id="{DA46B4E8-66E5-5845-7E0F-11B4F4296BE0}"/>
+              </a:ext>
+            </a:extLst>
+          </p:cNvPr>
+          <p:cNvSpPr/>
+          <p:nvPr/>
+        </p:nvSpPr>
+        <p:spPr>
+          <a:xfrm>
+            <a:off x="3808850" y="1790133"/>
+            <a:ext cx="3474158" cy="310896"/>
+          </a:xfrm>
+          <a:prstGeom prst="rect">
+            <a:avLst/>
+          </a:prstGeom>
+          <a:noFill/>
+          <a:ln/>
+        </p:spPr>
+        <p:txBody>
+          <a:bodyPr wrap="square" lIns="0" tIns="0" rIns="0" bIns="0" rtlCol="0" anchor="ctr"/>
+          <a:lstStyle/>
+          <a:p>
+            <a:pPr marL="0" indent="0" algn="l">
+              <a:buNone/>
+            </a:pPr>
+            <a:r>
+              <a:rPr lang="en-US" sz="1200" dirty="0">
+                <a:solidFill>
+                  <a:srgbClr val="6B7A85"/>
+                </a:solidFill>
+                <a:latin typeface="맑은 고딕" pitchFamily="34" charset="0"/>
+                <a:ea typeface="맑은 고딕" pitchFamily="34" charset="-122"/>
+                <a:cs typeface="맑은 고딕" pitchFamily="34" charset="-120"/>
+              </a:rPr>
+              <a:t>9,900</a:t>
+            </a:r>
+            <a:r>
+              <a:rPr lang="ko-KR" altLang="en-US" sz="1200" dirty="0">
+                <a:solidFill>
+                  <a:srgbClr val="6B7A85"/>
+                </a:solidFill>
+                <a:latin typeface="맑은 고딕" pitchFamily="34" charset="0"/>
+                <a:ea typeface="맑은 고딕" pitchFamily="34" charset="-122"/>
+                <a:cs typeface="맑은 고딕" pitchFamily="34" charset="-120"/>
+              </a:rPr>
+              <a:t>원 결제 시</a:t>
+            </a:r>
+            <a:r>
+              <a:rPr lang="en-US" altLang="ko-KR" sz="1200" dirty="0">
+                <a:solidFill>
+                  <a:srgbClr val="6B7A85"/>
+                </a:solidFill>
+                <a:latin typeface="맑은 고딕" pitchFamily="34" charset="0"/>
+                <a:ea typeface="맑은 고딕" pitchFamily="34" charset="-122"/>
+                <a:cs typeface="맑은 고딕" pitchFamily="34" charset="-120"/>
+              </a:rPr>
+              <a:t>(15</a:t>
+            </a:r>
+            <a:r>
+              <a:rPr lang="ko-KR" altLang="en-US" sz="1200" dirty="0">
+                <a:solidFill>
+                  <a:srgbClr val="6B7A85"/>
+                </a:solidFill>
+                <a:latin typeface="맑은 고딕" pitchFamily="34" charset="0"/>
+                <a:ea typeface="맑은 고딕" pitchFamily="34" charset="-122"/>
+                <a:cs typeface="맑은 고딕" pitchFamily="34" charset="-120"/>
+              </a:rPr>
+              <a:t>페이지 이상의 </a:t>
+            </a:r>
+            <a:r>
+              <a:rPr lang="en-US" altLang="ko-KR" sz="1200" dirty="0">
+                <a:solidFill>
+                  <a:srgbClr val="6B7A85"/>
+                </a:solidFill>
+                <a:latin typeface="맑은 고딕" pitchFamily="34" charset="0"/>
+                <a:ea typeface="맑은 고딕" pitchFamily="34" charset="-122"/>
+                <a:cs typeface="맑은 고딕" pitchFamily="34" charset="-120"/>
+              </a:rPr>
+              <a:t>pdf </a:t>
+            </a:r>
+            <a:r>
+              <a:rPr lang="ko-KR" altLang="en-US" sz="1200" dirty="0">
+                <a:solidFill>
+                  <a:srgbClr val="6B7A85"/>
+                </a:solidFill>
+                <a:latin typeface="맑은 고딕" pitchFamily="34" charset="0"/>
+                <a:ea typeface="맑은 고딕" pitchFamily="34" charset="-122"/>
+                <a:cs typeface="맑은 고딕" pitchFamily="34" charset="-120"/>
+              </a:rPr>
+              <a:t>문서 제공</a:t>
+            </a:r>
+            <a:r>
+              <a:rPr lang="en-US" altLang="ko-KR" sz="1200" dirty="0">
+                <a:solidFill>
+                  <a:srgbClr val="6B7A85"/>
+                </a:solidFill>
+                <a:latin typeface="맑은 고딕" pitchFamily="34" charset="0"/>
+                <a:ea typeface="맑은 고딕" pitchFamily="34" charset="-122"/>
+                <a:cs typeface="맑은 고딕" pitchFamily="34" charset="-120"/>
+              </a:rPr>
+              <a:t>)</a:t>
+            </a:r>
+            <a:endParaRPr lang="en-US" sz="1200" dirty="0"/>
+          </a:p>
+        </p:txBody>
+      </p:sp>
+      <p:pic>
+        <p:nvPicPr>
+          <p:cNvPr id="22" name="그림 21">
+            <a:extLst>
+              <a:ext uri="{FF2B5EF4-FFF2-40B4-BE49-F238E27FC236}">
+                <a16:creationId xmlns:a16="http://schemas.microsoft.com/office/drawing/2014/main" id="{B5FD1CE5-73F1-C2AD-094D-E5CACD5AB436}"/>
+              </a:ext>
+            </a:extLst>
+          </p:cNvPr>
+          <p:cNvPicPr>
+            <a:picLocks noChangeAspect="1"/>
+          </p:cNvPicPr>
+          <p:nvPr/>
+        </p:nvPicPr>
+        <p:blipFill>
+          <a:blip r:embed="rId6"/>
+          <a:stretch>
+            <a:fillRect/>
+          </a:stretch>
+        </p:blipFill>
+        <p:spPr>
+          <a:xfrm>
+            <a:off x="6658618" y="3479070"/>
+            <a:ext cx="1389958" cy="1919793"/>
+          </a:xfrm>
+          <a:prstGeom prst="rect">
+            <a:avLst/>
+          </a:prstGeom>
+        </p:spPr>
+      </p:pic>
+      <p:pic>
+        <p:nvPicPr>
+          <p:cNvPr id="24" name="그림 23">
+            <a:extLst>
+              <a:ext uri="{FF2B5EF4-FFF2-40B4-BE49-F238E27FC236}">
+                <a16:creationId xmlns:a16="http://schemas.microsoft.com/office/drawing/2014/main" id="{E1AA4C56-8E16-1B55-3048-30F27DE66E90}"/>
+              </a:ext>
+            </a:extLst>
+          </p:cNvPr>
+          <p:cNvPicPr>
+            <a:picLocks noChangeAspect="1"/>
+          </p:cNvPicPr>
+          <p:nvPr/>
+        </p:nvPicPr>
+        <p:blipFill>
+          <a:blip r:embed="rId7"/>
+          <a:stretch>
+            <a:fillRect/>
+          </a:stretch>
+        </p:blipFill>
+        <p:spPr>
+          <a:xfrm>
+            <a:off x="6785352" y="4559400"/>
+            <a:ext cx="1357568" cy="1919793"/>
+          </a:xfrm>
+          <a:prstGeom prst="rect">
+            <a:avLst/>
+          </a:prstGeom>
+        </p:spPr>
+      </p:pic>
     </p:spTree>
   </p:cSld>
   <p:clrMapOvr>
@@ -10483,4 +11336,319 @@
     </a:ext>
   </a:extLst>
 </a:theme>
+</file>
+
+<file path=ppt/theme/theme2.xml><?xml version="1.0" encoding="utf-8"?>
+<a:theme xmlns:a="http://schemas.openxmlformats.org/drawingml/2006/main" name="Office 테마">
+  <a:themeElements>
+    <a:clrScheme name="Office">
+      <a:dk1>
+        <a:sysClr val="windowText" lastClr="000000"/>
+      </a:dk1>
+      <a:lt1>
+        <a:sysClr val="window" lastClr="FFFFFF"/>
+      </a:lt1>
+      <a:dk2>
+        <a:srgbClr val="0E2841"/>
+      </a:dk2>
+      <a:lt2>
+        <a:srgbClr val="E8E8E8"/>
+      </a:lt2>
+      <a:accent1>
+        <a:srgbClr val="156082"/>
+      </a:accent1>
+      <a:accent2>
+        <a:srgbClr val="E97132"/>
+      </a:accent2>
+      <a:accent3>
+        <a:srgbClr val="196B24"/>
+      </a:accent3>
+      <a:accent4>
+        <a:srgbClr val="0F9ED5"/>
+      </a:accent4>
+      <a:accent5>
+        <a:srgbClr val="A02B93"/>
+      </a:accent5>
+      <a:accent6>
+        <a:srgbClr val="4EA72E"/>
+      </a:accent6>
+      <a:hlink>
+        <a:srgbClr val="467886"/>
+      </a:hlink>
+      <a:folHlink>
+        <a:srgbClr val="96607D"/>
+      </a:folHlink>
+    </a:clrScheme>
+    <a:fontScheme name="Office">
+      <a:majorFont>
+        <a:latin typeface="맑은 고딕" panose="02110004020202020204"/>
+        <a:ea typeface=""/>
+        <a:cs typeface=""/>
+        <a:font script="Jpan" typeface="游ゴシック Light"/>
+        <a:font script="Hang" typeface="맑은 고딕"/>
+        <a:font script="Hans" typeface="等线 Light"/>
+        <a:font script="Hant" typeface="新細明體"/>
+        <a:font script="Arab" typeface="Times New Roman"/>
+        <a:font script="Hebr" typeface="Times New Roman"/>
+        <a:font script="Thai" typeface="Angsana New"/>
+        <a:font script="Ethi" typeface="Nyala"/>
+        <a:font script="Beng" typeface="Vrinda"/>
+        <a:font script="Gujr" typeface="Shruti"/>
+        <a:font script="Khmr" typeface="MoolBoran"/>
+        <a:font script="Knda" typeface="Tunga"/>
+        <a:font script="Guru" typeface="Raavi"/>
+        <a:font script="Cans" typeface="Euphemia"/>
+        <a:font script="Cher" typeface="Plantagenet Cherokee"/>
+        <a:font script="Yiii" typeface="Microsoft Yi Baiti"/>
+        <a:font script="Tibt" typeface="Microsoft Himalaya"/>
+        <a:font script="Thaa" typeface="MV Boli"/>
+        <a:font script="Deva" typeface="Mangal"/>
+        <a:font script="Telu" typeface="Gautami"/>
+        <a:font script="Taml" typeface="Latha"/>
+        <a:font script="Syrc" typeface="Estrangelo Edessa"/>
+        <a:font script="Orya" typeface="Kalinga"/>
+        <a:font script="Mlym" typeface="Kartika"/>
+        <a:font script="Laoo" typeface="DokChampa"/>
+        <a:font script="Sinh" typeface="Iskoola Pota"/>
+        <a:font script="Mong" typeface="Mongolian Baiti"/>
+        <a:font script="Viet" typeface="Times New Roman"/>
+        <a:font script="Uigh" typeface="Microsoft Uighur"/>
+        <a:font script="Geor" typeface="Sylfaen"/>
+        <a:font script="Armn" typeface="Arial"/>
+        <a:font script="Bugi" typeface="Leelawadee UI"/>
+        <a:font script="Bopo" typeface="Microsoft JhengHei"/>
+        <a:font script="Java" typeface="Javanese Text"/>
+        <a:font script="Lisu" typeface="Segoe UI"/>
+        <a:font script="Mymr" typeface="Myanmar Text"/>
+        <a:font script="Nkoo" typeface="Ebrima"/>
+        <a:font script="Olck" typeface="Nirmala UI"/>
+        <a:font script="Osma" typeface="Ebrima"/>
+        <a:font script="Phag" typeface="Phagspa"/>
+        <a:font script="Syrn" typeface="Estrangelo Edessa"/>
+        <a:font script="Syrj" typeface="Estrangelo Edessa"/>
+        <a:font script="Syre" typeface="Estrangelo Edessa"/>
+        <a:font script="Sora" typeface="Nirmala UI"/>
+        <a:font script="Tale" typeface="Microsoft Tai Le"/>
+        <a:font script="Talu" typeface="Microsoft New Tai Lue"/>
+        <a:font script="Tfng" typeface="Ebrima"/>
+      </a:majorFont>
+      <a:minorFont>
+        <a:latin typeface="맑은 고딕" panose="02110004020202020204"/>
+        <a:ea typeface=""/>
+        <a:cs typeface=""/>
+        <a:font script="Jpan" typeface="游ゴシック"/>
+        <a:font script="Hang" typeface="맑은 고딕"/>
+        <a:font script="Hans" typeface="等线"/>
+        <a:font script="Hant" typeface="新細明體"/>
+        <a:font script="Arab" typeface="Arial"/>
+        <a:font script="Hebr" typeface="Arial"/>
+        <a:font script="Thai" typeface="Cordia New"/>
+        <a:font script="Ethi" typeface="Nyala"/>
+        <a:font script="Beng" typeface="Vrinda"/>
+        <a:font script="Gujr" typeface="Shruti"/>
+        <a:font script="Khmr" typeface="DaunPenh"/>
+        <a:font script="Knda" typeface="Tunga"/>
+        <a:font script="Guru" typeface="Raavi"/>
+        <a:font script="Cans" typeface="Euphemia"/>
+        <a:font script="Cher" typeface="Plantagenet Cherokee"/>
+        <a:font script="Yiii" typeface="Microsoft Yi Baiti"/>
+        <a:font script="Tibt" typeface="Microsoft Himalaya"/>
+        <a:font script="Thaa" typeface="MV Boli"/>
+        <a:font script="Deva" typeface="Mangal"/>
+        <a:font script="Telu" typeface="Gautami"/>
+        <a:font script="Taml" typeface="Latha"/>
+        <a:font script="Syrc" typeface="Estrangelo Edessa"/>
+        <a:font script="Orya" typeface="Kalinga"/>
+        <a:font script="Mlym" typeface="Kartika"/>
+        <a:font script="Laoo" typeface="DokChampa"/>
+        <a:font script="Sinh" typeface="Iskoola Pota"/>
+        <a:font script="Mong" typeface="Mongolian Baiti"/>
+        <a:font script="Viet" typeface="Arial"/>
+        <a:font script="Uigh" typeface="Microsoft Uighur"/>
+        <a:font script="Geor" typeface="Sylfaen"/>
+        <a:font script="Armn" typeface="Arial"/>
+        <a:font script="Bugi" typeface="Leelawadee UI"/>
+        <a:font script="Bopo" typeface="Microsoft JhengHei"/>
+        <a:font script="Java" typeface="Javanese Text"/>
+        <a:font script="Lisu" typeface="Segoe UI"/>
+        <a:font script="Mymr" typeface="Myanmar Text"/>
+        <a:font script="Nkoo" typeface="Ebrima"/>
+        <a:font script="Olck" typeface="Nirmala UI"/>
+        <a:font script="Osma" typeface="Ebrima"/>
+        <a:font script="Phag" typeface="Phagspa"/>
+        <a:font script="Syrn" typeface="Estrangelo Edessa"/>
+        <a:font script="Syrj" typeface="Estrangelo Edessa"/>
+        <a:font script="Syre" typeface="Estrangelo Edessa"/>
+        <a:font script="Sora" typeface="Nirmala UI"/>
+        <a:font script="Tale" typeface="Microsoft Tai Le"/>
+        <a:font script="Talu" typeface="Microsoft New Tai Lue"/>
+        <a:font script="Tfng" typeface="Ebrima"/>
+      </a:minorFont>
+    </a:fontScheme>
+    <a:fmtScheme name="Office">
+      <a:fillStyleLst>
+        <a:solidFill>
+          <a:schemeClr val="phClr"/>
+        </a:solidFill>
+        <a:gradFill rotWithShape="1">
+          <a:gsLst>
+            <a:gs pos="0">
+              <a:schemeClr val="phClr">
+                <a:lumMod val="110000"/>
+                <a:satMod val="105000"/>
+                <a:tint val="67000"/>
+              </a:schemeClr>
+            </a:gs>
+            <a:gs pos="50000">
+              <a:schemeClr val="phClr">
+                <a:lumMod val="105000"/>
+                <a:satMod val="103000"/>
+                <a:tint val="73000"/>
+              </a:schemeClr>
+            </a:gs>
+            <a:gs pos="100000">
+              <a:schemeClr val="phClr">
+                <a:lumMod val="105000"/>
+                <a:satMod val="109000"/>
+                <a:tint val="81000"/>
+              </a:schemeClr>
+            </a:gs>
+          </a:gsLst>
+          <a:lin ang="5400000" scaled="0"/>
+        </a:gradFill>
+        <a:gradFill rotWithShape="1">
+          <a:gsLst>
+            <a:gs pos="0">
+              <a:schemeClr val="phClr">
+                <a:satMod val="103000"/>
+                <a:lumMod val="102000"/>
+                <a:tint val="94000"/>
+              </a:schemeClr>
+            </a:gs>
+            <a:gs pos="50000">
+              <a:schemeClr val="phClr">
+                <a:satMod val="110000"/>
+                <a:lumMod val="100000"/>
+                <a:shade val="100000"/>
+              </a:schemeClr>
+            </a:gs>
+            <a:gs pos="100000">
+              <a:schemeClr val="phClr">
+                <a:lumMod val="99000"/>
+                <a:satMod val="120000"/>
+                <a:shade val="78000"/>
+              </a:schemeClr>
+            </a:gs>
+          </a:gsLst>
+          <a:lin ang="5400000" scaled="0"/>
+        </a:gradFill>
+      </a:fillStyleLst>
+      <a:lnStyleLst>
+        <a:ln w="12700" cap="flat" cmpd="sng" algn="ctr">
+          <a:solidFill>
+            <a:schemeClr val="phClr"/>
+          </a:solidFill>
+          <a:prstDash val="solid"/>
+          <a:miter lim="800000"/>
+        </a:ln>
+        <a:ln w="19050" cap="flat" cmpd="sng" algn="ctr">
+          <a:solidFill>
+            <a:schemeClr val="phClr"/>
+          </a:solidFill>
+          <a:prstDash val="solid"/>
+          <a:miter lim="800000"/>
+        </a:ln>
+        <a:ln w="25400" cap="flat" cmpd="sng" algn="ctr">
+          <a:solidFill>
+            <a:schemeClr val="phClr"/>
+          </a:solidFill>
+          <a:prstDash val="solid"/>
+          <a:miter lim="800000"/>
+        </a:ln>
+      </a:lnStyleLst>
+      <a:effectStyleLst>
+        <a:effectStyle>
+          <a:effectLst/>
+        </a:effectStyle>
+        <a:effectStyle>
+          <a:effectLst/>
+        </a:effectStyle>
+        <a:effectStyle>
+          <a:effectLst>
+            <a:outerShdw blurRad="57150" dist="19050" dir="5400000" algn="ctr" rotWithShape="0">
+              <a:srgbClr val="000000">
+                <a:alpha val="63000"/>
+              </a:srgbClr>
+            </a:outerShdw>
+          </a:effectLst>
+        </a:effectStyle>
+      </a:effectStyleLst>
+      <a:bgFillStyleLst>
+        <a:solidFill>
+          <a:schemeClr val="phClr"/>
+        </a:solidFill>
+        <a:solidFill>
+          <a:schemeClr val="phClr">
+            <a:tint val="95000"/>
+            <a:satMod val="170000"/>
+          </a:schemeClr>
+        </a:solidFill>
+        <a:gradFill rotWithShape="1">
+          <a:gsLst>
+            <a:gs pos="0">
+              <a:schemeClr val="phClr">
+                <a:tint val="93000"/>
+                <a:satMod val="150000"/>
+                <a:shade val="98000"/>
+                <a:lumMod val="102000"/>
+              </a:schemeClr>
+            </a:gs>
+            <a:gs pos="50000">
+              <a:schemeClr val="phClr">
+                <a:tint val="98000"/>
+                <a:satMod val="130000"/>
+                <a:shade val="90000"/>
+                <a:lumMod val="103000"/>
+              </a:schemeClr>
+            </a:gs>
+            <a:gs pos="100000">
+              <a:schemeClr val="phClr">
+                <a:shade val="63000"/>
+                <a:satMod val="120000"/>
+              </a:schemeClr>
+            </a:gs>
+          </a:gsLst>
+          <a:lin ang="5400000" scaled="0"/>
+        </a:gradFill>
+      </a:bgFillStyleLst>
+    </a:fmtScheme>
+  </a:themeElements>
+  <a:objectDefaults>
+    <a:lnDef>
+      <a:spPr/>
+      <a:bodyPr/>
+      <a:lstStyle/>
+      <a:style>
+        <a:lnRef idx="2">
+          <a:schemeClr val="accent1"/>
+        </a:lnRef>
+        <a:fillRef idx="0">
+          <a:schemeClr val="accent1"/>
+        </a:fillRef>
+        <a:effectRef idx="1">
+          <a:schemeClr val="accent1"/>
+        </a:effectRef>
+        <a:fontRef idx="minor">
+          <a:schemeClr val="tx1"/>
+        </a:fontRef>
+      </a:style>
+    </a:lnDef>
+  </a:objectDefaults>
+  <a:extraClrSchemeLst/>
+  <a:extLst>
+    <a:ext uri="{05A4C25C-085E-4340-85A3-A5531E510DB2}">
+      <thm15:themeFamily xmlns:thm15="http://schemas.microsoft.com/office/thememl/2012/main" name="Office Theme" id="{2E142A2C-CD16-42D6-873A-C26D2A0506FA}" vid="{1BDDFF52-6CD6-40A5-AB3C-68EB2F1E4D0A}"/>
+    </a:ext>
+  </a:extLst>
+</a:theme>
 </file>